--- a/public/pitch/HUNI-Pitch-Deck-Lengkap.pptx
+++ b/public/pitch/HUNI-Pitch-Deck-Lengkap.pptx
@@ -26,6 +26,10 @@
     <p:sldId id="270" r:id="rId19"/>
     <p:sldId id="271" r:id="rId20"/>
     <p:sldId id="272" r:id="rId21"/>
+    <p:sldId id="286" r:id="rId37"/>
+    <p:sldId id="287" r:id="rId38"/>
+    <p:sldId id="288" r:id="rId39"/>
+    <p:sldId id="289" r:id="rId40"/>
     <p:sldId id="273" r:id="rId22"/>
     <p:sldId id="274" r:id="rId23"/>
     <p:sldId id="275" r:id="rId24"/>
@@ -4600,6 +4604,10 @@
             <a:srgbClr val="1A1814"/>
           </a:solidFill>
         </p:spPr>
+        <p:txBody>
+          <a:bodyPr/>
+          <a:p/>
+        </p:txBody>
       </p:sp>
       <p:pic>
         <p:nvPicPr>
@@ -4644,6 +4652,10 @@
             <a:srgbClr val="C4622D"/>
           </a:solidFill>
         </p:spPr>
+        <p:txBody>
+          <a:bodyPr/>
+          <a:p/>
+        </p:txBody>
       </p:sp>
       <p:sp>
         <p:nvSpPr>
@@ -4874,6 +4886,10 @@
             <a:srgbClr val="F4EFE6"/>
           </a:solidFill>
         </p:spPr>
+        <p:txBody>
+          <a:bodyPr/>
+          <a:p/>
+        </p:txBody>
       </p:sp>
       <p:sp>
         <p:nvSpPr>
@@ -4893,6 +4909,10 @@
             <a:srgbClr val="C4622D"/>
           </a:solidFill>
         </p:spPr>
+        <p:txBody>
+          <a:bodyPr/>
+          <a:p/>
+        </p:txBody>
       </p:sp>
       <p:sp>
         <p:nvSpPr>
@@ -4912,6 +4932,10 @@
             <a:srgbClr val="1A1814"/>
           </a:solidFill>
         </p:spPr>
+        <p:txBody>
+          <a:bodyPr/>
+          <a:p/>
+        </p:txBody>
       </p:sp>
       <p:sp>
         <p:nvSpPr>
@@ -4983,7 +5007,7 @@
                 <a:ea typeface="Calibri" panose="020F0502020204030204" pitchFamily="34" charset="-122"/>
                 <a:cs typeface="Calibri" panose="020F0502020204030204" pitchFamily="34" charset="-120"/>
               </a:rPr>
-              <a:t>10  /  28</a:t>
+              <a:t>10  /  33</a:t>
             </a:r>
             <a:endParaRPr lang="en-US" sz="1100" dirty="0"/>
           </a:p>
@@ -5091,6 +5115,10 @@
             <a:prstDash val="solid"/>
           </a:ln>
         </p:spPr>
+        <p:txBody>
+          <a:bodyPr/>
+          <a:p/>
+        </p:txBody>
       </p:sp>
       <p:sp>
         <p:nvSpPr>
@@ -5118,6 +5146,10 @@
             <a:prstDash val="solid"/>
           </a:ln>
         </p:spPr>
+        <p:txBody>
+          <a:bodyPr/>
+          <a:p/>
+        </p:txBody>
       </p:sp>
       <p:sp>
         <p:nvSpPr>
@@ -5846,6 +5878,10 @@
             <a:srgbClr val="F4EFE6"/>
           </a:solidFill>
         </p:spPr>
+        <p:txBody>
+          <a:bodyPr/>
+          <a:p/>
+        </p:txBody>
       </p:sp>
       <p:sp>
         <p:nvSpPr>
@@ -5865,6 +5901,10 @@
             <a:srgbClr val="C4622D"/>
           </a:solidFill>
         </p:spPr>
+        <p:txBody>
+          <a:bodyPr/>
+          <a:p/>
+        </p:txBody>
       </p:sp>
       <p:sp>
         <p:nvSpPr>
@@ -5884,6 +5924,10 @@
             <a:srgbClr val="1A1814"/>
           </a:solidFill>
         </p:spPr>
+        <p:txBody>
+          <a:bodyPr/>
+          <a:p/>
+        </p:txBody>
       </p:sp>
       <p:sp>
         <p:nvSpPr>
@@ -5955,7 +5999,7 @@
                 <a:ea typeface="Calibri" panose="020F0502020204030204" pitchFamily="34" charset="-122"/>
                 <a:cs typeface="Calibri" panose="020F0502020204030204" pitchFamily="34" charset="-120"/>
               </a:rPr>
-              <a:t>11  /  28</a:t>
+              <a:t>11  /  33</a:t>
             </a:r>
             <a:endParaRPr lang="en-US" sz="1100" dirty="0"/>
           </a:p>
@@ -6063,6 +6107,10 @@
             <a:prstDash val="solid"/>
           </a:ln>
         </p:spPr>
+        <p:txBody>
+          <a:bodyPr/>
+          <a:p/>
+        </p:txBody>
       </p:sp>
       <p:sp>
         <p:nvSpPr>
@@ -6221,6 +6269,10 @@
             <a:prstDash val="solid"/>
           </a:ln>
         </p:spPr>
+        <p:txBody>
+          <a:bodyPr/>
+          <a:p/>
+        </p:txBody>
       </p:sp>
       <p:sp>
         <p:nvSpPr>
@@ -6379,6 +6431,10 @@
             <a:prstDash val="solid"/>
           </a:ln>
         </p:spPr>
+        <p:txBody>
+          <a:bodyPr/>
+          <a:p/>
+        </p:txBody>
       </p:sp>
       <p:sp>
         <p:nvSpPr>
@@ -6592,6 +6648,10 @@
             <a:srgbClr val="F4EFE6"/>
           </a:solidFill>
         </p:spPr>
+        <p:txBody>
+          <a:bodyPr/>
+          <a:p/>
+        </p:txBody>
       </p:sp>
       <p:sp>
         <p:nvSpPr>
@@ -6611,6 +6671,10 @@
             <a:srgbClr val="C4622D"/>
           </a:solidFill>
         </p:spPr>
+        <p:txBody>
+          <a:bodyPr/>
+          <a:p/>
+        </p:txBody>
       </p:sp>
       <p:sp>
         <p:nvSpPr>
@@ -6630,6 +6694,10 @@
             <a:srgbClr val="1A1814"/>
           </a:solidFill>
         </p:spPr>
+        <p:txBody>
+          <a:bodyPr/>
+          <a:p/>
+        </p:txBody>
       </p:sp>
       <p:sp>
         <p:nvSpPr>
@@ -6701,7 +6769,7 @@
                 <a:ea typeface="Calibri" panose="020F0502020204030204" pitchFamily="34" charset="-122"/>
                 <a:cs typeface="Calibri" panose="020F0502020204030204" pitchFamily="34" charset="-120"/>
               </a:rPr>
-              <a:t>12  /  28</a:t>
+              <a:t>12  /  33</a:t>
             </a:r>
             <a:endParaRPr lang="en-US" sz="1100" dirty="0"/>
           </a:p>
@@ -8304,6 +8372,10 @@
             <a:srgbClr val="F4EFE6"/>
           </a:solidFill>
         </p:spPr>
+        <p:txBody>
+          <a:bodyPr/>
+          <a:p/>
+        </p:txBody>
       </p:sp>
       <p:sp>
         <p:nvSpPr>
@@ -8323,6 +8395,10 @@
             <a:srgbClr val="C4622D"/>
           </a:solidFill>
         </p:spPr>
+        <p:txBody>
+          <a:bodyPr/>
+          <a:p/>
+        </p:txBody>
       </p:sp>
       <p:sp>
         <p:nvSpPr>
@@ -8342,6 +8418,10 @@
             <a:srgbClr val="1A1814"/>
           </a:solidFill>
         </p:spPr>
+        <p:txBody>
+          <a:bodyPr/>
+          <a:p/>
+        </p:txBody>
       </p:sp>
       <p:sp>
         <p:nvSpPr>
@@ -8413,7 +8493,7 @@
                 <a:ea typeface="Calibri" panose="020F0502020204030204" pitchFamily="34" charset="-122"/>
                 <a:cs typeface="Calibri" panose="020F0502020204030204" pitchFamily="34" charset="-120"/>
               </a:rPr>
-              <a:t>13  /  28</a:t>
+              <a:t>13  /  33</a:t>
             </a:r>
             <a:endParaRPr lang="en-US" sz="1100" dirty="0"/>
           </a:p>
@@ -9711,6 +9791,10 @@
             <a:srgbClr val="F4EFE6"/>
           </a:solidFill>
         </p:spPr>
+        <p:txBody>
+          <a:bodyPr/>
+          <a:p/>
+        </p:txBody>
       </p:sp>
       <p:sp>
         <p:nvSpPr>
@@ -9730,6 +9814,10 @@
             <a:srgbClr val="C4622D"/>
           </a:solidFill>
         </p:spPr>
+        <p:txBody>
+          <a:bodyPr/>
+          <a:p/>
+        </p:txBody>
       </p:sp>
       <p:sp>
         <p:nvSpPr>
@@ -9749,6 +9837,10 @@
             <a:srgbClr val="1A1814"/>
           </a:solidFill>
         </p:spPr>
+        <p:txBody>
+          <a:bodyPr/>
+          <a:p/>
+        </p:txBody>
       </p:sp>
       <p:sp>
         <p:nvSpPr>
@@ -9820,7 +9912,7 @@
                 <a:ea typeface="Calibri" panose="020F0502020204030204" pitchFamily="34" charset="-122"/>
                 <a:cs typeface="Calibri" panose="020F0502020204030204" pitchFamily="34" charset="-120"/>
               </a:rPr>
-              <a:t>14  /  28</a:t>
+              <a:t>14  /  33</a:t>
             </a:r>
             <a:endParaRPr lang="en-US" sz="1100" dirty="0"/>
           </a:p>
@@ -10878,6 +10970,10 @@
             <a:prstDash val="solid"/>
           </a:ln>
         </p:spPr>
+        <p:txBody>
+          <a:bodyPr/>
+          <a:p/>
+        </p:txBody>
       </p:sp>
       <p:sp>
         <p:nvSpPr>
@@ -11017,6 +11113,10 @@
             <a:srgbClr val="F4EFE6"/>
           </a:solidFill>
         </p:spPr>
+        <p:txBody>
+          <a:bodyPr/>
+          <a:p/>
+        </p:txBody>
       </p:sp>
       <p:sp>
         <p:nvSpPr>
@@ -11036,6 +11136,10 @@
             <a:srgbClr val="C4622D"/>
           </a:solidFill>
         </p:spPr>
+        <p:txBody>
+          <a:bodyPr/>
+          <a:p/>
+        </p:txBody>
       </p:sp>
       <p:sp>
         <p:nvSpPr>
@@ -11055,6 +11159,10 @@
             <a:srgbClr val="1A1814"/>
           </a:solidFill>
         </p:spPr>
+        <p:txBody>
+          <a:bodyPr/>
+          <a:p/>
+        </p:txBody>
       </p:sp>
       <p:sp>
         <p:nvSpPr>
@@ -11126,7 +11234,7 @@
                 <a:ea typeface="Calibri" panose="020F0502020204030204" pitchFamily="34" charset="-122"/>
                 <a:cs typeface="Calibri" panose="020F0502020204030204" pitchFamily="34" charset="-120"/>
               </a:rPr>
-              <a:t>15  /  28</a:t>
+              <a:t>15  /  33</a:t>
             </a:r>
             <a:endParaRPr lang="en-US" sz="1100" dirty="0"/>
           </a:p>
@@ -12019,6 +12127,10 @@
             <a:srgbClr val="F4EFE6"/>
           </a:solidFill>
         </p:spPr>
+        <p:txBody>
+          <a:bodyPr/>
+          <a:p/>
+        </p:txBody>
       </p:sp>
       <p:sp>
         <p:nvSpPr>
@@ -12038,6 +12150,10 @@
             <a:srgbClr val="C4622D"/>
           </a:solidFill>
         </p:spPr>
+        <p:txBody>
+          <a:bodyPr/>
+          <a:p/>
+        </p:txBody>
       </p:sp>
       <p:sp>
         <p:nvSpPr>
@@ -12057,6 +12173,10 @@
             <a:srgbClr val="1A1814"/>
           </a:solidFill>
         </p:spPr>
+        <p:txBody>
+          <a:bodyPr/>
+          <a:p/>
+        </p:txBody>
       </p:sp>
       <p:sp>
         <p:nvSpPr>
@@ -12128,7 +12248,7 @@
                 <a:ea typeface="Calibri" panose="020F0502020204030204" pitchFamily="34" charset="-122"/>
                 <a:cs typeface="Calibri" panose="020F0502020204030204" pitchFamily="34" charset="-120"/>
               </a:rPr>
-              <a:t>16  /  28</a:t>
+              <a:t>16  /  33</a:t>
             </a:r>
             <a:endParaRPr lang="en-US" sz="1100" dirty="0"/>
           </a:p>
@@ -12236,6 +12356,10 @@
             <a:prstDash val="solid"/>
           </a:ln>
         </p:spPr>
+        <p:txBody>
+          <a:bodyPr/>
+          <a:p/>
+        </p:txBody>
       </p:sp>
       <p:sp>
         <p:nvSpPr>
@@ -12342,6 +12466,10 @@
             <a:prstDash val="solid"/>
           </a:ln>
         </p:spPr>
+        <p:txBody>
+          <a:bodyPr/>
+          <a:p/>
+        </p:txBody>
       </p:sp>
       <p:sp>
         <p:nvSpPr>
@@ -12365,6 +12493,10 @@
             <a:prstDash val="solid"/>
           </a:ln>
         </p:spPr>
+        <p:txBody>
+          <a:bodyPr/>
+          <a:p/>
+        </p:txBody>
       </p:sp>
       <p:sp>
         <p:nvSpPr>
@@ -12388,6 +12520,10 @@
             <a:prstDash val="solid"/>
           </a:ln>
         </p:spPr>
+        <p:txBody>
+          <a:bodyPr/>
+          <a:p/>
+        </p:txBody>
       </p:sp>
       <p:sp>
         <p:nvSpPr>
@@ -12411,6 +12547,10 @@
             <a:prstDash val="solid"/>
           </a:ln>
         </p:spPr>
+        <p:txBody>
+          <a:bodyPr/>
+          <a:p/>
+        </p:txBody>
       </p:sp>
       <p:sp>
         <p:nvSpPr>
@@ -12438,6 +12578,10 @@
             <a:prstDash val="solid"/>
           </a:ln>
         </p:spPr>
+        <p:txBody>
+          <a:bodyPr/>
+          <a:p/>
+        </p:txBody>
       </p:sp>
       <p:sp>
         <p:nvSpPr>
@@ -12581,6 +12725,10 @@
             <a:prstDash val="solid"/>
           </a:ln>
         </p:spPr>
+        <p:txBody>
+          <a:bodyPr/>
+          <a:p/>
+        </p:txBody>
       </p:sp>
       <p:sp>
         <p:nvSpPr>
@@ -12691,6 +12839,10 @@
             <a:prstDash val="solid"/>
           </a:ln>
         </p:spPr>
+        <p:txBody>
+          <a:bodyPr/>
+          <a:p/>
+        </p:txBody>
       </p:sp>
       <p:sp>
         <p:nvSpPr>
@@ -12714,6 +12866,10 @@
             <a:prstDash val="solid"/>
           </a:ln>
         </p:spPr>
+        <p:txBody>
+          <a:bodyPr/>
+          <a:p/>
+        </p:txBody>
       </p:sp>
       <p:sp>
         <p:nvSpPr>
@@ -12737,6 +12893,10 @@
             <a:prstDash val="solid"/>
           </a:ln>
         </p:spPr>
+        <p:txBody>
+          <a:bodyPr/>
+          <a:p/>
+        </p:txBody>
       </p:sp>
       <p:sp>
         <p:nvSpPr>
@@ -12764,6 +12924,10 @@
             <a:prstDash val="solid"/>
           </a:ln>
         </p:spPr>
+        <p:txBody>
+          <a:bodyPr/>
+          <a:p/>
+        </p:txBody>
       </p:sp>
       <p:sp>
         <p:nvSpPr>
@@ -12863,6 +13027,10 @@
             <a:prstDash val="solid"/>
           </a:ln>
         </p:spPr>
+        <p:txBody>
+          <a:bodyPr/>
+          <a:p/>
+        </p:txBody>
       </p:sp>
       <p:sp>
         <p:nvSpPr>
@@ -12890,6 +13058,10 @@
             <a:prstDash val="solid"/>
           </a:ln>
         </p:spPr>
+        <p:txBody>
+          <a:bodyPr/>
+          <a:p/>
+        </p:txBody>
       </p:sp>
       <p:sp>
         <p:nvSpPr>
@@ -12989,6 +13161,10 @@
             <a:prstDash val="solid"/>
           </a:ln>
         </p:spPr>
+        <p:txBody>
+          <a:bodyPr/>
+          <a:p/>
+        </p:txBody>
       </p:sp>
       <p:sp>
         <p:nvSpPr>
@@ -13016,6 +13192,10 @@
             <a:prstDash val="solid"/>
           </a:ln>
         </p:spPr>
+        <p:txBody>
+          <a:bodyPr/>
+          <a:p/>
+        </p:txBody>
       </p:sp>
       <p:sp>
         <p:nvSpPr>
@@ -13115,6 +13295,10 @@
             <a:prstDash val="solid"/>
           </a:ln>
         </p:spPr>
+        <p:txBody>
+          <a:bodyPr/>
+          <a:p/>
+        </p:txBody>
       </p:sp>
       <p:sp>
         <p:nvSpPr>
@@ -13142,6 +13326,10 @@
             <a:prstDash val="solid"/>
           </a:ln>
         </p:spPr>
+        <p:txBody>
+          <a:bodyPr/>
+          <a:p/>
+        </p:txBody>
       </p:sp>
       <p:sp>
         <p:nvSpPr>
@@ -13241,6 +13429,10 @@
             <a:prstDash val="solid"/>
           </a:ln>
         </p:spPr>
+        <p:txBody>
+          <a:bodyPr/>
+          <a:p/>
+        </p:txBody>
       </p:sp>
       <p:sp>
         <p:nvSpPr>
@@ -13268,6 +13460,10 @@
             <a:prstDash val="solid"/>
           </a:ln>
         </p:spPr>
+        <p:txBody>
+          <a:bodyPr/>
+          <a:p/>
+        </p:txBody>
       </p:sp>
       <p:sp>
         <p:nvSpPr>
@@ -13395,6 +13591,10 @@
             <a:srgbClr val="F4EFE6"/>
           </a:solidFill>
         </p:spPr>
+        <p:txBody>
+          <a:bodyPr/>
+          <a:p/>
+        </p:txBody>
       </p:sp>
       <p:sp>
         <p:nvSpPr>
@@ -13414,6 +13614,10 @@
             <a:srgbClr val="C4622D"/>
           </a:solidFill>
         </p:spPr>
+        <p:txBody>
+          <a:bodyPr/>
+          <a:p/>
+        </p:txBody>
       </p:sp>
       <p:sp>
         <p:nvSpPr>
@@ -13433,6 +13637,10 @@
             <a:srgbClr val="1A1814"/>
           </a:solidFill>
         </p:spPr>
+        <p:txBody>
+          <a:bodyPr/>
+          <a:p/>
+        </p:txBody>
       </p:sp>
       <p:sp>
         <p:nvSpPr>
@@ -13504,7 +13712,7 @@
                 <a:ea typeface="Calibri" panose="020F0502020204030204" pitchFamily="34" charset="-122"/>
                 <a:cs typeface="Calibri" panose="020F0502020204030204" pitchFamily="34" charset="-120"/>
               </a:rPr>
-              <a:t>17  /  28</a:t>
+              <a:t>17  /  33</a:t>
             </a:r>
             <a:endParaRPr lang="en-US" sz="1100" dirty="0"/>
           </a:p>
@@ -13612,6 +13820,10 @@
             <a:prstDash val="solid"/>
           </a:ln>
         </p:spPr>
+        <p:txBody>
+          <a:bodyPr/>
+          <a:p/>
+        </p:txBody>
       </p:sp>
       <p:sp>
         <p:nvSpPr>
@@ -13770,6 +13982,10 @@
             <a:prstDash val="solid"/>
           </a:ln>
         </p:spPr>
+        <p:txBody>
+          <a:bodyPr/>
+          <a:p/>
+        </p:txBody>
       </p:sp>
       <p:sp>
         <p:nvSpPr>
@@ -13928,6 +14144,10 @@
             <a:prstDash val="solid"/>
           </a:ln>
         </p:spPr>
+        <p:txBody>
+          <a:bodyPr/>
+          <a:p/>
+        </p:txBody>
       </p:sp>
       <p:sp>
         <p:nvSpPr>
@@ -14103,6 +14323,10 @@
             <a:srgbClr val="1A1814"/>
           </a:solidFill>
         </p:spPr>
+        <p:txBody>
+          <a:bodyPr/>
+          <a:p/>
+        </p:txBody>
       </p:sp>
       <p:sp>
         <p:nvSpPr>
@@ -14215,6 +14439,10 @@
             <a:srgbClr val="C4622D"/>
           </a:solidFill>
         </p:spPr>
+        <p:txBody>
+          <a:bodyPr/>
+          <a:p/>
+        </p:txBody>
       </p:sp>
       <p:sp>
         <p:nvSpPr>
@@ -14297,6 +14525,10 @@
             <a:srgbClr val="F4EFE6"/>
           </a:solidFill>
         </p:spPr>
+        <p:txBody>
+          <a:bodyPr/>
+          <a:p/>
+        </p:txBody>
       </p:sp>
       <p:sp>
         <p:nvSpPr>
@@ -14316,6 +14548,10 @@
             <a:srgbClr val="C4622D"/>
           </a:solidFill>
         </p:spPr>
+        <p:txBody>
+          <a:bodyPr/>
+          <a:p/>
+        </p:txBody>
       </p:sp>
       <p:sp>
         <p:nvSpPr>
@@ -14335,6 +14571,10 @@
             <a:srgbClr val="1A1814"/>
           </a:solidFill>
         </p:spPr>
+        <p:txBody>
+          <a:bodyPr/>
+          <a:p/>
+        </p:txBody>
       </p:sp>
       <p:sp>
         <p:nvSpPr>
@@ -14406,7 +14646,7 @@
                 <a:ea typeface="Calibri" panose="020F0502020204030204" pitchFamily="34" charset="-122"/>
                 <a:cs typeface="Calibri" panose="020F0502020204030204" pitchFamily="34" charset="-120"/>
               </a:rPr>
-              <a:t>19  /  28</a:t>
+              <a:t>23  /  33</a:t>
             </a:r>
             <a:endParaRPr lang="en-US" sz="1100" dirty="0"/>
           </a:p>
@@ -16098,6 +16338,10 @@
             <a:srgbClr val="F4EFE6"/>
           </a:solidFill>
         </p:spPr>
+        <p:txBody>
+          <a:bodyPr/>
+          <a:p/>
+        </p:txBody>
       </p:sp>
       <p:sp>
         <p:nvSpPr>
@@ -16117,6 +16361,10 @@
             <a:srgbClr val="C4622D"/>
           </a:solidFill>
         </p:spPr>
+        <p:txBody>
+          <a:bodyPr/>
+          <a:p/>
+        </p:txBody>
       </p:sp>
       <p:sp>
         <p:nvSpPr>
@@ -16136,6 +16384,10 @@
             <a:srgbClr val="1A1814"/>
           </a:solidFill>
         </p:spPr>
+        <p:txBody>
+          <a:bodyPr/>
+          <a:p/>
+        </p:txBody>
       </p:sp>
       <p:sp>
         <p:nvSpPr>
@@ -16207,7 +16459,7 @@
                 <a:ea typeface="Calibri" panose="020F0502020204030204" pitchFamily="34" charset="-122"/>
                 <a:cs typeface="Calibri" panose="020F0502020204030204" pitchFamily="34" charset="-120"/>
               </a:rPr>
-              <a:t>02  /  28</a:t>
+              <a:t>02  /  33</a:t>
             </a:r>
             <a:endParaRPr lang="en-US" sz="1100" dirty="0"/>
           </a:p>
@@ -16315,6 +16567,10 @@
             <a:prstDash val="solid"/>
           </a:ln>
         </p:spPr>
+        <p:txBody>
+          <a:bodyPr/>
+          <a:p/>
+        </p:txBody>
       </p:sp>
       <p:sp>
         <p:nvSpPr>
@@ -16456,6 +16712,10 @@
             <a:prstDash val="solid"/>
           </a:ln>
         </p:spPr>
+        <p:txBody>
+          <a:bodyPr/>
+          <a:p/>
+        </p:txBody>
       </p:sp>
       <p:sp>
         <p:nvSpPr>
@@ -16597,6 +16857,10 @@
             <a:prstDash val="solid"/>
           </a:ln>
         </p:spPr>
+        <p:txBody>
+          <a:bodyPr/>
+          <a:p/>
+        </p:txBody>
       </p:sp>
       <p:sp>
         <p:nvSpPr>
@@ -16738,6 +17002,10 @@
             <a:prstDash val="solid"/>
           </a:ln>
         </p:spPr>
+        <p:txBody>
+          <a:bodyPr/>
+          <a:p/>
+        </p:txBody>
       </p:sp>
       <p:sp>
         <p:nvSpPr>
@@ -16896,6 +17164,10 @@
             <a:srgbClr val="F4EFE6"/>
           </a:solidFill>
         </p:spPr>
+        <p:txBody>
+          <a:bodyPr/>
+          <a:p/>
+        </p:txBody>
       </p:sp>
       <p:sp>
         <p:nvSpPr>
@@ -16915,6 +17187,10 @@
             <a:srgbClr val="C4622D"/>
           </a:solidFill>
         </p:spPr>
+        <p:txBody>
+          <a:bodyPr/>
+          <a:p/>
+        </p:txBody>
       </p:sp>
       <p:sp>
         <p:nvSpPr>
@@ -16934,6 +17210,10 @@
             <a:srgbClr val="1A1814"/>
           </a:solidFill>
         </p:spPr>
+        <p:txBody>
+          <a:bodyPr/>
+          <a:p/>
+        </p:txBody>
       </p:sp>
       <p:sp>
         <p:nvSpPr>
@@ -17005,7 +17285,7 @@
                 <a:ea typeface="Calibri" panose="020F0502020204030204" pitchFamily="34" charset="-122"/>
                 <a:cs typeface="Calibri" panose="020F0502020204030204" pitchFamily="34" charset="-120"/>
               </a:rPr>
-              <a:t>20  /  28</a:t>
+              <a:t>24  /  33</a:t>
             </a:r>
             <a:endParaRPr lang="en-US" sz="1100" dirty="0"/>
           </a:p>
@@ -18648,6 +18928,10 @@
             <a:srgbClr val="F4EFE6"/>
           </a:solidFill>
         </p:spPr>
+        <p:txBody>
+          <a:bodyPr/>
+          <a:p/>
+        </p:txBody>
       </p:sp>
       <p:sp>
         <p:nvSpPr>
@@ -18667,6 +18951,10 @@
             <a:srgbClr val="C4622D"/>
           </a:solidFill>
         </p:spPr>
+        <p:txBody>
+          <a:bodyPr/>
+          <a:p/>
+        </p:txBody>
       </p:sp>
       <p:sp>
         <p:nvSpPr>
@@ -18686,6 +18974,10 @@
             <a:srgbClr val="1A1814"/>
           </a:solidFill>
         </p:spPr>
+        <p:txBody>
+          <a:bodyPr/>
+          <a:p/>
+        </p:txBody>
       </p:sp>
       <p:sp>
         <p:nvSpPr>
@@ -18757,7 +19049,7 @@
                 <a:ea typeface="Calibri" panose="020F0502020204030204" pitchFamily="34" charset="-122"/>
                 <a:cs typeface="Calibri" panose="020F0502020204030204" pitchFamily="34" charset="-120"/>
               </a:rPr>
-              <a:t>21  /  28</a:t>
+              <a:t>25  /  33</a:t>
             </a:r>
             <a:endParaRPr lang="en-US" sz="1100" dirty="0"/>
           </a:p>
@@ -18865,6 +19157,10 @@
             <a:prstDash val="solid"/>
           </a:ln>
         </p:spPr>
+        <p:txBody>
+          <a:bodyPr/>
+          <a:p/>
+        </p:txBody>
       </p:sp>
       <p:sp>
         <p:nvSpPr>
@@ -19023,6 +19319,10 @@
             <a:prstDash val="solid"/>
           </a:ln>
         </p:spPr>
+        <p:txBody>
+          <a:bodyPr/>
+          <a:p/>
+        </p:txBody>
       </p:sp>
       <p:sp>
         <p:nvSpPr>
@@ -19216,6 +19516,10 @@
             <a:srgbClr val="F4EFE6"/>
           </a:solidFill>
         </p:spPr>
+        <p:txBody>
+          <a:bodyPr/>
+          <a:p/>
+        </p:txBody>
       </p:sp>
       <p:sp>
         <p:nvSpPr>
@@ -19235,6 +19539,10 @@
             <a:srgbClr val="C4622D"/>
           </a:solidFill>
         </p:spPr>
+        <p:txBody>
+          <a:bodyPr/>
+          <a:p/>
+        </p:txBody>
       </p:sp>
       <p:sp>
         <p:nvSpPr>
@@ -19254,6 +19562,10 @@
             <a:srgbClr val="1A1814"/>
           </a:solidFill>
         </p:spPr>
+        <p:txBody>
+          <a:bodyPr/>
+          <a:p/>
+        </p:txBody>
       </p:sp>
       <p:sp>
         <p:nvSpPr>
@@ -19325,7 +19637,7 @@
                 <a:ea typeface="Calibri" panose="020F0502020204030204" pitchFamily="34" charset="-122"/>
                 <a:cs typeface="Calibri" panose="020F0502020204030204" pitchFamily="34" charset="-120"/>
               </a:rPr>
-              <a:t>22  /  28</a:t>
+              <a:t>26  /  33</a:t>
             </a:r>
             <a:endParaRPr lang="en-US" sz="1100" dirty="0"/>
           </a:p>
@@ -19433,6 +19745,10 @@
             <a:prstDash val="solid"/>
           </a:ln>
         </p:spPr>
+        <p:txBody>
+          <a:bodyPr/>
+          <a:p/>
+        </p:txBody>
       </p:sp>
       <p:sp>
         <p:nvSpPr>
@@ -19591,6 +19907,10 @@
             <a:prstDash val="solid"/>
           </a:ln>
         </p:spPr>
+        <p:txBody>
+          <a:bodyPr/>
+          <a:p/>
+        </p:txBody>
       </p:sp>
       <p:sp>
         <p:nvSpPr>
@@ -19766,6 +20086,10 @@
             <a:srgbClr val="F4EFE6"/>
           </a:solidFill>
         </p:spPr>
+        <p:txBody>
+          <a:bodyPr/>
+          <a:p/>
+        </p:txBody>
       </p:sp>
       <p:sp>
         <p:nvSpPr>
@@ -19785,6 +20109,10 @@
             <a:srgbClr val="C4622D"/>
           </a:solidFill>
         </p:spPr>
+        <p:txBody>
+          <a:bodyPr/>
+          <a:p/>
+        </p:txBody>
       </p:sp>
       <p:sp>
         <p:nvSpPr>
@@ -19804,6 +20132,10 @@
             <a:srgbClr val="1A1814"/>
           </a:solidFill>
         </p:spPr>
+        <p:txBody>
+          <a:bodyPr/>
+          <a:p/>
+        </p:txBody>
       </p:sp>
       <p:sp>
         <p:nvSpPr>
@@ -19875,7 +20207,7 @@
                 <a:ea typeface="Calibri" panose="020F0502020204030204" pitchFamily="34" charset="-122"/>
                 <a:cs typeface="Calibri" panose="020F0502020204030204" pitchFamily="34" charset="-120"/>
               </a:rPr>
-              <a:t>23  /  28</a:t>
+              <a:t>27  /  33</a:t>
             </a:r>
             <a:endParaRPr lang="en-US" sz="1100" dirty="0"/>
           </a:p>
@@ -21173,6 +21505,10 @@
             <a:srgbClr val="F4EFE6"/>
           </a:solidFill>
         </p:spPr>
+        <p:txBody>
+          <a:bodyPr/>
+          <a:p/>
+        </p:txBody>
       </p:sp>
       <p:sp>
         <p:nvSpPr>
@@ -21192,6 +21528,10 @@
             <a:srgbClr val="C4622D"/>
           </a:solidFill>
         </p:spPr>
+        <p:txBody>
+          <a:bodyPr/>
+          <a:p/>
+        </p:txBody>
       </p:sp>
       <p:sp>
         <p:nvSpPr>
@@ -21211,6 +21551,10 @@
             <a:srgbClr val="1A1814"/>
           </a:solidFill>
         </p:spPr>
+        <p:txBody>
+          <a:bodyPr/>
+          <a:p/>
+        </p:txBody>
       </p:sp>
       <p:sp>
         <p:nvSpPr>
@@ -21282,7 +21626,7 @@
                 <a:ea typeface="Calibri" panose="020F0502020204030204" pitchFamily="34" charset="-122"/>
                 <a:cs typeface="Calibri" panose="020F0502020204030204" pitchFamily="34" charset="-120"/>
               </a:rPr>
-              <a:t>24  /  28</a:t>
+              <a:t>28  /  33</a:t>
             </a:r>
             <a:endParaRPr lang="en-US" sz="1100" dirty="0"/>
           </a:p>
@@ -22925,6 +23269,10 @@
             <a:srgbClr val="F4EFE6"/>
           </a:solidFill>
         </p:spPr>
+        <p:txBody>
+          <a:bodyPr/>
+          <a:p/>
+        </p:txBody>
       </p:sp>
       <p:sp>
         <p:nvSpPr>
@@ -22944,6 +23292,10 @@
             <a:srgbClr val="C4622D"/>
           </a:solidFill>
         </p:spPr>
+        <p:txBody>
+          <a:bodyPr/>
+          <a:p/>
+        </p:txBody>
       </p:sp>
       <p:sp>
         <p:nvSpPr>
@@ -22963,6 +23315,10 @@
             <a:srgbClr val="1A1814"/>
           </a:solidFill>
         </p:spPr>
+        <p:txBody>
+          <a:bodyPr/>
+          <a:p/>
+        </p:txBody>
       </p:sp>
       <p:sp>
         <p:nvSpPr>
@@ -23034,7 +23390,7 @@
                 <a:ea typeface="Calibri" panose="020F0502020204030204" pitchFamily="34" charset="-122"/>
                 <a:cs typeface="Calibri" panose="020F0502020204030204" pitchFamily="34" charset="-120"/>
               </a:rPr>
-              <a:t>25  /  28</a:t>
+              <a:t>29  /  33</a:t>
             </a:r>
             <a:endParaRPr lang="en-US" sz="1100" dirty="0"/>
           </a:p>
@@ -24479,6 +24835,10 @@
             <a:srgbClr val="F4EFE6"/>
           </a:solidFill>
         </p:spPr>
+        <p:txBody>
+          <a:bodyPr/>
+          <a:p/>
+        </p:txBody>
       </p:sp>
       <p:sp>
         <p:nvSpPr>
@@ -24498,6 +24858,10 @@
             <a:srgbClr val="C4622D"/>
           </a:solidFill>
         </p:spPr>
+        <p:txBody>
+          <a:bodyPr/>
+          <a:p/>
+        </p:txBody>
       </p:sp>
       <p:sp>
         <p:nvSpPr>
@@ -24517,6 +24881,10 @@
             <a:srgbClr val="1A1814"/>
           </a:solidFill>
         </p:spPr>
+        <p:txBody>
+          <a:bodyPr/>
+          <a:p/>
+        </p:txBody>
       </p:sp>
       <p:sp>
         <p:nvSpPr>
@@ -24588,7 +24956,7 @@
                 <a:ea typeface="Calibri" panose="020F0502020204030204" pitchFamily="34" charset="-122"/>
                 <a:cs typeface="Calibri" panose="020F0502020204030204" pitchFamily="34" charset="-120"/>
               </a:rPr>
-              <a:t>26  /  28</a:t>
+              <a:t>30  /  33</a:t>
             </a:r>
             <a:endParaRPr lang="en-US" sz="1100" dirty="0"/>
           </a:p>
@@ -25870,6 +26238,10 @@
             <a:srgbClr val="F4EFE6"/>
           </a:solidFill>
         </p:spPr>
+        <p:txBody>
+          <a:bodyPr/>
+          <a:p/>
+        </p:txBody>
       </p:sp>
       <p:sp>
         <p:nvSpPr>
@@ -25889,6 +26261,10 @@
             <a:srgbClr val="C4622D"/>
           </a:solidFill>
         </p:spPr>
+        <p:txBody>
+          <a:bodyPr/>
+          <a:p/>
+        </p:txBody>
       </p:sp>
       <p:sp>
         <p:nvSpPr>
@@ -25908,6 +26284,10 @@
             <a:srgbClr val="1A1814"/>
           </a:solidFill>
         </p:spPr>
+        <p:txBody>
+          <a:bodyPr/>
+          <a:p/>
+        </p:txBody>
       </p:sp>
       <p:sp>
         <p:nvSpPr>
@@ -25979,7 +26359,7 @@
                 <a:ea typeface="Calibri" panose="020F0502020204030204" pitchFamily="34" charset="-122"/>
                 <a:cs typeface="Calibri" panose="020F0502020204030204" pitchFamily="34" charset="-120"/>
               </a:rPr>
-              <a:t>26  /  28</a:t>
+              <a:t>31  /  33</a:t>
             </a:r>
             <a:endParaRPr lang="en-US" sz="1100" dirty="0"/>
           </a:p>
@@ -27387,6 +27767,10 @@
             <a:srgbClr val="F4EFE6"/>
           </a:solidFill>
         </p:spPr>
+        <p:txBody>
+          <a:bodyPr/>
+          <a:p/>
+        </p:txBody>
       </p:sp>
       <p:sp>
         <p:nvSpPr>
@@ -27406,6 +27790,10 @@
             <a:srgbClr val="C4622D"/>
           </a:solidFill>
         </p:spPr>
+        <p:txBody>
+          <a:bodyPr/>
+          <a:p/>
+        </p:txBody>
       </p:sp>
       <p:sp>
         <p:nvSpPr>
@@ -27425,6 +27813,10 @@
             <a:srgbClr val="1A1814"/>
           </a:solidFill>
         </p:spPr>
+        <p:txBody>
+          <a:bodyPr/>
+          <a:p/>
+        </p:txBody>
       </p:sp>
       <p:sp>
         <p:nvSpPr>
@@ -27496,7 +27888,7 @@
                 <a:ea typeface="Calibri" panose="020F0502020204030204" pitchFamily="34" charset="-122"/>
                 <a:cs typeface="Calibri" panose="020F0502020204030204" pitchFamily="34" charset="-120"/>
               </a:rPr>
-              <a:t>27  /  28</a:t>
+              <a:t>32  /  33</a:t>
             </a:r>
             <a:endParaRPr lang="en-US" sz="1100" dirty="0"/>
           </a:p>
@@ -27604,6 +27996,10 @@
             <a:prstDash val="solid"/>
           </a:ln>
         </p:spPr>
+        <p:txBody>
+          <a:bodyPr/>
+          <a:p/>
+        </p:txBody>
       </p:sp>
       <p:sp>
         <p:nvSpPr>
@@ -27744,6 +28140,10 @@
             <a:prstDash val="solid"/>
           </a:ln>
         </p:spPr>
+        <p:txBody>
+          <a:bodyPr/>
+          <a:p/>
+        </p:txBody>
       </p:sp>
       <p:sp>
         <p:nvSpPr>
@@ -27884,6 +28284,10 @@
             <a:prstDash val="solid"/>
           </a:ln>
         </p:spPr>
+        <p:txBody>
+          <a:bodyPr/>
+          <a:p/>
+        </p:txBody>
       </p:sp>
       <p:sp>
         <p:nvSpPr>
@@ -28023,6 +28427,10 @@
             <a:srgbClr val="F4EFE6"/>
           </a:solidFill>
         </p:spPr>
+        <p:txBody>
+          <a:bodyPr/>
+          <a:p/>
+        </p:txBody>
       </p:sp>
       <p:sp>
         <p:nvSpPr>
@@ -28042,6 +28450,10 @@
             <a:srgbClr val="C4622D"/>
           </a:solidFill>
         </p:spPr>
+        <p:txBody>
+          <a:bodyPr/>
+          <a:p/>
+        </p:txBody>
       </p:sp>
       <p:sp>
         <p:nvSpPr>
@@ -28061,6 +28473,10 @@
             <a:srgbClr val="1A1814"/>
           </a:solidFill>
         </p:spPr>
+        <p:txBody>
+          <a:bodyPr/>
+          <a:p/>
+        </p:txBody>
       </p:sp>
       <p:sp>
         <p:nvSpPr>
@@ -28132,7 +28548,7 @@
                 <a:ea typeface="Calibri" panose="020F0502020204030204" pitchFamily="34" charset="-122"/>
                 <a:cs typeface="Calibri" panose="020F0502020204030204" pitchFamily="34" charset="-120"/>
               </a:rPr>
-              <a:t>28  /  28</a:t>
+              <a:t>33  /  33</a:t>
             </a:r>
             <a:endParaRPr lang="en-US" sz="1100" dirty="0"/>
           </a:p>
@@ -28202,6 +28618,10 @@
             <a:prstDash val="solid"/>
           </a:ln>
         </p:spPr>
+        <p:txBody>
+          <a:bodyPr/>
+          <a:p/>
+        </p:txBody>
       </p:sp>
       <p:sp>
         <p:nvSpPr>
@@ -28342,6 +28762,10 @@
             <a:prstDash val="solid"/>
           </a:ln>
         </p:spPr>
+        <p:txBody>
+          <a:bodyPr/>
+          <a:p/>
+        </p:txBody>
       </p:sp>
       <p:sp>
         <p:nvSpPr>
@@ -28499,6 +28923,10 @@
             <a:srgbClr val="F4EFE6"/>
           </a:solidFill>
         </p:spPr>
+        <p:txBody>
+          <a:bodyPr/>
+          <a:p/>
+        </p:txBody>
       </p:sp>
       <p:sp>
         <p:nvSpPr>
@@ -28518,6 +28946,10 @@
             <a:srgbClr val="C4622D"/>
           </a:solidFill>
         </p:spPr>
+        <p:txBody>
+          <a:bodyPr/>
+          <a:p/>
+        </p:txBody>
       </p:sp>
       <p:sp>
         <p:nvSpPr>
@@ -28537,6 +28969,10 @@
             <a:srgbClr val="1A1814"/>
           </a:solidFill>
         </p:spPr>
+        <p:txBody>
+          <a:bodyPr/>
+          <a:p/>
+        </p:txBody>
       </p:sp>
       <p:sp>
         <p:nvSpPr>
@@ -28608,7 +29044,7 @@
                 <a:ea typeface="Calibri" panose="020F0502020204030204" pitchFamily="34" charset="-122"/>
                 <a:cs typeface="Calibri" panose="020F0502020204030204" pitchFamily="34" charset="-120"/>
               </a:rPr>
-              <a:t>03  /  28</a:t>
+              <a:t>03  /  33</a:t>
             </a:r>
             <a:endParaRPr lang="en-US" sz="1100" dirty="0"/>
           </a:p>
@@ -28716,6 +29152,10 @@
             <a:prstDash val="solid"/>
           </a:ln>
         </p:spPr>
+        <p:txBody>
+          <a:bodyPr/>
+          <a:p/>
+        </p:txBody>
       </p:sp>
       <p:sp>
         <p:nvSpPr>
@@ -28857,6 +29297,10 @@
             <a:prstDash val="solid"/>
           </a:ln>
         </p:spPr>
+        <p:txBody>
+          <a:bodyPr/>
+          <a:p/>
+        </p:txBody>
       </p:sp>
       <p:sp>
         <p:nvSpPr>
@@ -28998,6 +29442,10 @@
             <a:prstDash val="solid"/>
           </a:ln>
         </p:spPr>
+        <p:txBody>
+          <a:bodyPr/>
+          <a:p/>
+        </p:txBody>
       </p:sp>
       <p:sp>
         <p:nvSpPr>
@@ -29139,6 +29587,10 @@
             <a:prstDash val="solid"/>
           </a:ln>
         </p:spPr>
+        <p:txBody>
+          <a:bodyPr/>
+          <a:p/>
+        </p:txBody>
       </p:sp>
       <p:sp>
         <p:nvSpPr>
@@ -29280,6 +29732,10 @@
             <a:prstDash val="solid"/>
           </a:ln>
         </p:spPr>
+        <p:txBody>
+          <a:bodyPr/>
+          <a:p/>
+        </p:txBody>
       </p:sp>
       <p:sp>
         <p:nvSpPr>
@@ -29354,6 +29810,5284 @@
               <a:t>Kos disewa per kamar, biasanya bulanan. Kontrakan disewa per rumah, biasanya minimal setahun. Keduanya butuh foto yang jujur, harga yang satu, dan status kosong yang tidak bohong. Demo memakai contoh di Cianjur, Bandung, dan Depok.</a:t>
             </a:r>
             <a:endParaRPr lang="en-US" sz="1500" dirty="0"/>
+          </a:p>
+        </p:txBody>
+      </p:sp>
+    </p:spTree>
+  </p:cSld>
+  <p:clrMapOvr>
+    <a:masterClrMapping/>
+  </p:clrMapOvr>
+</p:sld>
+</file>
+
+<file path=ppt/slides/slide30.xml><?xml version="1.0" encoding="utf-8"?>
+<p:sld xmlns:a="http://schemas.openxmlformats.org/drawingml/2006/main" xmlns:p="http://schemas.openxmlformats.org/presentationml/2006/main" xmlns:r="http://schemas.openxmlformats.org/officeDocument/2006/relationships">
+  <p:cSld>
+    <p:spTree>
+      <p:nvGrpSpPr>
+        <p:cNvPr id="1" name=""/>
+        <p:cNvGrpSpPr/>
+        <p:nvPr/>
+      </p:nvGrpSpPr>
+      <p:grpSpPr/>
+      <p:sp>
+        <p:nvSpPr>
+          <p:cNvPr id="2" name="Shape 0"/>
+          <p:cNvSpPr/>
+          <p:nvPr/>
+        </p:nvSpPr>
+        <p:spPr>
+          <a:xfrm>
+            <a:off x="0" y="0"/>
+            <a:ext cx="12191695" cy="6858000"/>
+          </a:xfrm>
+          <a:prstGeom prst="rect">
+            <a:avLst/>
+          </a:prstGeom>
+          <a:solidFill>
+            <a:srgbClr val="F4EFE6"/>
+          </a:solidFill>
+        </p:spPr>
+        <p:txBody>
+          <a:bodyPr/>
+          <a:p/>
+        </p:txBody>
+      </p:sp>
+      <p:sp>
+        <p:nvSpPr>
+          <p:cNvPr id="3" name="Shape 1"/>
+          <p:cNvSpPr/>
+          <p:nvPr/>
+        </p:nvSpPr>
+        <p:spPr>
+          <a:xfrm>
+            <a:off x="0" y="0"/>
+            <a:ext cx="91440" cy="6858000"/>
+          </a:xfrm>
+          <a:prstGeom prst="rect">
+            <a:avLst/>
+          </a:prstGeom>
+          <a:solidFill>
+            <a:srgbClr val="C4622D"/>
+          </a:solidFill>
+        </p:spPr>
+        <p:txBody>
+          <a:bodyPr/>
+          <a:p/>
+        </p:txBody>
+      </p:sp>
+      <p:sp>
+        <p:nvSpPr>
+          <p:cNvPr id="4" name="Shape 2"/>
+          <p:cNvSpPr/>
+          <p:nvPr/>
+        </p:nvSpPr>
+        <p:spPr>
+          <a:xfrm>
+            <a:off x="0" y="6601968"/>
+            <a:ext cx="12191695" cy="256032"/>
+          </a:xfrm>
+          <a:prstGeom prst="rect">
+            <a:avLst/>
+          </a:prstGeom>
+          <a:solidFill>
+            <a:srgbClr val="1A1814"/>
+          </a:solidFill>
+        </p:spPr>
+        <p:txBody>
+          <a:bodyPr/>
+          <a:p/>
+        </p:txBody>
+      </p:sp>
+      <p:sp>
+        <p:nvSpPr>
+          <p:cNvPr id="5" name="Text 3"/>
+          <p:cNvSpPr/>
+          <p:nvPr/>
+        </p:nvSpPr>
+        <p:spPr>
+          <a:xfrm>
+            <a:off x="347472" y="6601968"/>
+            <a:ext cx="9144000" cy="256032"/>
+          </a:xfrm>
+          <a:prstGeom prst="rect">
+            <a:avLst/>
+          </a:prstGeom>
+          <a:noFill/>
+        </p:spPr>
+        <p:txBody>
+          <a:bodyPr wrap="square" lIns="0" tIns="0" rIns="0" bIns="0" rtlCol="0" anchor="ctr"/>
+          <a:lstStyle/>
+          <a:p>
+            <a:pPr marL="0" indent="0">
+              <a:buNone/>
+            </a:pPr>
+            <a:r>
+              <a:rPr lang="en-US" sz="1100" dirty="0">
+                <a:solidFill>
+                  <a:srgbClr val="E7DCC8"/>
+                </a:solidFill>
+                <a:latin typeface="Calibri" panose="020F0502020204030204" pitchFamily="34" charset="0"/>
+                <a:ea typeface="Calibri" panose="020F0502020204030204" pitchFamily="34" charset="-122"/>
+                <a:cs typeface="Calibri" panose="020F0502020204030204" pitchFamily="34" charset="-120"/>
+              </a:rPr>
+              <a:t>HUNI   ·   Proposal website kos &amp; kontrakan   ·   Oktober 2026</a:t>
+            </a:r>
+            <a:endParaRPr lang="en-US" sz="1100" dirty="0"/>
+          </a:p>
+        </p:txBody>
+      </p:sp>
+      <p:sp>
+        <p:nvSpPr>
+          <p:cNvPr id="6" name="Text 4"/>
+          <p:cNvSpPr/>
+          <p:nvPr/>
+        </p:nvSpPr>
+        <p:spPr>
+          <a:xfrm>
+            <a:off x="9509760" y="6601968"/>
+            <a:ext cx="2331720" cy="256032"/>
+          </a:xfrm>
+          <a:prstGeom prst="rect">
+            <a:avLst/>
+          </a:prstGeom>
+          <a:noFill/>
+        </p:spPr>
+        <p:txBody>
+          <a:bodyPr wrap="square" lIns="0" tIns="0" rIns="0" bIns="0" rtlCol="0" anchor="ctr"/>
+          <a:lstStyle/>
+          <a:p>
+            <a:pPr marL="0" indent="0" algn="r">
+              <a:buNone/>
+            </a:pPr>
+            <a:r>
+              <a:rPr lang="en-US" sz="1100" dirty="0">
+                <a:solidFill>
+                  <a:srgbClr val="E7DCC8"/>
+                </a:solidFill>
+                <a:latin typeface="Calibri" panose="020F0502020204030204" pitchFamily="34" charset="0"/>
+                <a:ea typeface="Calibri" panose="020F0502020204030204" pitchFamily="34" charset="-122"/>
+                <a:cs typeface="Calibri" panose="020F0502020204030204" pitchFamily="34" charset="-120"/>
+              </a:rPr>
+              <a:t>18  /  33</a:t>
+            </a:r>
+            <a:endParaRPr lang="en-US" sz="1100" dirty="0"/>
+          </a:p>
+        </p:txBody>
+      </p:sp>
+      <p:sp>
+        <p:nvSpPr>
+          <p:cNvPr id="7" name="Text 5"/>
+          <p:cNvSpPr/>
+          <p:nvPr/>
+        </p:nvSpPr>
+        <p:spPr>
+          <a:xfrm>
+            <a:off x="426709" y="304792"/>
+            <a:ext cx="11338277" cy="731502"/>
+          </a:xfrm>
+          <a:prstGeom prst="rect">
+            <a:avLst/>
+          </a:prstGeom>
+          <a:noFill/>
+        </p:spPr>
+        <p:txBody>
+          <a:bodyPr wrap="square" lIns="0" tIns="0" rIns="0" bIns="0" rtlCol="0" anchor="ctr"/>
+          <a:lstStyle/>
+          <a:p>
+            <a:pPr marL="0" indent="0">
+              <a:buNone/>
+            </a:pPr>
+            <a:r>
+              <a:rPr lang="en-US" sz="3120" b="1" dirty="0">
+                <a:solidFill>
+                  <a:srgbClr val="1A1814"/>
+                </a:solidFill>
+                <a:latin typeface="Georgia" panose="02040502050405020303" pitchFamily="34" charset="0"/>
+                <a:ea typeface="Georgia" panose="02040502050405020303" pitchFamily="34" charset="-122"/>
+                <a:cs typeface="Georgia" panose="02040502050405020303" pitchFamily="34" charset="-120"/>
+              </a:rPr>
+              <a:t>Dashboard analytics: satu layar per peran</a:t>
+            </a:r>
+            <a:endParaRPr lang="en-US" sz="3120" dirty="0"/>
+          </a:p>
+        </p:txBody>
+      </p:sp>
+      <p:sp>
+        <p:nvSpPr>
+          <p:cNvPr id="8" name="Text 6"/>
+          <p:cNvSpPr/>
+          <p:nvPr/>
+        </p:nvSpPr>
+        <p:spPr>
+          <a:xfrm>
+            <a:off x="426709" y="1072869"/>
+            <a:ext cx="11338277" cy="487668"/>
+          </a:xfrm>
+          <a:prstGeom prst="rect">
+            <a:avLst/>
+          </a:prstGeom>
+          <a:noFill/>
+        </p:spPr>
+        <p:txBody>
+          <a:bodyPr wrap="square" lIns="0" tIns="0" rIns="0" bIns="0" rtlCol="0" anchor="ctr"/>
+          <a:lstStyle/>
+          <a:p>
+            <a:pPr marL="0" indent="0">
+              <a:buNone/>
+            </a:pPr>
+            <a:r>
+              <a:rPr lang="en-US" sz="1560" dirty="0">
+                <a:solidFill>
+                  <a:srgbClr val="6F675C"/>
+                </a:solidFill>
+                <a:latin typeface="Calibri" panose="020F0502020204030204" pitchFamily="34" charset="0"/>
+                <a:ea typeface="Calibri" panose="020F0502020204030204" pitchFamily="34" charset="-122"/>
+                <a:cs typeface="Calibri" panose="020F0502020204030204" pitchFamily="34" charset="-120"/>
+              </a:rPr>
+              <a:t>Admin lihat semua modul. Peran lain hanya modul kerjanya.</a:t>
+            </a:r>
+            <a:endParaRPr lang="en-US" sz="1560" dirty="0"/>
+          </a:p>
+        </p:txBody>
+      </p:sp>
+      <p:graphicFrame>
+        <p:nvGraphicFramePr>
+          <p:cNvPr id="14" name="Table 0"/>
+          <p:cNvGraphicFramePr>
+            <a:graphicFrameLocks noGrp="1"/>
+          </p:cNvGraphicFramePr>
+          <p:nvPr/>
+        </p:nvGraphicFramePr>
+        <p:xfrm>
+          <a:off x="426709" y="1828754"/>
+          <a:ext cx="11338560" cy="3291756"/>
+        </p:xfrm>
+        <a:graphic>
+          <a:graphicData uri="http://schemas.openxmlformats.org/drawingml/2006/table">
+            <a:tbl>
+              <a:tblPr/>
+              <a:tblGrid>
+                <a:gridCol w="1828800"/>
+                <a:gridCol w="5669280"/>
+                <a:gridCol w="3840480"/>
+              </a:tblGrid>
+              <a:tr h="548626">
+                <a:tc>
+                  <a:txBody>
+                    <a:bodyPr/>
+                    <a:lstStyle/>
+                    <a:p>
+                      <a:pPr marL="0" indent="0" algn="l">
+                        <a:buNone/>
+                      </a:pPr>
+                      <a:r>
+                        <a:rPr lang="en-US" sz="1320" b="1" dirty="0">
+                          <a:solidFill>
+                            <a:srgbClr val="F4EFE6"/>
+                          </a:solidFill>
+                        </a:rPr>
+                        <a:t>Peran</a:t>
+                      </a:r>
+                      <a:endParaRPr lang="en-US" sz="1320" dirty="0"/>
+                    </a:p>
+                  </a:txBody>
+                  <a:tcPr marL="101600" marR="101600" marT="25400" marB="25400">
+                    <a:lnL w="6350" cap="flat" cmpd="sng" algn="ctr">
+                      <a:solidFill>
+                        <a:srgbClr val="D9CFBF"/>
+                      </a:solidFill>
+                      <a:prstDash val="solid"/>
+                      <a:round/>
+                      <a:headEnd type="none" w="med" len="med"/>
+                      <a:tailEnd type="none" w="med" len="med"/>
+                    </a:lnL>
+                    <a:lnR w="6350" cap="flat" cmpd="sng" algn="ctr">
+                      <a:solidFill>
+                        <a:srgbClr val="D9CFBF"/>
+                      </a:solidFill>
+                      <a:prstDash val="solid"/>
+                      <a:round/>
+                      <a:headEnd type="none" w="med" len="med"/>
+                      <a:tailEnd type="none" w="med" len="med"/>
+                    </a:lnR>
+                    <a:lnT w="6350" cap="flat" cmpd="sng" algn="ctr">
+                      <a:solidFill>
+                        <a:srgbClr val="D9CFBF"/>
+                      </a:solidFill>
+                      <a:prstDash val="solid"/>
+                      <a:round/>
+                      <a:headEnd type="none" w="med" len="med"/>
+                      <a:tailEnd type="none" w="med" len="med"/>
+                    </a:lnT>
+                    <a:lnB w="6350" cap="flat" cmpd="sng" algn="ctr">
+                      <a:solidFill>
+                        <a:srgbClr val="D9CFBF"/>
+                      </a:solidFill>
+                      <a:prstDash val="solid"/>
+                      <a:round/>
+                      <a:headEnd type="none" w="med" len="med"/>
+                      <a:tailEnd type="none" w="med" len="med"/>
+                    </a:lnB>
+                    <a:solidFill>
+                      <a:srgbClr val="1A1814"/>
+                    </a:solidFill>
+                  </a:tcPr>
+                </a:tc>
+                <a:tc>
+                  <a:txBody>
+                    <a:bodyPr/>
+                    <a:lstStyle/>
+                    <a:p>
+                      <a:pPr marL="0" indent="0" algn="l">
+                        <a:buNone/>
+                      </a:pPr>
+                      <a:r>
+                        <a:rPr lang="en-US" sz="1320" b="1" dirty="0">
+                          <a:solidFill>
+                            <a:srgbClr val="F4EFE6"/>
+                          </a:solidFill>
+                        </a:rPr>
+                        <a:t>Yang dilihat</a:t>
+                      </a:r>
+                      <a:endParaRPr lang="en-US" sz="1320" dirty="0"/>
+                    </a:p>
+                  </a:txBody>
+                  <a:tcPr marL="101600" marR="101600" marT="25400" marB="25400">
+                    <a:lnL w="6350" cap="flat" cmpd="sng" algn="ctr">
+                      <a:solidFill>
+                        <a:srgbClr val="D9CFBF"/>
+                      </a:solidFill>
+                      <a:prstDash val="solid"/>
+                      <a:round/>
+                      <a:headEnd type="none" w="med" len="med"/>
+                      <a:tailEnd type="none" w="med" len="med"/>
+                    </a:lnL>
+                    <a:lnR w="6350" cap="flat" cmpd="sng" algn="ctr">
+                      <a:solidFill>
+                        <a:srgbClr val="D9CFBF"/>
+                      </a:solidFill>
+                      <a:prstDash val="solid"/>
+                      <a:round/>
+                      <a:headEnd type="none" w="med" len="med"/>
+                      <a:tailEnd type="none" w="med" len="med"/>
+                    </a:lnR>
+                    <a:lnT w="6350" cap="flat" cmpd="sng" algn="ctr">
+                      <a:solidFill>
+                        <a:srgbClr val="D9CFBF"/>
+                      </a:solidFill>
+                      <a:prstDash val="solid"/>
+                      <a:round/>
+                      <a:headEnd type="none" w="med" len="med"/>
+                      <a:tailEnd type="none" w="med" len="med"/>
+                    </a:lnT>
+                    <a:lnB w="6350" cap="flat" cmpd="sng" algn="ctr">
+                      <a:solidFill>
+                        <a:srgbClr val="D9CFBF"/>
+                      </a:solidFill>
+                      <a:prstDash val="solid"/>
+                      <a:round/>
+                      <a:headEnd type="none" w="med" len="med"/>
+                      <a:tailEnd type="none" w="med" len="med"/>
+                    </a:lnB>
+                    <a:solidFill>
+                      <a:srgbClr val="1A1814"/>
+                    </a:solidFill>
+                  </a:tcPr>
+                </a:tc>
+                <a:tc>
+                  <a:txBody>
+                    <a:bodyPr/>
+                    <a:lstStyle/>
+                    <a:p>
+                      <a:pPr marL="0" indent="0" algn="l">
+                        <a:buNone/>
+                      </a:pPr>
+                      <a:r>
+                        <a:rPr lang="en-US" sz="1320" b="1" dirty="0">
+                          <a:solidFill>
+                            <a:srgbClr val="F4EFE6"/>
+                          </a:solidFill>
+                        </a:rPr>
+                        <a:t>Aksi</a:t>
+                      </a:r>
+                      <a:endParaRPr lang="en-US" sz="1320" dirty="0"/>
+                    </a:p>
+                  </a:txBody>
+                  <a:tcPr marL="101600" marR="101600" marT="25400" marB="25400">
+                    <a:lnL w="6350" cap="flat" cmpd="sng" algn="ctr">
+                      <a:solidFill>
+                        <a:srgbClr val="D9CFBF"/>
+                      </a:solidFill>
+                      <a:prstDash val="solid"/>
+                      <a:round/>
+                      <a:headEnd type="none" w="med" len="med"/>
+                      <a:tailEnd type="none" w="med" len="med"/>
+                    </a:lnL>
+                    <a:lnR w="6350" cap="flat" cmpd="sng" algn="ctr">
+                      <a:solidFill>
+                        <a:srgbClr val="D9CFBF"/>
+                      </a:solidFill>
+                      <a:prstDash val="solid"/>
+                      <a:round/>
+                      <a:headEnd type="none" w="med" len="med"/>
+                      <a:tailEnd type="none" w="med" len="med"/>
+                    </a:lnR>
+                    <a:lnT w="6350" cap="flat" cmpd="sng" algn="ctr">
+                      <a:solidFill>
+                        <a:srgbClr val="D9CFBF"/>
+                      </a:solidFill>
+                      <a:prstDash val="solid"/>
+                      <a:round/>
+                      <a:headEnd type="none" w="med" len="med"/>
+                      <a:tailEnd type="none" w="med" len="med"/>
+                    </a:lnT>
+                    <a:lnB w="6350" cap="flat" cmpd="sng" algn="ctr">
+                      <a:solidFill>
+                        <a:srgbClr val="D9CFBF"/>
+                      </a:solidFill>
+                      <a:prstDash val="solid"/>
+                      <a:round/>
+                      <a:headEnd type="none" w="med" len="med"/>
+                      <a:tailEnd type="none" w="med" len="med"/>
+                    </a:lnB>
+                    <a:solidFill>
+                      <a:srgbClr val="1A1814"/>
+                    </a:solidFill>
+                  </a:tcPr>
+                </a:tc>
+              </a:tr>
+              <a:tr h="548626">
+                <a:tc>
+                  <a:txBody>
+                    <a:bodyPr/>
+                    <a:lstStyle/>
+                    <a:p>
+                      <a:pPr marL="0" indent="0" algn="l">
+                        <a:buNone/>
+                      </a:pPr>
+                      <a:r>
+                        <a:rPr lang="en-US" sz="1320" dirty="0">
+                          <a:solidFill>
+                            <a:srgbClr val="1A1814"/>
+                          </a:solidFill>
+                        </a:rPr>
+                        <a:t>Admin / owner</a:t>
+                      </a:r>
+                      <a:endParaRPr lang="en-US" sz="1320" dirty="0"/>
+                    </a:p>
+                  </a:txBody>
+                  <a:tcPr marL="101600" marR="101600" marT="25400" marB="25400">
+                    <a:lnL w="6350" cap="flat" cmpd="sng" algn="ctr">
+                      <a:solidFill>
+                        <a:srgbClr val="D9CFBF"/>
+                      </a:solidFill>
+                      <a:prstDash val="solid"/>
+                      <a:round/>
+                      <a:headEnd type="none" w="med" len="med"/>
+                      <a:tailEnd type="none" w="med" len="med"/>
+                    </a:lnL>
+                    <a:lnR w="6350" cap="flat" cmpd="sng" algn="ctr">
+                      <a:solidFill>
+                        <a:srgbClr val="D9CFBF"/>
+                      </a:solidFill>
+                      <a:prstDash val="solid"/>
+                      <a:round/>
+                      <a:headEnd type="none" w="med" len="med"/>
+                      <a:tailEnd type="none" w="med" len="med"/>
+                    </a:lnR>
+                    <a:lnT w="6350" cap="flat" cmpd="sng" algn="ctr">
+                      <a:solidFill>
+                        <a:srgbClr val="D9CFBF"/>
+                      </a:solidFill>
+                      <a:prstDash val="solid"/>
+                      <a:round/>
+                      <a:headEnd type="none" w="med" len="med"/>
+                      <a:tailEnd type="none" w="med" len="med"/>
+                    </a:lnT>
+                    <a:lnB w="6350" cap="flat" cmpd="sng" algn="ctr">
+                      <a:solidFill>
+                        <a:srgbClr val="D9CFBF"/>
+                      </a:solidFill>
+                      <a:prstDash val="solid"/>
+                      <a:round/>
+                      <a:headEnd type="none" w="med" len="med"/>
+                      <a:tailEnd type="none" w="med" len="med"/>
+                    </a:lnB>
+                    <a:solidFill>
+                      <a:srgbClr val="F4EFE6"/>
+                    </a:solidFill>
+                  </a:tcPr>
+                </a:tc>
+                <a:tc>
+                  <a:txBody>
+                    <a:bodyPr/>
+                    <a:lstStyle/>
+                    <a:p>
+                      <a:pPr marL="0" indent="0" algn="l">
+                        <a:buNone/>
+                      </a:pPr>
+                      <a:r>
+                        <a:rPr lang="en-US" sz="1320" dirty="0">
+                          <a:solidFill>
+                            <a:srgbClr val="1A1814"/>
+                          </a:solidFill>
+                        </a:rPr>
+                        <a:t>Hunian, keuangan cafe &amp; kos, pembayaran, semua modul</a:t>
+                      </a:r>
+                      <a:endParaRPr lang="en-US" sz="1320" dirty="0"/>
+                    </a:p>
+                  </a:txBody>
+                  <a:tcPr marL="101600" marR="101600" marT="25400" marB="25400">
+                    <a:lnL w="6350" cap="flat" cmpd="sng" algn="ctr">
+                      <a:solidFill>
+                        <a:srgbClr val="D9CFBF"/>
+                      </a:solidFill>
+                      <a:prstDash val="solid"/>
+                      <a:round/>
+                      <a:headEnd type="none" w="med" len="med"/>
+                      <a:tailEnd type="none" w="med" len="med"/>
+                    </a:lnL>
+                    <a:lnR w="6350" cap="flat" cmpd="sng" algn="ctr">
+                      <a:solidFill>
+                        <a:srgbClr val="D9CFBF"/>
+                      </a:solidFill>
+                      <a:prstDash val="solid"/>
+                      <a:round/>
+                      <a:headEnd type="none" w="med" len="med"/>
+                      <a:tailEnd type="none" w="med" len="med"/>
+                    </a:lnR>
+                    <a:lnT w="6350" cap="flat" cmpd="sng" algn="ctr">
+                      <a:solidFill>
+                        <a:srgbClr val="D9CFBF"/>
+                      </a:solidFill>
+                      <a:prstDash val="solid"/>
+                      <a:round/>
+                      <a:headEnd type="none" w="med" len="med"/>
+                      <a:tailEnd type="none" w="med" len="med"/>
+                    </a:lnT>
+                    <a:lnB w="6350" cap="flat" cmpd="sng" algn="ctr">
+                      <a:solidFill>
+                        <a:srgbClr val="D9CFBF"/>
+                      </a:solidFill>
+                      <a:prstDash val="solid"/>
+                      <a:round/>
+                      <a:headEnd type="none" w="med" len="med"/>
+                      <a:tailEnd type="none" w="med" len="med"/>
+                    </a:lnB>
+                    <a:solidFill>
+                      <a:srgbClr val="F4EFE6"/>
+                    </a:solidFill>
+                  </a:tcPr>
+                </a:tc>
+                <a:tc>
+                  <a:txBody>
+                    <a:bodyPr/>
+                    <a:lstStyle/>
+                    <a:p>
+                      <a:pPr marL="0" indent="0" algn="l">
+                        <a:buNone/>
+                      </a:pPr>
+                      <a:r>
+                        <a:rPr lang="en-US" sz="1320" dirty="0">
+                          <a:solidFill>
+                            <a:srgbClr val="1A1814"/>
+                          </a:solidFill>
+                        </a:rPr>
+                        <a:t>Semua modul, approval</a:t>
+                      </a:r>
+                      <a:endParaRPr lang="en-US" sz="1320" dirty="0"/>
+                    </a:p>
+                  </a:txBody>
+                  <a:tcPr marL="101600" marR="101600" marT="25400" marB="25400">
+                    <a:lnL w="6350" cap="flat" cmpd="sng" algn="ctr">
+                      <a:solidFill>
+                        <a:srgbClr val="D9CFBF"/>
+                      </a:solidFill>
+                      <a:prstDash val="solid"/>
+                      <a:round/>
+                      <a:headEnd type="none" w="med" len="med"/>
+                      <a:tailEnd type="none" w="med" len="med"/>
+                    </a:lnL>
+                    <a:lnR w="6350" cap="flat" cmpd="sng" algn="ctr">
+                      <a:solidFill>
+                        <a:srgbClr val="D9CFBF"/>
+                      </a:solidFill>
+                      <a:prstDash val="solid"/>
+                      <a:round/>
+                      <a:headEnd type="none" w="med" len="med"/>
+                      <a:tailEnd type="none" w="med" len="med"/>
+                    </a:lnR>
+                    <a:lnT w="6350" cap="flat" cmpd="sng" algn="ctr">
+                      <a:solidFill>
+                        <a:srgbClr val="D9CFBF"/>
+                      </a:solidFill>
+                      <a:prstDash val="solid"/>
+                      <a:round/>
+                      <a:headEnd type="none" w="med" len="med"/>
+                      <a:tailEnd type="none" w="med" len="med"/>
+                    </a:lnT>
+                    <a:lnB w="6350" cap="flat" cmpd="sng" algn="ctr">
+                      <a:solidFill>
+                        <a:srgbClr val="D9CFBF"/>
+                      </a:solidFill>
+                      <a:prstDash val="solid"/>
+                      <a:round/>
+                      <a:headEnd type="none" w="med" len="med"/>
+                      <a:tailEnd type="none" w="med" len="med"/>
+                    </a:lnB>
+                    <a:solidFill>
+                      <a:srgbClr val="F4EFE6"/>
+                    </a:solidFill>
+                  </a:tcPr>
+                </a:tc>
+              </a:tr>
+              <a:tr h="548626">
+                <a:tc>
+                  <a:txBody>
+                    <a:bodyPr/>
+                    <a:lstStyle/>
+                    <a:p>
+                      <a:pPr marL="0" indent="0" algn="l">
+                        <a:buNone/>
+                      </a:pPr>
+                      <a:r>
+                        <a:rPr lang="en-US" sz="1320" dirty="0">
+                          <a:solidFill>
+                            <a:srgbClr val="1A1814"/>
+                          </a:solidFill>
+                        </a:rPr>
+                        <a:t>Kasir</a:t>
+                      </a:r>
+                      <a:endParaRPr lang="en-US" sz="1320" dirty="0"/>
+                    </a:p>
+                  </a:txBody>
+                  <a:tcPr marL="101600" marR="101600" marT="25400" marB="25400">
+                    <a:lnL w="6350" cap="flat" cmpd="sng" algn="ctr">
+                      <a:solidFill>
+                        <a:srgbClr val="D9CFBF"/>
+                      </a:solidFill>
+                      <a:prstDash val="solid"/>
+                      <a:round/>
+                      <a:headEnd type="none" w="med" len="med"/>
+                      <a:tailEnd type="none" w="med" len="med"/>
+                    </a:lnL>
+                    <a:lnR w="6350" cap="flat" cmpd="sng" algn="ctr">
+                      <a:solidFill>
+                        <a:srgbClr val="D9CFBF"/>
+                      </a:solidFill>
+                      <a:prstDash val="solid"/>
+                      <a:round/>
+                      <a:headEnd type="none" w="med" len="med"/>
+                      <a:tailEnd type="none" w="med" len="med"/>
+                    </a:lnR>
+                    <a:lnT w="6350" cap="flat" cmpd="sng" algn="ctr">
+                      <a:solidFill>
+                        <a:srgbClr val="D9CFBF"/>
+                      </a:solidFill>
+                      <a:prstDash val="solid"/>
+                      <a:round/>
+                      <a:headEnd type="none" w="med" len="med"/>
+                      <a:tailEnd type="none" w="med" len="med"/>
+                    </a:lnT>
+                    <a:lnB w="6350" cap="flat" cmpd="sng" algn="ctr">
+                      <a:solidFill>
+                        <a:srgbClr val="D9CFBF"/>
+                      </a:solidFill>
+                      <a:prstDash val="solid"/>
+                      <a:round/>
+                      <a:headEnd type="none" w="med" len="med"/>
+                      <a:tailEnd type="none" w="med" len="med"/>
+                    </a:lnB>
+                    <a:solidFill>
+                      <a:srgbClr val="FBF8F3"/>
+                    </a:solidFill>
+                  </a:tcPr>
+                </a:tc>
+                <a:tc>
+                  <a:txBody>
+                    <a:bodyPr/>
+                    <a:lstStyle/>
+                    <a:p>
+                      <a:pPr marL="0" indent="0" algn="l">
+                        <a:buNone/>
+                      </a:pPr>
+                      <a:r>
+                        <a:rPr lang="en-US" sz="1320" dirty="0">
+                          <a:solidFill>
+                            <a:srgbClr val="1A1814"/>
+                          </a:solidFill>
+                        </a:rPr>
+                        <a:t>Penjualan harian, pembayaran</a:t>
+                      </a:r>
+                      <a:endParaRPr lang="en-US" sz="1320" dirty="0"/>
+                    </a:p>
+                  </a:txBody>
+                  <a:tcPr marL="101600" marR="101600" marT="25400" marB="25400">
+                    <a:lnL w="6350" cap="flat" cmpd="sng" algn="ctr">
+                      <a:solidFill>
+                        <a:srgbClr val="D9CFBF"/>
+                      </a:solidFill>
+                      <a:prstDash val="solid"/>
+                      <a:round/>
+                      <a:headEnd type="none" w="med" len="med"/>
+                      <a:tailEnd type="none" w="med" len="med"/>
+                    </a:lnL>
+                    <a:lnR w="6350" cap="flat" cmpd="sng" algn="ctr">
+                      <a:solidFill>
+                        <a:srgbClr val="D9CFBF"/>
+                      </a:solidFill>
+                      <a:prstDash val="solid"/>
+                      <a:round/>
+                      <a:headEnd type="none" w="med" len="med"/>
+                      <a:tailEnd type="none" w="med" len="med"/>
+                    </a:lnR>
+                    <a:lnT w="6350" cap="flat" cmpd="sng" algn="ctr">
+                      <a:solidFill>
+                        <a:srgbClr val="D9CFBF"/>
+                      </a:solidFill>
+                      <a:prstDash val="solid"/>
+                      <a:round/>
+                      <a:headEnd type="none" w="med" len="med"/>
+                      <a:tailEnd type="none" w="med" len="med"/>
+                    </a:lnT>
+                    <a:lnB w="6350" cap="flat" cmpd="sng" algn="ctr">
+                      <a:solidFill>
+                        <a:srgbClr val="D9CFBF"/>
+                      </a:solidFill>
+                      <a:prstDash val="solid"/>
+                      <a:round/>
+                      <a:headEnd type="none" w="med" len="med"/>
+                      <a:tailEnd type="none" w="med" len="med"/>
+                    </a:lnB>
+                    <a:solidFill>
+                      <a:srgbClr val="FBF8F3"/>
+                    </a:solidFill>
+                  </a:tcPr>
+                </a:tc>
+                <a:tc>
+                  <a:txBody>
+                    <a:bodyPr/>
+                    <a:lstStyle/>
+                    <a:p>
+                      <a:pPr marL="0" indent="0" algn="l">
+                        <a:buNone/>
+                      </a:pPr>
+                      <a:r>
+                        <a:rPr lang="en-US" sz="1320" dirty="0">
+                          <a:solidFill>
+                            <a:srgbClr val="1A1814"/>
+                          </a:solidFill>
+                        </a:rPr>
+                        <a:t>Input jual, stok terpotong</a:t>
+                      </a:r>
+                      <a:endParaRPr lang="en-US" sz="1320" dirty="0"/>
+                    </a:p>
+                  </a:txBody>
+                  <a:tcPr marL="101600" marR="101600" marT="25400" marB="25400">
+                    <a:lnL w="6350" cap="flat" cmpd="sng" algn="ctr">
+                      <a:solidFill>
+                        <a:srgbClr val="D9CFBF"/>
+                      </a:solidFill>
+                      <a:prstDash val="solid"/>
+                      <a:round/>
+                      <a:headEnd type="none" w="med" len="med"/>
+                      <a:tailEnd type="none" w="med" len="med"/>
+                    </a:lnL>
+                    <a:lnR w="6350" cap="flat" cmpd="sng" algn="ctr">
+                      <a:solidFill>
+                        <a:srgbClr val="D9CFBF"/>
+                      </a:solidFill>
+                      <a:prstDash val="solid"/>
+                      <a:round/>
+                      <a:headEnd type="none" w="med" len="med"/>
+                      <a:tailEnd type="none" w="med" len="med"/>
+                    </a:lnR>
+                    <a:lnT w="6350" cap="flat" cmpd="sng" algn="ctr">
+                      <a:solidFill>
+                        <a:srgbClr val="D9CFBF"/>
+                      </a:solidFill>
+                      <a:prstDash val="solid"/>
+                      <a:round/>
+                      <a:headEnd type="none" w="med" len="med"/>
+                      <a:tailEnd type="none" w="med" len="med"/>
+                    </a:lnT>
+                    <a:lnB w="6350" cap="flat" cmpd="sng" algn="ctr">
+                      <a:solidFill>
+                        <a:srgbClr val="D9CFBF"/>
+                      </a:solidFill>
+                      <a:prstDash val="solid"/>
+                      <a:round/>
+                      <a:headEnd type="none" w="med" len="med"/>
+                      <a:tailEnd type="none" w="med" len="med"/>
+                    </a:lnB>
+                    <a:solidFill>
+                      <a:srgbClr val="FBF8F3"/>
+                    </a:solidFill>
+                  </a:tcPr>
+                </a:tc>
+              </a:tr>
+              <a:tr h="548626">
+                <a:tc>
+                  <a:txBody>
+                    <a:bodyPr/>
+                    <a:lstStyle/>
+                    <a:p>
+                      <a:pPr marL="0" indent="0" algn="l">
+                        <a:buNone/>
+                      </a:pPr>
+                      <a:r>
+                        <a:rPr lang="en-US" sz="1320" dirty="0">
+                          <a:solidFill>
+                            <a:srgbClr val="1A1814"/>
+                          </a:solidFill>
+                        </a:rPr>
+                        <a:t>Gudang</a:t>
+                      </a:r>
+                      <a:endParaRPr lang="en-US" sz="1320" dirty="0"/>
+                    </a:p>
+                  </a:txBody>
+                  <a:tcPr marL="101600" marR="101600" marT="25400" marB="25400">
+                    <a:lnL w="6350" cap="flat" cmpd="sng" algn="ctr">
+                      <a:solidFill>
+                        <a:srgbClr val="D9CFBF"/>
+                      </a:solidFill>
+                      <a:prstDash val="solid"/>
+                      <a:round/>
+                      <a:headEnd type="none" w="med" len="med"/>
+                      <a:tailEnd type="none" w="med" len="med"/>
+                    </a:lnL>
+                    <a:lnR w="6350" cap="flat" cmpd="sng" algn="ctr">
+                      <a:solidFill>
+                        <a:srgbClr val="D9CFBF"/>
+                      </a:solidFill>
+                      <a:prstDash val="solid"/>
+                      <a:round/>
+                      <a:headEnd type="none" w="med" len="med"/>
+                      <a:tailEnd type="none" w="med" len="med"/>
+                    </a:lnR>
+                    <a:lnT w="6350" cap="flat" cmpd="sng" algn="ctr">
+                      <a:solidFill>
+                        <a:srgbClr val="D9CFBF"/>
+                      </a:solidFill>
+                      <a:prstDash val="solid"/>
+                      <a:round/>
+                      <a:headEnd type="none" w="med" len="med"/>
+                      <a:tailEnd type="none" w="med" len="med"/>
+                    </a:lnT>
+                    <a:lnB w="6350" cap="flat" cmpd="sng" algn="ctr">
+                      <a:solidFill>
+                        <a:srgbClr val="D9CFBF"/>
+                      </a:solidFill>
+                      <a:prstDash val="solid"/>
+                      <a:round/>
+                      <a:headEnd type="none" w="med" len="med"/>
+                      <a:tailEnd type="none" w="med" len="med"/>
+                    </a:lnB>
+                    <a:solidFill>
+                      <a:srgbClr val="F4EFE6"/>
+                    </a:solidFill>
+                  </a:tcPr>
+                </a:tc>
+                <a:tc>
+                  <a:txBody>
+                    <a:bodyPr/>
+                    <a:lstStyle/>
+                    <a:p>
+                      <a:pPr marL="0" indent="0" algn="l">
+                        <a:buNone/>
+                      </a:pPr>
+                      <a:r>
+                        <a:rPr lang="en-US" sz="1320" dirty="0">
+                          <a:solidFill>
+                            <a:srgbClr val="1A1814"/>
+                          </a:solidFill>
+                        </a:rPr>
+                        <a:t>Stok per batch, riwayat beli</a:t>
+                      </a:r>
+                      <a:endParaRPr lang="en-US" sz="1320" dirty="0"/>
+                    </a:p>
+                  </a:txBody>
+                  <a:tcPr marL="101600" marR="101600" marT="25400" marB="25400">
+                    <a:lnL w="6350" cap="flat" cmpd="sng" algn="ctr">
+                      <a:solidFill>
+                        <a:srgbClr val="D9CFBF"/>
+                      </a:solidFill>
+                      <a:prstDash val="solid"/>
+                      <a:round/>
+                      <a:headEnd type="none" w="med" len="med"/>
+                      <a:tailEnd type="none" w="med" len="med"/>
+                    </a:lnL>
+                    <a:lnR w="6350" cap="flat" cmpd="sng" algn="ctr">
+                      <a:solidFill>
+                        <a:srgbClr val="D9CFBF"/>
+                      </a:solidFill>
+                      <a:prstDash val="solid"/>
+                      <a:round/>
+                      <a:headEnd type="none" w="med" len="med"/>
+                      <a:tailEnd type="none" w="med" len="med"/>
+                    </a:lnR>
+                    <a:lnT w="6350" cap="flat" cmpd="sng" algn="ctr">
+                      <a:solidFill>
+                        <a:srgbClr val="D9CFBF"/>
+                      </a:solidFill>
+                      <a:prstDash val="solid"/>
+                      <a:round/>
+                      <a:headEnd type="none" w="med" len="med"/>
+                      <a:tailEnd type="none" w="med" len="med"/>
+                    </a:lnT>
+                    <a:lnB w="6350" cap="flat" cmpd="sng" algn="ctr">
+                      <a:solidFill>
+                        <a:srgbClr val="D9CFBF"/>
+                      </a:solidFill>
+                      <a:prstDash val="solid"/>
+                      <a:round/>
+                      <a:headEnd type="none" w="med" len="med"/>
+                      <a:tailEnd type="none" w="med" len="med"/>
+                    </a:lnB>
+                    <a:solidFill>
+                      <a:srgbClr val="F4EFE6"/>
+                    </a:solidFill>
+                  </a:tcPr>
+                </a:tc>
+                <a:tc>
+                  <a:txBody>
+                    <a:bodyPr/>
+                    <a:lstStyle/>
+                    <a:p>
+                      <a:pPr marL="0" indent="0" algn="l">
+                        <a:buNone/>
+                      </a:pPr>
+                      <a:r>
+                        <a:rPr lang="en-US" sz="1320" dirty="0">
+                          <a:solidFill>
+                            <a:srgbClr val="1A1814"/>
+                          </a:solidFill>
+                        </a:rPr>
+                        <a:t>Catat pembelian, cek FIFO</a:t>
+                      </a:r>
+                      <a:endParaRPr lang="en-US" sz="1320" dirty="0"/>
+                    </a:p>
+                  </a:txBody>
+                  <a:tcPr marL="101600" marR="101600" marT="25400" marB="25400">
+                    <a:lnL w="6350" cap="flat" cmpd="sng" algn="ctr">
+                      <a:solidFill>
+                        <a:srgbClr val="D9CFBF"/>
+                      </a:solidFill>
+                      <a:prstDash val="solid"/>
+                      <a:round/>
+                      <a:headEnd type="none" w="med" len="med"/>
+                      <a:tailEnd type="none" w="med" len="med"/>
+                    </a:lnL>
+                    <a:lnR w="6350" cap="flat" cmpd="sng" algn="ctr">
+                      <a:solidFill>
+                        <a:srgbClr val="D9CFBF"/>
+                      </a:solidFill>
+                      <a:prstDash val="solid"/>
+                      <a:round/>
+                      <a:headEnd type="none" w="med" len="med"/>
+                      <a:tailEnd type="none" w="med" len="med"/>
+                    </a:lnR>
+                    <a:lnT w="6350" cap="flat" cmpd="sng" algn="ctr">
+                      <a:solidFill>
+                        <a:srgbClr val="D9CFBF"/>
+                      </a:solidFill>
+                      <a:prstDash val="solid"/>
+                      <a:round/>
+                      <a:headEnd type="none" w="med" len="med"/>
+                      <a:tailEnd type="none" w="med" len="med"/>
+                    </a:lnT>
+                    <a:lnB w="6350" cap="flat" cmpd="sng" algn="ctr">
+                      <a:solidFill>
+                        <a:srgbClr val="D9CFBF"/>
+                      </a:solidFill>
+                      <a:prstDash val="solid"/>
+                      <a:round/>
+                      <a:headEnd type="none" w="med" len="med"/>
+                      <a:tailEnd type="none" w="med" len="med"/>
+                    </a:lnB>
+                    <a:solidFill>
+                      <a:srgbClr val="F4EFE6"/>
+                    </a:solidFill>
+                  </a:tcPr>
+                </a:tc>
+              </a:tr>
+              <a:tr h="548626">
+                <a:tc>
+                  <a:txBody>
+                    <a:bodyPr/>
+                    <a:lstStyle/>
+                    <a:p>
+                      <a:pPr marL="0" indent="0" algn="l">
+                        <a:buNone/>
+                      </a:pPr>
+                      <a:r>
+                        <a:rPr lang="en-US" sz="1320" dirty="0">
+                          <a:solidFill>
+                            <a:srgbClr val="1A1814"/>
+                          </a:solidFill>
+                        </a:rPr>
+                        <a:t>Marketing</a:t>
+                      </a:r>
+                      <a:endParaRPr lang="en-US" sz="1320" dirty="0"/>
+                    </a:p>
+                  </a:txBody>
+                  <a:tcPr marL="101600" marR="101600" marT="25400" marB="25400">
+                    <a:lnL w="6350" cap="flat" cmpd="sng" algn="ctr">
+                      <a:solidFill>
+                        <a:srgbClr val="D9CFBF"/>
+                      </a:solidFill>
+                      <a:prstDash val="solid"/>
+                      <a:round/>
+                      <a:headEnd type="none" w="med" len="med"/>
+                      <a:tailEnd type="none" w="med" len="med"/>
+                    </a:lnL>
+                    <a:lnR w="6350" cap="flat" cmpd="sng" algn="ctr">
+                      <a:solidFill>
+                        <a:srgbClr val="D9CFBF"/>
+                      </a:solidFill>
+                      <a:prstDash val="solid"/>
+                      <a:round/>
+                      <a:headEnd type="none" w="med" len="med"/>
+                      <a:tailEnd type="none" w="med" len="med"/>
+                    </a:lnR>
+                    <a:lnT w="6350" cap="flat" cmpd="sng" algn="ctr">
+                      <a:solidFill>
+                        <a:srgbClr val="D9CFBF"/>
+                      </a:solidFill>
+                      <a:prstDash val="solid"/>
+                      <a:round/>
+                      <a:headEnd type="none" w="med" len="med"/>
+                      <a:tailEnd type="none" w="med" len="med"/>
+                    </a:lnT>
+                    <a:lnB w="6350" cap="flat" cmpd="sng" algn="ctr">
+                      <a:solidFill>
+                        <a:srgbClr val="D9CFBF"/>
+                      </a:solidFill>
+                      <a:prstDash val="solid"/>
+                      <a:round/>
+                      <a:headEnd type="none" w="med" len="med"/>
+                      <a:tailEnd type="none" w="med" len="med"/>
+                    </a:lnB>
+                    <a:solidFill>
+                      <a:srgbClr val="FBF8F3"/>
+                    </a:solidFill>
+                  </a:tcPr>
+                </a:tc>
+                <a:tc>
+                  <a:txBody>
+                    <a:bodyPr/>
+                    <a:lstStyle/>
+                    <a:p>
+                      <a:pPr marL="0" indent="0" algn="l">
+                        <a:buNone/>
+                      </a:pPr>
+                      <a:r>
+                        <a:rPr lang="en-US" sz="1320" dirty="0">
+                          <a:solidFill>
+                            <a:srgbClr val="1A1814"/>
+                          </a:solidFill>
+                        </a:rPr>
+                        <a:t>KOL &amp; influencer: fee, kode, redeem</a:t>
+                      </a:r>
+                      <a:endParaRPr lang="en-US" sz="1320" dirty="0"/>
+                    </a:p>
+                  </a:txBody>
+                  <a:tcPr marL="101600" marR="101600" marT="25400" marB="25400">
+                    <a:lnL w="6350" cap="flat" cmpd="sng" algn="ctr">
+                      <a:solidFill>
+                        <a:srgbClr val="D9CFBF"/>
+                      </a:solidFill>
+                      <a:prstDash val="solid"/>
+                      <a:round/>
+                      <a:headEnd type="none" w="med" len="med"/>
+                      <a:tailEnd type="none" w="med" len="med"/>
+                    </a:lnL>
+                    <a:lnR w="6350" cap="flat" cmpd="sng" algn="ctr">
+                      <a:solidFill>
+                        <a:srgbClr val="D9CFBF"/>
+                      </a:solidFill>
+                      <a:prstDash val="solid"/>
+                      <a:round/>
+                      <a:headEnd type="none" w="med" len="med"/>
+                      <a:tailEnd type="none" w="med" len="med"/>
+                    </a:lnR>
+                    <a:lnT w="6350" cap="flat" cmpd="sng" algn="ctr">
+                      <a:solidFill>
+                        <a:srgbClr val="D9CFBF"/>
+                      </a:solidFill>
+                      <a:prstDash val="solid"/>
+                      <a:round/>
+                      <a:headEnd type="none" w="med" len="med"/>
+                      <a:tailEnd type="none" w="med" len="med"/>
+                    </a:lnT>
+                    <a:lnB w="6350" cap="flat" cmpd="sng" algn="ctr">
+                      <a:solidFill>
+                        <a:srgbClr val="D9CFBF"/>
+                      </a:solidFill>
+                      <a:prstDash val="solid"/>
+                      <a:round/>
+                      <a:headEnd type="none" w="med" len="med"/>
+                      <a:tailEnd type="none" w="med" len="med"/>
+                    </a:lnB>
+                    <a:solidFill>
+                      <a:srgbClr val="FBF8F3"/>
+                    </a:solidFill>
+                  </a:tcPr>
+                </a:tc>
+                <a:tc>
+                  <a:txBody>
+                    <a:bodyPr/>
+                    <a:lstStyle/>
+                    <a:p>
+                      <a:pPr marL="0" indent="0" algn="l">
+                        <a:buNone/>
+                      </a:pPr>
+                      <a:r>
+                        <a:rPr lang="en-US" sz="1320" dirty="0">
+                          <a:solidFill>
+                            <a:srgbClr val="1A1814"/>
+                          </a:solidFill>
+                        </a:rPr>
+                        <a:t>Pantau ROI per KOL</a:t>
+                      </a:r>
+                      <a:endParaRPr lang="en-US" sz="1320" dirty="0"/>
+                    </a:p>
+                  </a:txBody>
+                  <a:tcPr marL="101600" marR="101600" marT="25400" marB="25400">
+                    <a:lnL w="6350" cap="flat" cmpd="sng" algn="ctr">
+                      <a:solidFill>
+                        <a:srgbClr val="D9CFBF"/>
+                      </a:solidFill>
+                      <a:prstDash val="solid"/>
+                      <a:round/>
+                      <a:headEnd type="none" w="med" len="med"/>
+                      <a:tailEnd type="none" w="med" len="med"/>
+                    </a:lnL>
+                    <a:lnR w="6350" cap="flat" cmpd="sng" algn="ctr">
+                      <a:solidFill>
+                        <a:srgbClr val="D9CFBF"/>
+                      </a:solidFill>
+                      <a:prstDash val="solid"/>
+                      <a:round/>
+                      <a:headEnd type="none" w="med" len="med"/>
+                      <a:tailEnd type="none" w="med" len="med"/>
+                    </a:lnR>
+                    <a:lnT w="6350" cap="flat" cmpd="sng" algn="ctr">
+                      <a:solidFill>
+                        <a:srgbClr val="D9CFBF"/>
+                      </a:solidFill>
+                      <a:prstDash val="solid"/>
+                      <a:round/>
+                      <a:headEnd type="none" w="med" len="med"/>
+                      <a:tailEnd type="none" w="med" len="med"/>
+                    </a:lnT>
+                    <a:lnB w="6350" cap="flat" cmpd="sng" algn="ctr">
+                      <a:solidFill>
+                        <a:srgbClr val="D9CFBF"/>
+                      </a:solidFill>
+                      <a:prstDash val="solid"/>
+                      <a:round/>
+                      <a:headEnd type="none" w="med" len="med"/>
+                      <a:tailEnd type="none" w="med" len="med"/>
+                    </a:lnB>
+                    <a:solidFill>
+                      <a:srgbClr val="FBF8F3"/>
+                    </a:solidFill>
+                  </a:tcPr>
+                </a:tc>
+              </a:tr>
+              <a:tr h="548626">
+                <a:tc>
+                  <a:txBody>
+                    <a:bodyPr/>
+                    <a:lstStyle/>
+                    <a:p>
+                      <a:pPr marL="0" indent="0" algn="l">
+                        <a:buNone/>
+                      </a:pPr>
+                      <a:r>
+                        <a:rPr lang="en-US" sz="1320" dirty="0">
+                          <a:solidFill>
+                            <a:srgbClr val="1A1814"/>
+                          </a:solidFill>
+                        </a:rPr>
+                        <a:t>Chef R&amp;D</a:t>
+                      </a:r>
+                      <a:endParaRPr lang="en-US" sz="1320" dirty="0"/>
+                    </a:p>
+                  </a:txBody>
+                  <a:tcPr marL="101600" marR="101600" marT="25400" marB="25400">
+                    <a:lnL w="6350" cap="flat" cmpd="sng" algn="ctr">
+                      <a:solidFill>
+                        <a:srgbClr val="D9CFBF"/>
+                      </a:solidFill>
+                      <a:prstDash val="solid"/>
+                      <a:round/>
+                      <a:headEnd type="none" w="med" len="med"/>
+                      <a:tailEnd type="none" w="med" len="med"/>
+                    </a:lnL>
+                    <a:lnR w="6350" cap="flat" cmpd="sng" algn="ctr">
+                      <a:solidFill>
+                        <a:srgbClr val="D9CFBF"/>
+                      </a:solidFill>
+                      <a:prstDash val="solid"/>
+                      <a:round/>
+                      <a:headEnd type="none" w="med" len="med"/>
+                      <a:tailEnd type="none" w="med" len="med"/>
+                    </a:lnR>
+                    <a:lnT w="6350" cap="flat" cmpd="sng" algn="ctr">
+                      <a:solidFill>
+                        <a:srgbClr val="D9CFBF"/>
+                      </a:solidFill>
+                      <a:prstDash val="solid"/>
+                      <a:round/>
+                      <a:headEnd type="none" w="med" len="med"/>
+                      <a:tailEnd type="none" w="med" len="med"/>
+                    </a:lnT>
+                    <a:lnB w="6350" cap="flat" cmpd="sng" algn="ctr">
+                      <a:solidFill>
+                        <a:srgbClr val="D9CFBF"/>
+                      </a:solidFill>
+                      <a:prstDash val="solid"/>
+                      <a:round/>
+                      <a:headEnd type="none" w="med" len="med"/>
+                      <a:tailEnd type="none" w="med" len="med"/>
+                    </a:lnB>
+                    <a:solidFill>
+                      <a:srgbClr val="F4EFE6"/>
+                    </a:solidFill>
+                  </a:tcPr>
+                </a:tc>
+                <a:tc>
+                  <a:txBody>
+                    <a:bodyPr/>
+                    <a:lstStyle/>
+                    <a:p>
+                      <a:pPr marL="0" indent="0" algn="l">
+                        <a:buNone/>
+                      </a:pPr>
+                      <a:r>
+                        <a:rPr lang="en-US" sz="1320" dirty="0">
+                          <a:solidFill>
+                            <a:srgbClr val="1A1814"/>
+                          </a:solidFill>
+                        </a:rPr>
+                        <a:t>Resep per menu, HPP, margin</a:t>
+                      </a:r>
+                      <a:endParaRPr lang="en-US" sz="1320" dirty="0"/>
+                    </a:p>
+                  </a:txBody>
+                  <a:tcPr marL="101600" marR="101600" marT="25400" marB="25400">
+                    <a:lnL w="6350" cap="flat" cmpd="sng" algn="ctr">
+                      <a:solidFill>
+                        <a:srgbClr val="D9CFBF"/>
+                      </a:solidFill>
+                      <a:prstDash val="solid"/>
+                      <a:round/>
+                      <a:headEnd type="none" w="med" len="med"/>
+                      <a:tailEnd type="none" w="med" len="med"/>
+                    </a:lnL>
+                    <a:lnR w="6350" cap="flat" cmpd="sng" algn="ctr">
+                      <a:solidFill>
+                        <a:srgbClr val="D9CFBF"/>
+                      </a:solidFill>
+                      <a:prstDash val="solid"/>
+                      <a:round/>
+                      <a:headEnd type="none" w="med" len="med"/>
+                      <a:tailEnd type="none" w="med" len="med"/>
+                    </a:lnR>
+                    <a:lnT w="6350" cap="flat" cmpd="sng" algn="ctr">
+                      <a:solidFill>
+                        <a:srgbClr val="D9CFBF"/>
+                      </a:solidFill>
+                      <a:prstDash val="solid"/>
+                      <a:round/>
+                      <a:headEnd type="none" w="med" len="med"/>
+                      <a:tailEnd type="none" w="med" len="med"/>
+                    </a:lnT>
+                    <a:lnB w="6350" cap="flat" cmpd="sng" algn="ctr">
+                      <a:solidFill>
+                        <a:srgbClr val="D9CFBF"/>
+                      </a:solidFill>
+                      <a:prstDash val="solid"/>
+                      <a:round/>
+                      <a:headEnd type="none" w="med" len="med"/>
+                      <a:tailEnd type="none" w="med" len="med"/>
+                    </a:lnB>
+                    <a:solidFill>
+                      <a:srgbClr val="F4EFE6"/>
+                    </a:solidFill>
+                  </a:tcPr>
+                </a:tc>
+                <a:tc>
+                  <a:txBody>
+                    <a:bodyPr/>
+                    <a:lstStyle/>
+                    <a:p>
+                      <a:pPr marL="0" indent="0" algn="l">
+                        <a:buNone/>
+                      </a:pPr>
+                      <a:r>
+                        <a:rPr lang="en-US" sz="1320" dirty="0">
+                          <a:solidFill>
+                            <a:srgbClr val="1A1814"/>
+                          </a:solidFill>
+                        </a:rPr>
+                        <a:t>Cek HPP vs target 35%</a:t>
+                      </a:r>
+                      <a:endParaRPr lang="en-US" sz="1320" dirty="0"/>
+                    </a:p>
+                  </a:txBody>
+                  <a:tcPr marL="101600" marR="101600" marT="25400" marB="25400">
+                    <a:lnL w="6350" cap="flat" cmpd="sng" algn="ctr">
+                      <a:solidFill>
+                        <a:srgbClr val="D9CFBF"/>
+                      </a:solidFill>
+                      <a:prstDash val="solid"/>
+                      <a:round/>
+                      <a:headEnd type="none" w="med" len="med"/>
+                      <a:tailEnd type="none" w="med" len="med"/>
+                    </a:lnL>
+                    <a:lnR w="6350" cap="flat" cmpd="sng" algn="ctr">
+                      <a:solidFill>
+                        <a:srgbClr val="D9CFBF"/>
+                      </a:solidFill>
+                      <a:prstDash val="solid"/>
+                      <a:round/>
+                      <a:headEnd type="none" w="med" len="med"/>
+                      <a:tailEnd type="none" w="med" len="med"/>
+                    </a:lnR>
+                    <a:lnT w="6350" cap="flat" cmpd="sng" algn="ctr">
+                      <a:solidFill>
+                        <a:srgbClr val="D9CFBF"/>
+                      </a:solidFill>
+                      <a:prstDash val="solid"/>
+                      <a:round/>
+                      <a:headEnd type="none" w="med" len="med"/>
+                      <a:tailEnd type="none" w="med" len="med"/>
+                    </a:lnT>
+                    <a:lnB w="6350" cap="flat" cmpd="sng" algn="ctr">
+                      <a:solidFill>
+                        <a:srgbClr val="D9CFBF"/>
+                      </a:solidFill>
+                      <a:prstDash val="solid"/>
+                      <a:round/>
+                      <a:headEnd type="none" w="med" len="med"/>
+                      <a:tailEnd type="none" w="med" len="med"/>
+                    </a:lnB>
+                    <a:solidFill>
+                      <a:srgbClr val="F4EFE6"/>
+                    </a:solidFill>
+                  </a:tcPr>
+                </a:tc>
+              </a:tr>
+              <a:tr h="548626">
+                <a:tc>
+                  <a:txBody>
+                    <a:bodyPr/>
+                    <a:lstStyle/>
+                    <a:p>
+                      <a:pPr marL="0" indent="0" algn="l">
+                        <a:buNone/>
+                      </a:pPr>
+                      <a:r>
+                        <a:rPr lang="en-US" sz="1320" dirty="0">
+                          <a:solidFill>
+                            <a:srgbClr val="1A1814"/>
+                          </a:solidFill>
+                        </a:rPr>
+                        <a:t>Pengelola kos</a:t>
+                      </a:r>
+                      <a:endParaRPr lang="en-US" sz="1320" dirty="0"/>
+                    </a:p>
+                  </a:txBody>
+                  <a:tcPr marL="101600" marR="101600" marT="25400" marB="25400">
+                    <a:lnL w="6350" cap="flat" cmpd="sng" algn="ctr">
+                      <a:solidFill>
+                        <a:srgbClr val="D9CFBF"/>
+                      </a:solidFill>
+                      <a:prstDash val="solid"/>
+                      <a:round/>
+                      <a:headEnd type="none" w="med" len="med"/>
+                      <a:tailEnd type="none" w="med" len="med"/>
+                    </a:lnL>
+                    <a:lnR w="6350" cap="flat" cmpd="sng" algn="ctr">
+                      <a:solidFill>
+                        <a:srgbClr val="D9CFBF"/>
+                      </a:solidFill>
+                      <a:prstDash val="solid"/>
+                      <a:round/>
+                      <a:headEnd type="none" w="med" len="med"/>
+                      <a:tailEnd type="none" w="med" len="med"/>
+                    </a:lnR>
+                    <a:lnT w="6350" cap="flat" cmpd="sng" algn="ctr">
+                      <a:solidFill>
+                        <a:srgbClr val="D9CFBF"/>
+                      </a:solidFill>
+                      <a:prstDash val="solid"/>
+                      <a:round/>
+                      <a:headEnd type="none" w="med" len="med"/>
+                      <a:tailEnd type="none" w="med" len="med"/>
+                    </a:lnT>
+                    <a:lnB w="6350" cap="flat" cmpd="sng" algn="ctr">
+                      <a:solidFill>
+                        <a:srgbClr val="D9CFBF"/>
+                      </a:solidFill>
+                      <a:prstDash val="solid"/>
+                      <a:round/>
+                      <a:headEnd type="none" w="med" len="med"/>
+                      <a:tailEnd type="none" w="med" len="med"/>
+                    </a:lnB>
+                    <a:solidFill>
+                      <a:srgbClr val="FBF8F3"/>
+                    </a:solidFill>
+                  </a:tcPr>
+                </a:tc>
+                <a:tc>
+                  <a:txBody>
+                    <a:bodyPr/>
+                    <a:lstStyle/>
+                    <a:p>
+                      <a:pPr marL="0" indent="0" algn="l">
+                        <a:buNone/>
+                      </a:pPr>
+                      <a:r>
+                        <a:rPr lang="en-US" sz="1320" dirty="0">
+                          <a:solidFill>
+                            <a:srgbClr val="1A1814"/>
+                          </a:solidFill>
+                        </a:rPr>
+                        <a:t>Hunian kamar, tagihan sewa</a:t>
+                      </a:r>
+                      <a:endParaRPr lang="en-US" sz="1320" dirty="0"/>
+                    </a:p>
+                  </a:txBody>
+                  <a:tcPr marL="101600" marR="101600" marT="25400" marB="25400">
+                    <a:lnL w="6350" cap="flat" cmpd="sng" algn="ctr">
+                      <a:solidFill>
+                        <a:srgbClr val="D9CFBF"/>
+                      </a:solidFill>
+                      <a:prstDash val="solid"/>
+                      <a:round/>
+                      <a:headEnd type="none" w="med" len="med"/>
+                      <a:tailEnd type="none" w="med" len="med"/>
+                    </a:lnL>
+                    <a:lnR w="6350" cap="flat" cmpd="sng" algn="ctr">
+                      <a:solidFill>
+                        <a:srgbClr val="D9CFBF"/>
+                      </a:solidFill>
+                      <a:prstDash val="solid"/>
+                      <a:round/>
+                      <a:headEnd type="none" w="med" len="med"/>
+                      <a:tailEnd type="none" w="med" len="med"/>
+                    </a:lnR>
+                    <a:lnT w="6350" cap="flat" cmpd="sng" algn="ctr">
+                      <a:solidFill>
+                        <a:srgbClr val="D9CFBF"/>
+                      </a:solidFill>
+                      <a:prstDash val="solid"/>
+                      <a:round/>
+                      <a:headEnd type="none" w="med" len="med"/>
+                      <a:tailEnd type="none" w="med" len="med"/>
+                    </a:lnT>
+                    <a:lnB w="6350" cap="flat" cmpd="sng" algn="ctr">
+                      <a:solidFill>
+                        <a:srgbClr val="D9CFBF"/>
+                      </a:solidFill>
+                      <a:prstDash val="solid"/>
+                      <a:round/>
+                      <a:headEnd type="none" w="med" len="med"/>
+                      <a:tailEnd type="none" w="med" len="med"/>
+                    </a:lnB>
+                    <a:solidFill>
+                      <a:srgbClr val="FBF8F3"/>
+                    </a:solidFill>
+                  </a:tcPr>
+                </a:tc>
+                <a:tc>
+                  <a:txBody>
+                    <a:bodyPr/>
+                    <a:lstStyle/>
+                    <a:p>
+                      <a:pPr marL="0" indent="0" algn="l">
+                        <a:buNone/>
+                      </a:pPr>
+                      <a:r>
+                        <a:rPr lang="en-US" sz="1320" dirty="0">
+                          <a:solidFill>
+                            <a:srgbClr val="1A1814"/>
+                          </a:solidFill>
+                        </a:rPr>
+                        <a:t>Tandai lunas</a:t>
+                      </a:r>
+                      <a:endParaRPr lang="en-US" sz="1320" dirty="0"/>
+                    </a:p>
+                  </a:txBody>
+                  <a:tcPr marL="101600" marR="101600" marT="25400" marB="25400">
+                    <a:lnL w="6350" cap="flat" cmpd="sng" algn="ctr">
+                      <a:solidFill>
+                        <a:srgbClr val="D9CFBF"/>
+                      </a:solidFill>
+                      <a:prstDash val="solid"/>
+                      <a:round/>
+                      <a:headEnd type="none" w="med" len="med"/>
+                      <a:tailEnd type="none" w="med" len="med"/>
+                    </a:lnL>
+                    <a:lnR w="6350" cap="flat" cmpd="sng" algn="ctr">
+                      <a:solidFill>
+                        <a:srgbClr val="D9CFBF"/>
+                      </a:solidFill>
+                      <a:prstDash val="solid"/>
+                      <a:round/>
+                      <a:headEnd type="none" w="med" len="med"/>
+                      <a:tailEnd type="none" w="med" len="med"/>
+                    </a:lnR>
+                    <a:lnT w="6350" cap="flat" cmpd="sng" algn="ctr">
+                      <a:solidFill>
+                        <a:srgbClr val="D9CFBF"/>
+                      </a:solidFill>
+                      <a:prstDash val="solid"/>
+                      <a:round/>
+                      <a:headEnd type="none" w="med" len="med"/>
+                      <a:tailEnd type="none" w="med" len="med"/>
+                    </a:lnT>
+                    <a:lnB w="6350" cap="flat" cmpd="sng" algn="ctr">
+                      <a:solidFill>
+                        <a:srgbClr val="D9CFBF"/>
+                      </a:solidFill>
+                      <a:prstDash val="solid"/>
+                      <a:round/>
+                      <a:headEnd type="none" w="med" len="med"/>
+                      <a:tailEnd type="none" w="med" len="med"/>
+                    </a:lnB>
+                    <a:solidFill>
+                      <a:srgbClr val="FBF8F3"/>
+                    </a:solidFill>
+                  </a:tcPr>
+                </a:tc>
+              </a:tr>
+            </a:tbl>
+          </a:graphicData>
+        </a:graphic>
+      </p:graphicFrame>
+      <p:sp>
+        <p:nvSpPr>
+          <p:cNvPr id="10" name="Text 7"/>
+          <p:cNvSpPr/>
+          <p:nvPr/>
+        </p:nvSpPr>
+        <p:spPr>
+          <a:xfrm>
+            <a:off x="426709" y="5852160"/>
+            <a:ext cx="11338277" cy="487668"/>
+          </a:xfrm>
+          <a:prstGeom prst="rect">
+            <a:avLst/>
+          </a:prstGeom>
+          <a:noFill/>
+        </p:spPr>
+        <p:txBody>
+          <a:bodyPr wrap="square" lIns="0" tIns="0" rIns="0" bIns="0" rtlCol="0" anchor="ctr"/>
+          <a:lstStyle/>
+          <a:p>
+            <a:pPr marL="0" indent="0">
+              <a:buNone/>
+            </a:pPr>
+            <a:r>
+              <a:rPr lang="en-US" sz="1680" b="1" dirty="0">
+                <a:solidFill>
+                  <a:srgbClr val="2F5D50"/>
+                </a:solidFill>
+                <a:latin typeface="Calibri" panose="020F0502020204030204" pitchFamily="34" charset="0"/>
+                <a:ea typeface="Calibri" panose="020F0502020204030204" pitchFamily="34" charset="-122"/>
+                <a:cs typeface="Calibri" panose="020F0502020204030204" pitchFamily="34" charset="-120"/>
+              </a:rPr>
+              <a:t>Contoh jalan di halaman /dashboard web HUNI. Data contoh, belum terhubung ke POS.</a:t>
+            </a:r>
+            <a:endParaRPr lang="en-US" sz="1680" dirty="0"/>
+          </a:p>
+        </p:txBody>
+      </p:sp>
+    </p:spTree>
+  </p:cSld>
+  <p:clrMapOvr>
+    <a:masterClrMapping/>
+  </p:clrMapOvr>
+</p:sld>
+</file>
+
+<file path=ppt/slides/slide31.xml><?xml version="1.0" encoding="utf-8"?>
+<p:sld xmlns:a="http://schemas.openxmlformats.org/drawingml/2006/main" xmlns:p="http://schemas.openxmlformats.org/presentationml/2006/main" xmlns:r="http://schemas.openxmlformats.org/officeDocument/2006/relationships">
+  <p:cSld>
+    <p:spTree>
+      <p:nvGrpSpPr>
+        <p:cNvPr id="1" name=""/>
+        <p:cNvGrpSpPr/>
+        <p:nvPr/>
+      </p:nvGrpSpPr>
+      <p:grpSpPr/>
+      <p:sp>
+        <p:nvSpPr>
+          <p:cNvPr id="2" name="Shape 0"/>
+          <p:cNvSpPr/>
+          <p:nvPr/>
+        </p:nvSpPr>
+        <p:spPr>
+          <a:xfrm>
+            <a:off x="0" y="0"/>
+            <a:ext cx="12191695" cy="6858000"/>
+          </a:xfrm>
+          <a:prstGeom prst="rect">
+            <a:avLst/>
+          </a:prstGeom>
+          <a:solidFill>
+            <a:srgbClr val="F4EFE6"/>
+          </a:solidFill>
+        </p:spPr>
+        <p:txBody>
+          <a:bodyPr/>
+          <a:p/>
+        </p:txBody>
+      </p:sp>
+      <p:sp>
+        <p:nvSpPr>
+          <p:cNvPr id="3" name="Shape 1"/>
+          <p:cNvSpPr/>
+          <p:nvPr/>
+        </p:nvSpPr>
+        <p:spPr>
+          <a:xfrm>
+            <a:off x="0" y="0"/>
+            <a:ext cx="91440" cy="6858000"/>
+          </a:xfrm>
+          <a:prstGeom prst="rect">
+            <a:avLst/>
+          </a:prstGeom>
+          <a:solidFill>
+            <a:srgbClr val="C4622D"/>
+          </a:solidFill>
+        </p:spPr>
+        <p:txBody>
+          <a:bodyPr/>
+          <a:p/>
+        </p:txBody>
+      </p:sp>
+      <p:sp>
+        <p:nvSpPr>
+          <p:cNvPr id="4" name="Shape 2"/>
+          <p:cNvSpPr/>
+          <p:nvPr/>
+        </p:nvSpPr>
+        <p:spPr>
+          <a:xfrm>
+            <a:off x="0" y="6601968"/>
+            <a:ext cx="12191695" cy="256032"/>
+          </a:xfrm>
+          <a:prstGeom prst="rect">
+            <a:avLst/>
+          </a:prstGeom>
+          <a:solidFill>
+            <a:srgbClr val="1A1814"/>
+          </a:solidFill>
+        </p:spPr>
+        <p:txBody>
+          <a:bodyPr/>
+          <a:p/>
+        </p:txBody>
+      </p:sp>
+      <p:sp>
+        <p:nvSpPr>
+          <p:cNvPr id="5" name="Text 3"/>
+          <p:cNvSpPr/>
+          <p:nvPr/>
+        </p:nvSpPr>
+        <p:spPr>
+          <a:xfrm>
+            <a:off x="347472" y="6601968"/>
+            <a:ext cx="9144000" cy="256032"/>
+          </a:xfrm>
+          <a:prstGeom prst="rect">
+            <a:avLst/>
+          </a:prstGeom>
+          <a:noFill/>
+        </p:spPr>
+        <p:txBody>
+          <a:bodyPr wrap="square" lIns="0" tIns="0" rIns="0" bIns="0" rtlCol="0" anchor="ctr"/>
+          <a:lstStyle/>
+          <a:p>
+            <a:pPr marL="0" indent="0">
+              <a:buNone/>
+            </a:pPr>
+            <a:r>
+              <a:rPr lang="en-US" sz="1100" dirty="0">
+                <a:solidFill>
+                  <a:srgbClr val="E7DCC8"/>
+                </a:solidFill>
+                <a:latin typeface="Calibri" panose="020F0502020204030204" pitchFamily="34" charset="0"/>
+                <a:ea typeface="Calibri" panose="020F0502020204030204" pitchFamily="34" charset="-122"/>
+                <a:cs typeface="Calibri" panose="020F0502020204030204" pitchFamily="34" charset="-120"/>
+              </a:rPr>
+              <a:t>HUNI   ·   Proposal website kos &amp; kontrakan   ·   Oktober 2026</a:t>
+            </a:r>
+            <a:endParaRPr lang="en-US" sz="1100" dirty="0"/>
+          </a:p>
+        </p:txBody>
+      </p:sp>
+      <p:sp>
+        <p:nvSpPr>
+          <p:cNvPr id="6" name="Text 4"/>
+          <p:cNvSpPr/>
+          <p:nvPr/>
+        </p:nvSpPr>
+        <p:spPr>
+          <a:xfrm>
+            <a:off x="9509760" y="6601968"/>
+            <a:ext cx="2331720" cy="256032"/>
+          </a:xfrm>
+          <a:prstGeom prst="rect">
+            <a:avLst/>
+          </a:prstGeom>
+          <a:noFill/>
+        </p:spPr>
+        <p:txBody>
+          <a:bodyPr wrap="square" lIns="0" tIns="0" rIns="0" bIns="0" rtlCol="0" anchor="ctr"/>
+          <a:lstStyle/>
+          <a:p>
+            <a:pPr marL="0" indent="0" algn="r">
+              <a:buNone/>
+            </a:pPr>
+            <a:r>
+              <a:rPr lang="en-US" sz="1100" dirty="0">
+                <a:solidFill>
+                  <a:srgbClr val="E7DCC8"/>
+                </a:solidFill>
+                <a:latin typeface="Calibri" panose="020F0502020204030204" pitchFamily="34" charset="0"/>
+                <a:ea typeface="Calibri" panose="020F0502020204030204" pitchFamily="34" charset="-122"/>
+                <a:cs typeface="Calibri" panose="020F0502020204030204" pitchFamily="34" charset="-120"/>
+              </a:rPr>
+              <a:t>19  /  33</a:t>
+            </a:r>
+            <a:endParaRPr lang="en-US" sz="1100" dirty="0"/>
+          </a:p>
+        </p:txBody>
+      </p:sp>
+      <p:sp>
+        <p:nvSpPr>
+          <p:cNvPr id="7" name="Text 5"/>
+          <p:cNvSpPr/>
+          <p:nvPr/>
+        </p:nvSpPr>
+        <p:spPr>
+          <a:xfrm>
+            <a:off x="426709" y="304792"/>
+            <a:ext cx="11338277" cy="731502"/>
+          </a:xfrm>
+          <a:prstGeom prst="rect">
+            <a:avLst/>
+          </a:prstGeom>
+          <a:noFill/>
+        </p:spPr>
+        <p:txBody>
+          <a:bodyPr wrap="square" lIns="0" tIns="0" rIns="0" bIns="0" rtlCol="0" anchor="ctr"/>
+          <a:lstStyle/>
+          <a:p>
+            <a:pPr marL="0" indent="0">
+              <a:buNone/>
+            </a:pPr>
+            <a:r>
+              <a:rPr lang="en-US" sz="3120" b="1" dirty="0">
+                <a:solidFill>
+                  <a:srgbClr val="1A1814"/>
+                </a:solidFill>
+                <a:latin typeface="Georgia" panose="02040502050405020303" pitchFamily="34" charset="0"/>
+                <a:ea typeface="Georgia" panose="02040502050405020303" pitchFamily="34" charset="-122"/>
+                <a:cs typeface="Georgia" panose="02040502050405020303" pitchFamily="34" charset="-120"/>
+              </a:rPr>
+              <a:t>Gudang: stok FIFO per batch</a:t>
+            </a:r>
+            <a:endParaRPr lang="en-US" sz="3120" dirty="0"/>
+          </a:p>
+        </p:txBody>
+      </p:sp>
+      <p:sp>
+        <p:nvSpPr>
+          <p:cNvPr id="8" name="Text 6"/>
+          <p:cNvSpPr/>
+          <p:nvPr/>
+        </p:nvSpPr>
+        <p:spPr>
+          <a:xfrm>
+            <a:off x="426709" y="1072869"/>
+            <a:ext cx="11338277" cy="487668"/>
+          </a:xfrm>
+          <a:prstGeom prst="rect">
+            <a:avLst/>
+          </a:prstGeom>
+          <a:noFill/>
+        </p:spPr>
+        <p:txBody>
+          <a:bodyPr wrap="square" lIns="0" tIns="0" rIns="0" bIns="0" rtlCol="0" anchor="ctr"/>
+          <a:lstStyle/>
+          <a:p>
+            <a:pPr marL="0" indent="0">
+              <a:buNone/>
+            </a:pPr>
+            <a:r>
+              <a:rPr lang="en-US" sz="1560" dirty="0">
+                <a:solidFill>
+                  <a:srgbClr val="6F675C"/>
+                </a:solidFill>
+                <a:latin typeface="Calibri" panose="020F0502020204030204" pitchFamily="34" charset="0"/>
+                <a:ea typeface="Calibri" panose="020F0502020204030204" pitchFamily="34" charset="-122"/>
+                <a:cs typeface="Calibri" panose="020F0502020204030204" pitchFamily="34" charset="-120"/>
+              </a:rPr>
+              <a:t>Tiap pembelian jadi satu batch. Penjualan memotong batch tertua dulu.</a:t>
+            </a:r>
+            <a:endParaRPr lang="en-US" sz="1560" dirty="0"/>
+          </a:p>
+        </p:txBody>
+      </p:sp>
+      <p:graphicFrame>
+        <p:nvGraphicFramePr>
+          <p:cNvPr id="14" name="Table 0"/>
+          <p:cNvGraphicFramePr>
+            <a:graphicFrameLocks noGrp="1"/>
+          </p:cNvGraphicFramePr>
+          <p:nvPr/>
+        </p:nvGraphicFramePr>
+        <p:xfrm>
+          <a:off x="426709" y="1828754"/>
+          <a:ext cx="11338560" cy="3291756"/>
+        </p:xfrm>
+        <a:graphic>
+          <a:graphicData uri="http://schemas.openxmlformats.org/drawingml/2006/table">
+            <a:tbl>
+              <a:tblPr/>
+              <a:tblGrid>
+                <a:gridCol w="4572000"/>
+                <a:gridCol w="3840480"/>
+                <a:gridCol w="2926080"/>
+              </a:tblGrid>
+              <a:tr h="548626">
+                <a:tc>
+                  <a:txBody>
+                    <a:bodyPr/>
+                    <a:lstStyle/>
+                    <a:p>
+                      <a:pPr marL="0" indent="0" algn="l">
+                        <a:buNone/>
+                      </a:pPr>
+                      <a:r>
+                        <a:rPr lang="en-US" sz="1320" b="1" dirty="0">
+                          <a:solidFill>
+                            <a:srgbClr val="F4EFE6"/>
+                          </a:solidFill>
+                        </a:rPr>
+                        <a:t>Bahan / batch</a:t>
+                      </a:r>
+                      <a:endParaRPr lang="en-US" sz="1320" dirty="0"/>
+                    </a:p>
+                  </a:txBody>
+                  <a:tcPr marL="101600" marR="101600" marT="25400" marB="25400">
+                    <a:lnL w="6350" cap="flat" cmpd="sng" algn="ctr">
+                      <a:solidFill>
+                        <a:srgbClr val="D9CFBF"/>
+                      </a:solidFill>
+                      <a:prstDash val="solid"/>
+                      <a:round/>
+                      <a:headEnd type="none" w="med" len="med"/>
+                      <a:tailEnd type="none" w="med" len="med"/>
+                    </a:lnL>
+                    <a:lnR w="6350" cap="flat" cmpd="sng" algn="ctr">
+                      <a:solidFill>
+                        <a:srgbClr val="D9CFBF"/>
+                      </a:solidFill>
+                      <a:prstDash val="solid"/>
+                      <a:round/>
+                      <a:headEnd type="none" w="med" len="med"/>
+                      <a:tailEnd type="none" w="med" len="med"/>
+                    </a:lnR>
+                    <a:lnT w="6350" cap="flat" cmpd="sng" algn="ctr">
+                      <a:solidFill>
+                        <a:srgbClr val="D9CFBF"/>
+                      </a:solidFill>
+                      <a:prstDash val="solid"/>
+                      <a:round/>
+                      <a:headEnd type="none" w="med" len="med"/>
+                      <a:tailEnd type="none" w="med" len="med"/>
+                    </a:lnT>
+                    <a:lnB w="6350" cap="flat" cmpd="sng" algn="ctr">
+                      <a:solidFill>
+                        <a:srgbClr val="D9CFBF"/>
+                      </a:solidFill>
+                      <a:prstDash val="solid"/>
+                      <a:round/>
+                      <a:headEnd type="none" w="med" len="med"/>
+                      <a:tailEnd type="none" w="med" len="med"/>
+                    </a:lnB>
+                    <a:solidFill>
+                      <a:srgbClr val="1A1814"/>
+                    </a:solidFill>
+                  </a:tcPr>
+                </a:tc>
+                <a:tc>
+                  <a:txBody>
+                    <a:bodyPr/>
+                    <a:lstStyle/>
+                    <a:p>
+                      <a:pPr marL="0" indent="0" algn="l">
+                        <a:buNone/>
+                      </a:pPr>
+                      <a:r>
+                        <a:rPr lang="en-US" sz="1320" b="1" dirty="0">
+                          <a:solidFill>
+                            <a:srgbClr val="F4EFE6"/>
+                          </a:solidFill>
+                        </a:rPr>
+                        <a:t>Masuk</a:t>
+                      </a:r>
+                      <a:endParaRPr lang="en-US" sz="1320" dirty="0"/>
+                    </a:p>
+                  </a:txBody>
+                  <a:tcPr marL="101600" marR="101600" marT="25400" marB="25400">
+                    <a:lnL w="6350" cap="flat" cmpd="sng" algn="ctr">
+                      <a:solidFill>
+                        <a:srgbClr val="D9CFBF"/>
+                      </a:solidFill>
+                      <a:prstDash val="solid"/>
+                      <a:round/>
+                      <a:headEnd type="none" w="med" len="med"/>
+                      <a:tailEnd type="none" w="med" len="med"/>
+                    </a:lnL>
+                    <a:lnR w="6350" cap="flat" cmpd="sng" algn="ctr">
+                      <a:solidFill>
+                        <a:srgbClr val="D9CFBF"/>
+                      </a:solidFill>
+                      <a:prstDash val="solid"/>
+                      <a:round/>
+                      <a:headEnd type="none" w="med" len="med"/>
+                      <a:tailEnd type="none" w="med" len="med"/>
+                    </a:lnR>
+                    <a:lnT w="6350" cap="flat" cmpd="sng" algn="ctr">
+                      <a:solidFill>
+                        <a:srgbClr val="D9CFBF"/>
+                      </a:solidFill>
+                      <a:prstDash val="solid"/>
+                      <a:round/>
+                      <a:headEnd type="none" w="med" len="med"/>
+                      <a:tailEnd type="none" w="med" len="med"/>
+                    </a:lnT>
+                    <a:lnB w="6350" cap="flat" cmpd="sng" algn="ctr">
+                      <a:solidFill>
+                        <a:srgbClr val="D9CFBF"/>
+                      </a:solidFill>
+                      <a:prstDash val="solid"/>
+                      <a:round/>
+                      <a:headEnd type="none" w="med" len="med"/>
+                      <a:tailEnd type="none" w="med" len="med"/>
+                    </a:lnB>
+                    <a:solidFill>
+                      <a:srgbClr val="1A1814"/>
+                    </a:solidFill>
+                  </a:tcPr>
+                </a:tc>
+                <a:tc>
+                  <a:txBody>
+                    <a:bodyPr/>
+                    <a:lstStyle/>
+                    <a:p>
+                      <a:pPr marL="0" indent="0" algn="l">
+                        <a:buNone/>
+                      </a:pPr>
+                      <a:r>
+                        <a:rPr lang="en-US" sz="1320" b="1" dirty="0">
+                          <a:solidFill>
+                            <a:srgbClr val="F4EFE6"/>
+                          </a:solidFill>
+                        </a:rPr>
+                        <a:t>Harga per unit</a:t>
+                      </a:r>
+                      <a:endParaRPr lang="en-US" sz="1320" dirty="0"/>
+                    </a:p>
+                  </a:txBody>
+                  <a:tcPr marL="101600" marR="101600" marT="25400" marB="25400">
+                    <a:lnL w="6350" cap="flat" cmpd="sng" algn="ctr">
+                      <a:solidFill>
+                        <a:srgbClr val="D9CFBF"/>
+                      </a:solidFill>
+                      <a:prstDash val="solid"/>
+                      <a:round/>
+                      <a:headEnd type="none" w="med" len="med"/>
+                      <a:tailEnd type="none" w="med" len="med"/>
+                    </a:lnL>
+                    <a:lnR w="6350" cap="flat" cmpd="sng" algn="ctr">
+                      <a:solidFill>
+                        <a:srgbClr val="D9CFBF"/>
+                      </a:solidFill>
+                      <a:prstDash val="solid"/>
+                      <a:round/>
+                      <a:headEnd type="none" w="med" len="med"/>
+                      <a:tailEnd type="none" w="med" len="med"/>
+                    </a:lnR>
+                    <a:lnT w="6350" cap="flat" cmpd="sng" algn="ctr">
+                      <a:solidFill>
+                        <a:srgbClr val="D9CFBF"/>
+                      </a:solidFill>
+                      <a:prstDash val="solid"/>
+                      <a:round/>
+                      <a:headEnd type="none" w="med" len="med"/>
+                      <a:tailEnd type="none" w="med" len="med"/>
+                    </a:lnT>
+                    <a:lnB w="6350" cap="flat" cmpd="sng" algn="ctr">
+                      <a:solidFill>
+                        <a:srgbClr val="D9CFBF"/>
+                      </a:solidFill>
+                      <a:prstDash val="solid"/>
+                      <a:round/>
+                      <a:headEnd type="none" w="med" len="med"/>
+                      <a:tailEnd type="none" w="med" len="med"/>
+                    </a:lnB>
+                    <a:solidFill>
+                      <a:srgbClr val="1A1814"/>
+                    </a:solidFill>
+                  </a:tcPr>
+                </a:tc>
+              </a:tr>
+              <a:tr h="548626">
+                <a:tc>
+                  <a:txBody>
+                    <a:bodyPr/>
+                    <a:lstStyle/>
+                    <a:p>
+                      <a:pPr marL="0" indent="0" algn="l">
+                        <a:buNone/>
+                      </a:pPr>
+                      <a:r>
+                        <a:rPr lang="en-US" sz="1320" dirty="0">
+                          <a:solidFill>
+                            <a:srgbClr val="1A1814"/>
+                          </a:solidFill>
+                        </a:rPr>
+                        <a:t>Biji kopi · batch 1</a:t>
+                      </a:r>
+                      <a:endParaRPr lang="en-US" sz="1320" dirty="0"/>
+                    </a:p>
+                  </a:txBody>
+                  <a:tcPr marL="101600" marR="101600" marT="25400" marB="25400">
+                    <a:lnL w="6350" cap="flat" cmpd="sng" algn="ctr">
+                      <a:solidFill>
+                        <a:srgbClr val="D9CFBF"/>
+                      </a:solidFill>
+                      <a:prstDash val="solid"/>
+                      <a:round/>
+                      <a:headEnd type="none" w="med" len="med"/>
+                      <a:tailEnd type="none" w="med" len="med"/>
+                    </a:lnL>
+                    <a:lnR w="6350" cap="flat" cmpd="sng" algn="ctr">
+                      <a:solidFill>
+                        <a:srgbClr val="D9CFBF"/>
+                      </a:solidFill>
+                      <a:prstDash val="solid"/>
+                      <a:round/>
+                      <a:headEnd type="none" w="med" len="med"/>
+                      <a:tailEnd type="none" w="med" len="med"/>
+                    </a:lnR>
+                    <a:lnT w="6350" cap="flat" cmpd="sng" algn="ctr">
+                      <a:solidFill>
+                        <a:srgbClr val="D9CFBF"/>
+                      </a:solidFill>
+                      <a:prstDash val="solid"/>
+                      <a:round/>
+                      <a:headEnd type="none" w="med" len="med"/>
+                      <a:tailEnd type="none" w="med" len="med"/>
+                    </a:lnT>
+                    <a:lnB w="6350" cap="flat" cmpd="sng" algn="ctr">
+                      <a:solidFill>
+                        <a:srgbClr val="D9CFBF"/>
+                      </a:solidFill>
+                      <a:prstDash val="solid"/>
+                      <a:round/>
+                      <a:headEnd type="none" w="med" len="med"/>
+                      <a:tailEnd type="none" w="med" len="med"/>
+                    </a:lnB>
+                    <a:solidFill>
+                      <a:srgbClr val="F4EFE6"/>
+                    </a:solidFill>
+                  </a:tcPr>
+                </a:tc>
+                <a:tc>
+                  <a:txBody>
+                    <a:bodyPr/>
+                    <a:lstStyle/>
+                    <a:p>
+                      <a:pPr marL="0" indent="0" algn="l">
+                        <a:buNone/>
+                      </a:pPr>
+                      <a:r>
+                        <a:rPr lang="en-US" sz="1320" dirty="0">
+                          <a:solidFill>
+                            <a:srgbClr val="1A1814"/>
+                          </a:solidFill>
+                        </a:rPr>
+                        <a:t>5 Okt · 2.000 g</a:t>
+                      </a:r>
+                      <a:endParaRPr lang="en-US" sz="1320" dirty="0"/>
+                    </a:p>
+                  </a:txBody>
+                  <a:tcPr marL="101600" marR="101600" marT="25400" marB="25400">
+                    <a:lnL w="6350" cap="flat" cmpd="sng" algn="ctr">
+                      <a:solidFill>
+                        <a:srgbClr val="D9CFBF"/>
+                      </a:solidFill>
+                      <a:prstDash val="solid"/>
+                      <a:round/>
+                      <a:headEnd type="none" w="med" len="med"/>
+                      <a:tailEnd type="none" w="med" len="med"/>
+                    </a:lnL>
+                    <a:lnR w="6350" cap="flat" cmpd="sng" algn="ctr">
+                      <a:solidFill>
+                        <a:srgbClr val="D9CFBF"/>
+                      </a:solidFill>
+                      <a:prstDash val="solid"/>
+                      <a:round/>
+                      <a:headEnd type="none" w="med" len="med"/>
+                      <a:tailEnd type="none" w="med" len="med"/>
+                    </a:lnR>
+                    <a:lnT w="6350" cap="flat" cmpd="sng" algn="ctr">
+                      <a:solidFill>
+                        <a:srgbClr val="D9CFBF"/>
+                      </a:solidFill>
+                      <a:prstDash val="solid"/>
+                      <a:round/>
+                      <a:headEnd type="none" w="med" len="med"/>
+                      <a:tailEnd type="none" w="med" len="med"/>
+                    </a:lnT>
+                    <a:lnB w="6350" cap="flat" cmpd="sng" algn="ctr">
+                      <a:solidFill>
+                        <a:srgbClr val="D9CFBF"/>
+                      </a:solidFill>
+                      <a:prstDash val="solid"/>
+                      <a:round/>
+                      <a:headEnd type="none" w="med" len="med"/>
+                      <a:tailEnd type="none" w="med" len="med"/>
+                    </a:lnB>
+                    <a:solidFill>
+                      <a:srgbClr val="F4EFE6"/>
+                    </a:solidFill>
+                  </a:tcPr>
+                </a:tc>
+                <a:tc>
+                  <a:txBody>
+                    <a:bodyPr/>
+                    <a:lstStyle/>
+                    <a:p>
+                      <a:pPr marL="0" indent="0" algn="l">
+                        <a:buNone/>
+                      </a:pPr>
+                      <a:r>
+                        <a:rPr lang="en-US" sz="1320" dirty="0">
+                          <a:solidFill>
+                            <a:srgbClr val="1A1814"/>
+                          </a:solidFill>
+                        </a:rPr>
+                        <a:t>Rp280/g</a:t>
+                      </a:r>
+                      <a:endParaRPr lang="en-US" sz="1320" dirty="0"/>
+                    </a:p>
+                  </a:txBody>
+                  <a:tcPr marL="101600" marR="101600" marT="25400" marB="25400">
+                    <a:lnL w="6350" cap="flat" cmpd="sng" algn="ctr">
+                      <a:solidFill>
+                        <a:srgbClr val="D9CFBF"/>
+                      </a:solidFill>
+                      <a:prstDash val="solid"/>
+                      <a:round/>
+                      <a:headEnd type="none" w="med" len="med"/>
+                      <a:tailEnd type="none" w="med" len="med"/>
+                    </a:lnL>
+                    <a:lnR w="6350" cap="flat" cmpd="sng" algn="ctr">
+                      <a:solidFill>
+                        <a:srgbClr val="D9CFBF"/>
+                      </a:solidFill>
+                      <a:prstDash val="solid"/>
+                      <a:round/>
+                      <a:headEnd type="none" w="med" len="med"/>
+                      <a:tailEnd type="none" w="med" len="med"/>
+                    </a:lnR>
+                    <a:lnT w="6350" cap="flat" cmpd="sng" algn="ctr">
+                      <a:solidFill>
+                        <a:srgbClr val="D9CFBF"/>
+                      </a:solidFill>
+                      <a:prstDash val="solid"/>
+                      <a:round/>
+                      <a:headEnd type="none" w="med" len="med"/>
+                      <a:tailEnd type="none" w="med" len="med"/>
+                    </a:lnT>
+                    <a:lnB w="6350" cap="flat" cmpd="sng" algn="ctr">
+                      <a:solidFill>
+                        <a:srgbClr val="D9CFBF"/>
+                      </a:solidFill>
+                      <a:prstDash val="solid"/>
+                      <a:round/>
+                      <a:headEnd type="none" w="med" len="med"/>
+                      <a:tailEnd type="none" w="med" len="med"/>
+                    </a:lnB>
+                    <a:solidFill>
+                      <a:srgbClr val="F4EFE6"/>
+                    </a:solidFill>
+                  </a:tcPr>
+                </a:tc>
+              </a:tr>
+              <a:tr h="548626">
+                <a:tc>
+                  <a:txBody>
+                    <a:bodyPr/>
+                    <a:lstStyle/>
+                    <a:p>
+                      <a:pPr marL="0" indent="0" algn="l">
+                        <a:buNone/>
+                      </a:pPr>
+                      <a:r>
+                        <a:rPr lang="en-US" sz="1320" dirty="0">
+                          <a:solidFill>
+                            <a:srgbClr val="1A1814"/>
+                          </a:solidFill>
+                        </a:rPr>
+                        <a:t>Biji kopi · batch 2</a:t>
+                      </a:r>
+                      <a:endParaRPr lang="en-US" sz="1320" dirty="0"/>
+                    </a:p>
+                  </a:txBody>
+                  <a:tcPr marL="101600" marR="101600" marT="25400" marB="25400">
+                    <a:lnL w="6350" cap="flat" cmpd="sng" algn="ctr">
+                      <a:solidFill>
+                        <a:srgbClr val="D9CFBF"/>
+                      </a:solidFill>
+                      <a:prstDash val="solid"/>
+                      <a:round/>
+                      <a:headEnd type="none" w="med" len="med"/>
+                      <a:tailEnd type="none" w="med" len="med"/>
+                    </a:lnL>
+                    <a:lnR w="6350" cap="flat" cmpd="sng" algn="ctr">
+                      <a:solidFill>
+                        <a:srgbClr val="D9CFBF"/>
+                      </a:solidFill>
+                      <a:prstDash val="solid"/>
+                      <a:round/>
+                      <a:headEnd type="none" w="med" len="med"/>
+                      <a:tailEnd type="none" w="med" len="med"/>
+                    </a:lnR>
+                    <a:lnT w="6350" cap="flat" cmpd="sng" algn="ctr">
+                      <a:solidFill>
+                        <a:srgbClr val="D9CFBF"/>
+                      </a:solidFill>
+                      <a:prstDash val="solid"/>
+                      <a:round/>
+                      <a:headEnd type="none" w="med" len="med"/>
+                      <a:tailEnd type="none" w="med" len="med"/>
+                    </a:lnT>
+                    <a:lnB w="6350" cap="flat" cmpd="sng" algn="ctr">
+                      <a:solidFill>
+                        <a:srgbClr val="D9CFBF"/>
+                      </a:solidFill>
+                      <a:prstDash val="solid"/>
+                      <a:round/>
+                      <a:headEnd type="none" w="med" len="med"/>
+                      <a:tailEnd type="none" w="med" len="med"/>
+                    </a:lnB>
+                    <a:solidFill>
+                      <a:srgbClr val="FBF8F3"/>
+                    </a:solidFill>
+                  </a:tcPr>
+                </a:tc>
+                <a:tc>
+                  <a:txBody>
+                    <a:bodyPr/>
+                    <a:lstStyle/>
+                    <a:p>
+                      <a:pPr marL="0" indent="0" algn="l">
+                        <a:buNone/>
+                      </a:pPr>
+                      <a:r>
+                        <a:rPr lang="en-US" sz="1320" dirty="0">
+                          <a:solidFill>
+                            <a:srgbClr val="1A1814"/>
+                          </a:solidFill>
+                        </a:rPr>
+                        <a:t>19 Okt · 3.000 g</a:t>
+                      </a:r>
+                      <a:endParaRPr lang="en-US" sz="1320" dirty="0"/>
+                    </a:p>
+                  </a:txBody>
+                  <a:tcPr marL="101600" marR="101600" marT="25400" marB="25400">
+                    <a:lnL w="6350" cap="flat" cmpd="sng" algn="ctr">
+                      <a:solidFill>
+                        <a:srgbClr val="D9CFBF"/>
+                      </a:solidFill>
+                      <a:prstDash val="solid"/>
+                      <a:round/>
+                      <a:headEnd type="none" w="med" len="med"/>
+                      <a:tailEnd type="none" w="med" len="med"/>
+                    </a:lnL>
+                    <a:lnR w="6350" cap="flat" cmpd="sng" algn="ctr">
+                      <a:solidFill>
+                        <a:srgbClr val="D9CFBF"/>
+                      </a:solidFill>
+                      <a:prstDash val="solid"/>
+                      <a:round/>
+                      <a:headEnd type="none" w="med" len="med"/>
+                      <a:tailEnd type="none" w="med" len="med"/>
+                    </a:lnR>
+                    <a:lnT w="6350" cap="flat" cmpd="sng" algn="ctr">
+                      <a:solidFill>
+                        <a:srgbClr val="D9CFBF"/>
+                      </a:solidFill>
+                      <a:prstDash val="solid"/>
+                      <a:round/>
+                      <a:headEnd type="none" w="med" len="med"/>
+                      <a:tailEnd type="none" w="med" len="med"/>
+                    </a:lnT>
+                    <a:lnB w="6350" cap="flat" cmpd="sng" algn="ctr">
+                      <a:solidFill>
+                        <a:srgbClr val="D9CFBF"/>
+                      </a:solidFill>
+                      <a:prstDash val="solid"/>
+                      <a:round/>
+                      <a:headEnd type="none" w="med" len="med"/>
+                      <a:tailEnd type="none" w="med" len="med"/>
+                    </a:lnB>
+                    <a:solidFill>
+                      <a:srgbClr val="FBF8F3"/>
+                    </a:solidFill>
+                  </a:tcPr>
+                </a:tc>
+                <a:tc>
+                  <a:txBody>
+                    <a:bodyPr/>
+                    <a:lstStyle/>
+                    <a:p>
+                      <a:pPr marL="0" indent="0" algn="l">
+                        <a:buNone/>
+                      </a:pPr>
+                      <a:r>
+                        <a:rPr lang="en-US" sz="1320" dirty="0">
+                          <a:solidFill>
+                            <a:srgbClr val="1A1814"/>
+                          </a:solidFill>
+                        </a:rPr>
+                        <a:t>Rp300/g</a:t>
+                      </a:r>
+                      <a:endParaRPr lang="en-US" sz="1320" dirty="0"/>
+                    </a:p>
+                  </a:txBody>
+                  <a:tcPr marL="101600" marR="101600" marT="25400" marB="25400">
+                    <a:lnL w="6350" cap="flat" cmpd="sng" algn="ctr">
+                      <a:solidFill>
+                        <a:srgbClr val="D9CFBF"/>
+                      </a:solidFill>
+                      <a:prstDash val="solid"/>
+                      <a:round/>
+                      <a:headEnd type="none" w="med" len="med"/>
+                      <a:tailEnd type="none" w="med" len="med"/>
+                    </a:lnL>
+                    <a:lnR w="6350" cap="flat" cmpd="sng" algn="ctr">
+                      <a:solidFill>
+                        <a:srgbClr val="D9CFBF"/>
+                      </a:solidFill>
+                      <a:prstDash val="solid"/>
+                      <a:round/>
+                      <a:headEnd type="none" w="med" len="med"/>
+                      <a:tailEnd type="none" w="med" len="med"/>
+                    </a:lnR>
+                    <a:lnT w="6350" cap="flat" cmpd="sng" algn="ctr">
+                      <a:solidFill>
+                        <a:srgbClr val="D9CFBF"/>
+                      </a:solidFill>
+                      <a:prstDash val="solid"/>
+                      <a:round/>
+                      <a:headEnd type="none" w="med" len="med"/>
+                      <a:tailEnd type="none" w="med" len="med"/>
+                    </a:lnT>
+                    <a:lnB w="6350" cap="flat" cmpd="sng" algn="ctr">
+                      <a:solidFill>
+                        <a:srgbClr val="D9CFBF"/>
+                      </a:solidFill>
+                      <a:prstDash val="solid"/>
+                      <a:round/>
+                      <a:headEnd type="none" w="med" len="med"/>
+                      <a:tailEnd type="none" w="med" len="med"/>
+                    </a:lnB>
+                    <a:solidFill>
+                      <a:srgbClr val="FBF8F3"/>
+                    </a:solidFill>
+                  </a:tcPr>
+                </a:tc>
+              </a:tr>
+              <a:tr h="548626">
+                <a:tc>
+                  <a:txBody>
+                    <a:bodyPr/>
+                    <a:lstStyle/>
+                    <a:p>
+                      <a:pPr marL="0" indent="0" algn="l">
+                        <a:buNone/>
+                      </a:pPr>
+                      <a:r>
+                        <a:rPr lang="en-US" sz="1320" dirty="0">
+                          <a:solidFill>
+                            <a:srgbClr val="1A1814"/>
+                          </a:solidFill>
+                        </a:rPr>
+                        <a:t>Susu · batch 1</a:t>
+                      </a:r>
+                      <a:endParaRPr lang="en-US" sz="1320" dirty="0"/>
+                    </a:p>
+                  </a:txBody>
+                  <a:tcPr marL="101600" marR="101600" marT="25400" marB="25400">
+                    <a:lnL w="6350" cap="flat" cmpd="sng" algn="ctr">
+                      <a:solidFill>
+                        <a:srgbClr val="D9CFBF"/>
+                      </a:solidFill>
+                      <a:prstDash val="solid"/>
+                      <a:round/>
+                      <a:headEnd type="none" w="med" len="med"/>
+                      <a:tailEnd type="none" w="med" len="med"/>
+                    </a:lnL>
+                    <a:lnR w="6350" cap="flat" cmpd="sng" algn="ctr">
+                      <a:solidFill>
+                        <a:srgbClr val="D9CFBF"/>
+                      </a:solidFill>
+                      <a:prstDash val="solid"/>
+                      <a:round/>
+                      <a:headEnd type="none" w="med" len="med"/>
+                      <a:tailEnd type="none" w="med" len="med"/>
+                    </a:lnR>
+                    <a:lnT w="6350" cap="flat" cmpd="sng" algn="ctr">
+                      <a:solidFill>
+                        <a:srgbClr val="D9CFBF"/>
+                      </a:solidFill>
+                      <a:prstDash val="solid"/>
+                      <a:round/>
+                      <a:headEnd type="none" w="med" len="med"/>
+                      <a:tailEnd type="none" w="med" len="med"/>
+                    </a:lnT>
+                    <a:lnB w="6350" cap="flat" cmpd="sng" algn="ctr">
+                      <a:solidFill>
+                        <a:srgbClr val="D9CFBF"/>
+                      </a:solidFill>
+                      <a:prstDash val="solid"/>
+                      <a:round/>
+                      <a:headEnd type="none" w="med" len="med"/>
+                      <a:tailEnd type="none" w="med" len="med"/>
+                    </a:lnB>
+                    <a:solidFill>
+                      <a:srgbClr val="F4EFE6"/>
+                    </a:solidFill>
+                  </a:tcPr>
+                </a:tc>
+                <a:tc>
+                  <a:txBody>
+                    <a:bodyPr/>
+                    <a:lstStyle/>
+                    <a:p>
+                      <a:pPr marL="0" indent="0" algn="l">
+                        <a:buNone/>
+                      </a:pPr>
+                      <a:r>
+                        <a:rPr lang="en-US" sz="1320" dirty="0">
+                          <a:solidFill>
+                            <a:srgbClr val="1A1814"/>
+                          </a:solidFill>
+                        </a:rPr>
+                        <a:t>12 Okt · 20.000 ml</a:t>
+                      </a:r>
+                      <a:endParaRPr lang="en-US" sz="1320" dirty="0"/>
+                    </a:p>
+                  </a:txBody>
+                  <a:tcPr marL="101600" marR="101600" marT="25400" marB="25400">
+                    <a:lnL w="6350" cap="flat" cmpd="sng" algn="ctr">
+                      <a:solidFill>
+                        <a:srgbClr val="D9CFBF"/>
+                      </a:solidFill>
+                      <a:prstDash val="solid"/>
+                      <a:round/>
+                      <a:headEnd type="none" w="med" len="med"/>
+                      <a:tailEnd type="none" w="med" len="med"/>
+                    </a:lnL>
+                    <a:lnR w="6350" cap="flat" cmpd="sng" algn="ctr">
+                      <a:solidFill>
+                        <a:srgbClr val="D9CFBF"/>
+                      </a:solidFill>
+                      <a:prstDash val="solid"/>
+                      <a:round/>
+                      <a:headEnd type="none" w="med" len="med"/>
+                      <a:tailEnd type="none" w="med" len="med"/>
+                    </a:lnR>
+                    <a:lnT w="6350" cap="flat" cmpd="sng" algn="ctr">
+                      <a:solidFill>
+                        <a:srgbClr val="D9CFBF"/>
+                      </a:solidFill>
+                      <a:prstDash val="solid"/>
+                      <a:round/>
+                      <a:headEnd type="none" w="med" len="med"/>
+                      <a:tailEnd type="none" w="med" len="med"/>
+                    </a:lnT>
+                    <a:lnB w="6350" cap="flat" cmpd="sng" algn="ctr">
+                      <a:solidFill>
+                        <a:srgbClr val="D9CFBF"/>
+                      </a:solidFill>
+                      <a:prstDash val="solid"/>
+                      <a:round/>
+                      <a:headEnd type="none" w="med" len="med"/>
+                      <a:tailEnd type="none" w="med" len="med"/>
+                    </a:lnB>
+                    <a:solidFill>
+                      <a:srgbClr val="F4EFE6"/>
+                    </a:solidFill>
+                  </a:tcPr>
+                </a:tc>
+                <a:tc>
+                  <a:txBody>
+                    <a:bodyPr/>
+                    <a:lstStyle/>
+                    <a:p>
+                      <a:pPr marL="0" indent="0" algn="l">
+                        <a:buNone/>
+                      </a:pPr>
+                      <a:r>
+                        <a:rPr lang="en-US" sz="1320" dirty="0">
+                          <a:solidFill>
+                            <a:srgbClr val="1A1814"/>
+                          </a:solidFill>
+                        </a:rPr>
+                        <a:t>Rp18/ml</a:t>
+                      </a:r>
+                      <a:endParaRPr lang="en-US" sz="1320" dirty="0"/>
+                    </a:p>
+                  </a:txBody>
+                  <a:tcPr marL="101600" marR="101600" marT="25400" marB="25400">
+                    <a:lnL w="6350" cap="flat" cmpd="sng" algn="ctr">
+                      <a:solidFill>
+                        <a:srgbClr val="D9CFBF"/>
+                      </a:solidFill>
+                      <a:prstDash val="solid"/>
+                      <a:round/>
+                      <a:headEnd type="none" w="med" len="med"/>
+                      <a:tailEnd type="none" w="med" len="med"/>
+                    </a:lnL>
+                    <a:lnR w="6350" cap="flat" cmpd="sng" algn="ctr">
+                      <a:solidFill>
+                        <a:srgbClr val="D9CFBF"/>
+                      </a:solidFill>
+                      <a:prstDash val="solid"/>
+                      <a:round/>
+                      <a:headEnd type="none" w="med" len="med"/>
+                      <a:tailEnd type="none" w="med" len="med"/>
+                    </a:lnR>
+                    <a:lnT w="6350" cap="flat" cmpd="sng" algn="ctr">
+                      <a:solidFill>
+                        <a:srgbClr val="D9CFBF"/>
+                      </a:solidFill>
+                      <a:prstDash val="solid"/>
+                      <a:round/>
+                      <a:headEnd type="none" w="med" len="med"/>
+                      <a:tailEnd type="none" w="med" len="med"/>
+                    </a:lnT>
+                    <a:lnB w="6350" cap="flat" cmpd="sng" algn="ctr">
+                      <a:solidFill>
+                        <a:srgbClr val="D9CFBF"/>
+                      </a:solidFill>
+                      <a:prstDash val="solid"/>
+                      <a:round/>
+                      <a:headEnd type="none" w="med" len="med"/>
+                      <a:tailEnd type="none" w="med" len="med"/>
+                    </a:lnB>
+                    <a:solidFill>
+                      <a:srgbClr val="F4EFE6"/>
+                    </a:solidFill>
+                  </a:tcPr>
+                </a:tc>
+              </a:tr>
+              <a:tr h="548626">
+                <a:tc>
+                  <a:txBody>
+                    <a:bodyPr/>
+                    <a:lstStyle/>
+                    <a:p>
+                      <a:pPr marL="0" indent="0" algn="l">
+                        <a:buNone/>
+                      </a:pPr>
+                      <a:r>
+                        <a:rPr lang="en-US" sz="1320" dirty="0">
+                          <a:solidFill>
+                            <a:srgbClr val="1A1814"/>
+                          </a:solidFill>
+                        </a:rPr>
+                        <a:t>Susu · batch 2</a:t>
+                      </a:r>
+                      <a:endParaRPr lang="en-US" sz="1320" dirty="0"/>
+                    </a:p>
+                  </a:txBody>
+                  <a:tcPr marL="101600" marR="101600" marT="25400" marB="25400">
+                    <a:lnL w="6350" cap="flat" cmpd="sng" algn="ctr">
+                      <a:solidFill>
+                        <a:srgbClr val="D9CFBF"/>
+                      </a:solidFill>
+                      <a:prstDash val="solid"/>
+                      <a:round/>
+                      <a:headEnd type="none" w="med" len="med"/>
+                      <a:tailEnd type="none" w="med" len="med"/>
+                    </a:lnL>
+                    <a:lnR w="6350" cap="flat" cmpd="sng" algn="ctr">
+                      <a:solidFill>
+                        <a:srgbClr val="D9CFBF"/>
+                      </a:solidFill>
+                      <a:prstDash val="solid"/>
+                      <a:round/>
+                      <a:headEnd type="none" w="med" len="med"/>
+                      <a:tailEnd type="none" w="med" len="med"/>
+                    </a:lnR>
+                    <a:lnT w="6350" cap="flat" cmpd="sng" algn="ctr">
+                      <a:solidFill>
+                        <a:srgbClr val="D9CFBF"/>
+                      </a:solidFill>
+                      <a:prstDash val="solid"/>
+                      <a:round/>
+                      <a:headEnd type="none" w="med" len="med"/>
+                      <a:tailEnd type="none" w="med" len="med"/>
+                    </a:lnT>
+                    <a:lnB w="6350" cap="flat" cmpd="sng" algn="ctr">
+                      <a:solidFill>
+                        <a:srgbClr val="D9CFBF"/>
+                      </a:solidFill>
+                      <a:prstDash val="solid"/>
+                      <a:round/>
+                      <a:headEnd type="none" w="med" len="med"/>
+                      <a:tailEnd type="none" w="med" len="med"/>
+                    </a:lnB>
+                    <a:solidFill>
+                      <a:srgbClr val="FBF8F3"/>
+                    </a:solidFill>
+                  </a:tcPr>
+                </a:tc>
+                <a:tc>
+                  <a:txBody>
+                    <a:bodyPr/>
+                    <a:lstStyle/>
+                    <a:p>
+                      <a:pPr marL="0" indent="0" algn="l">
+                        <a:buNone/>
+                      </a:pPr>
+                      <a:r>
+                        <a:rPr lang="en-US" sz="1320" dirty="0">
+                          <a:solidFill>
+                            <a:srgbClr val="1A1814"/>
+                          </a:solidFill>
+                        </a:rPr>
+                        <a:t>20 Okt · 20.000 ml</a:t>
+                      </a:r>
+                      <a:endParaRPr lang="en-US" sz="1320" dirty="0"/>
+                    </a:p>
+                  </a:txBody>
+                  <a:tcPr marL="101600" marR="101600" marT="25400" marB="25400">
+                    <a:lnL w="6350" cap="flat" cmpd="sng" algn="ctr">
+                      <a:solidFill>
+                        <a:srgbClr val="D9CFBF"/>
+                      </a:solidFill>
+                      <a:prstDash val="solid"/>
+                      <a:round/>
+                      <a:headEnd type="none" w="med" len="med"/>
+                      <a:tailEnd type="none" w="med" len="med"/>
+                    </a:lnL>
+                    <a:lnR w="6350" cap="flat" cmpd="sng" algn="ctr">
+                      <a:solidFill>
+                        <a:srgbClr val="D9CFBF"/>
+                      </a:solidFill>
+                      <a:prstDash val="solid"/>
+                      <a:round/>
+                      <a:headEnd type="none" w="med" len="med"/>
+                      <a:tailEnd type="none" w="med" len="med"/>
+                    </a:lnR>
+                    <a:lnT w="6350" cap="flat" cmpd="sng" algn="ctr">
+                      <a:solidFill>
+                        <a:srgbClr val="D9CFBF"/>
+                      </a:solidFill>
+                      <a:prstDash val="solid"/>
+                      <a:round/>
+                      <a:headEnd type="none" w="med" len="med"/>
+                      <a:tailEnd type="none" w="med" len="med"/>
+                    </a:lnT>
+                    <a:lnB w="6350" cap="flat" cmpd="sng" algn="ctr">
+                      <a:solidFill>
+                        <a:srgbClr val="D9CFBF"/>
+                      </a:solidFill>
+                      <a:prstDash val="solid"/>
+                      <a:round/>
+                      <a:headEnd type="none" w="med" len="med"/>
+                      <a:tailEnd type="none" w="med" len="med"/>
+                    </a:lnB>
+                    <a:solidFill>
+                      <a:srgbClr val="FBF8F3"/>
+                    </a:solidFill>
+                  </a:tcPr>
+                </a:tc>
+                <a:tc>
+                  <a:txBody>
+                    <a:bodyPr/>
+                    <a:lstStyle/>
+                    <a:p>
+                      <a:pPr marL="0" indent="0" algn="l">
+                        <a:buNone/>
+                      </a:pPr>
+                      <a:r>
+                        <a:rPr lang="en-US" sz="1320" dirty="0">
+                          <a:solidFill>
+                            <a:srgbClr val="1A1814"/>
+                          </a:solidFill>
+                        </a:rPr>
+                        <a:t>Rp19/ml</a:t>
+                      </a:r>
+                      <a:endParaRPr lang="en-US" sz="1320" dirty="0"/>
+                    </a:p>
+                  </a:txBody>
+                  <a:tcPr marL="101600" marR="101600" marT="25400" marB="25400">
+                    <a:lnL w="6350" cap="flat" cmpd="sng" algn="ctr">
+                      <a:solidFill>
+                        <a:srgbClr val="D9CFBF"/>
+                      </a:solidFill>
+                      <a:prstDash val="solid"/>
+                      <a:round/>
+                      <a:headEnd type="none" w="med" len="med"/>
+                      <a:tailEnd type="none" w="med" len="med"/>
+                    </a:lnL>
+                    <a:lnR w="6350" cap="flat" cmpd="sng" algn="ctr">
+                      <a:solidFill>
+                        <a:srgbClr val="D9CFBF"/>
+                      </a:solidFill>
+                      <a:prstDash val="solid"/>
+                      <a:round/>
+                      <a:headEnd type="none" w="med" len="med"/>
+                      <a:tailEnd type="none" w="med" len="med"/>
+                    </a:lnR>
+                    <a:lnT w="6350" cap="flat" cmpd="sng" algn="ctr">
+                      <a:solidFill>
+                        <a:srgbClr val="D9CFBF"/>
+                      </a:solidFill>
+                      <a:prstDash val="solid"/>
+                      <a:round/>
+                      <a:headEnd type="none" w="med" len="med"/>
+                      <a:tailEnd type="none" w="med" len="med"/>
+                    </a:lnT>
+                    <a:lnB w="6350" cap="flat" cmpd="sng" algn="ctr">
+                      <a:solidFill>
+                        <a:srgbClr val="D9CFBF"/>
+                      </a:solidFill>
+                      <a:prstDash val="solid"/>
+                      <a:round/>
+                      <a:headEnd type="none" w="med" len="med"/>
+                      <a:tailEnd type="none" w="med" len="med"/>
+                    </a:lnB>
+                    <a:solidFill>
+                      <a:srgbClr val="FBF8F3"/>
+                    </a:solidFill>
+                  </a:tcPr>
+                </a:tc>
+              </a:tr>
+              <a:tr h="548626">
+                <a:tc>
+                  <a:txBody>
+                    <a:bodyPr/>
+                    <a:lstStyle/>
+                    <a:p>
+                      <a:pPr marL="0" indent="0" algn="l">
+                        <a:buNone/>
+                      </a:pPr>
+                      <a:r>
+                        <a:rPr lang="en-US" sz="1320" dirty="0">
+                          <a:solidFill>
+                            <a:srgbClr val="1A1814"/>
+                          </a:solidFill>
+                        </a:rPr>
+                        <a:t>Ayam · batch 1</a:t>
+                      </a:r>
+                      <a:endParaRPr lang="en-US" sz="1320" dirty="0"/>
+                    </a:p>
+                  </a:txBody>
+                  <a:tcPr marL="101600" marR="101600" marT="25400" marB="25400">
+                    <a:lnL w="6350" cap="flat" cmpd="sng" algn="ctr">
+                      <a:solidFill>
+                        <a:srgbClr val="D9CFBF"/>
+                      </a:solidFill>
+                      <a:prstDash val="solid"/>
+                      <a:round/>
+                      <a:headEnd type="none" w="med" len="med"/>
+                      <a:tailEnd type="none" w="med" len="med"/>
+                    </a:lnL>
+                    <a:lnR w="6350" cap="flat" cmpd="sng" algn="ctr">
+                      <a:solidFill>
+                        <a:srgbClr val="D9CFBF"/>
+                      </a:solidFill>
+                      <a:prstDash val="solid"/>
+                      <a:round/>
+                      <a:headEnd type="none" w="med" len="med"/>
+                      <a:tailEnd type="none" w="med" len="med"/>
+                    </a:lnR>
+                    <a:lnT w="6350" cap="flat" cmpd="sng" algn="ctr">
+                      <a:solidFill>
+                        <a:srgbClr val="D9CFBF"/>
+                      </a:solidFill>
+                      <a:prstDash val="solid"/>
+                      <a:round/>
+                      <a:headEnd type="none" w="med" len="med"/>
+                      <a:tailEnd type="none" w="med" len="med"/>
+                    </a:lnT>
+                    <a:lnB w="6350" cap="flat" cmpd="sng" algn="ctr">
+                      <a:solidFill>
+                        <a:srgbClr val="D9CFBF"/>
+                      </a:solidFill>
+                      <a:prstDash val="solid"/>
+                      <a:round/>
+                      <a:headEnd type="none" w="med" len="med"/>
+                      <a:tailEnd type="none" w="med" len="med"/>
+                    </a:lnB>
+                    <a:solidFill>
+                      <a:srgbClr val="F4EFE6"/>
+                    </a:solidFill>
+                  </a:tcPr>
+                </a:tc>
+                <a:tc>
+                  <a:txBody>
+                    <a:bodyPr/>
+                    <a:lstStyle/>
+                    <a:p>
+                      <a:pPr marL="0" indent="0" algn="l">
+                        <a:buNone/>
+                      </a:pPr>
+                      <a:r>
+                        <a:rPr lang="en-US" sz="1320" dirty="0">
+                          <a:solidFill>
+                            <a:srgbClr val="1A1814"/>
+                          </a:solidFill>
+                        </a:rPr>
+                        <a:t>18 Okt · 6.000 g</a:t>
+                      </a:r>
+                      <a:endParaRPr lang="en-US" sz="1320" dirty="0"/>
+                    </a:p>
+                  </a:txBody>
+                  <a:tcPr marL="101600" marR="101600" marT="25400" marB="25400">
+                    <a:lnL w="6350" cap="flat" cmpd="sng" algn="ctr">
+                      <a:solidFill>
+                        <a:srgbClr val="D9CFBF"/>
+                      </a:solidFill>
+                      <a:prstDash val="solid"/>
+                      <a:round/>
+                      <a:headEnd type="none" w="med" len="med"/>
+                      <a:tailEnd type="none" w="med" len="med"/>
+                    </a:lnL>
+                    <a:lnR w="6350" cap="flat" cmpd="sng" algn="ctr">
+                      <a:solidFill>
+                        <a:srgbClr val="D9CFBF"/>
+                      </a:solidFill>
+                      <a:prstDash val="solid"/>
+                      <a:round/>
+                      <a:headEnd type="none" w="med" len="med"/>
+                      <a:tailEnd type="none" w="med" len="med"/>
+                    </a:lnR>
+                    <a:lnT w="6350" cap="flat" cmpd="sng" algn="ctr">
+                      <a:solidFill>
+                        <a:srgbClr val="D9CFBF"/>
+                      </a:solidFill>
+                      <a:prstDash val="solid"/>
+                      <a:round/>
+                      <a:headEnd type="none" w="med" len="med"/>
+                      <a:tailEnd type="none" w="med" len="med"/>
+                    </a:lnT>
+                    <a:lnB w="6350" cap="flat" cmpd="sng" algn="ctr">
+                      <a:solidFill>
+                        <a:srgbClr val="D9CFBF"/>
+                      </a:solidFill>
+                      <a:prstDash val="solid"/>
+                      <a:round/>
+                      <a:headEnd type="none" w="med" len="med"/>
+                      <a:tailEnd type="none" w="med" len="med"/>
+                    </a:lnB>
+                    <a:solidFill>
+                      <a:srgbClr val="F4EFE6"/>
+                    </a:solidFill>
+                  </a:tcPr>
+                </a:tc>
+                <a:tc>
+                  <a:txBody>
+                    <a:bodyPr/>
+                    <a:lstStyle/>
+                    <a:p>
+                      <a:pPr marL="0" indent="0" algn="l">
+                        <a:buNone/>
+                      </a:pPr>
+                      <a:r>
+                        <a:rPr lang="en-US" sz="1320" dirty="0">
+                          <a:solidFill>
+                            <a:srgbClr val="1A1814"/>
+                          </a:solidFill>
+                        </a:rPr>
+                        <a:t>Rp45/g</a:t>
+                      </a:r>
+                      <a:endParaRPr lang="en-US" sz="1320" dirty="0"/>
+                    </a:p>
+                  </a:txBody>
+                  <a:tcPr marL="101600" marR="101600" marT="25400" marB="25400">
+                    <a:lnL w="6350" cap="flat" cmpd="sng" algn="ctr">
+                      <a:solidFill>
+                        <a:srgbClr val="D9CFBF"/>
+                      </a:solidFill>
+                      <a:prstDash val="solid"/>
+                      <a:round/>
+                      <a:headEnd type="none" w="med" len="med"/>
+                      <a:tailEnd type="none" w="med" len="med"/>
+                    </a:lnL>
+                    <a:lnR w="6350" cap="flat" cmpd="sng" algn="ctr">
+                      <a:solidFill>
+                        <a:srgbClr val="D9CFBF"/>
+                      </a:solidFill>
+                      <a:prstDash val="solid"/>
+                      <a:round/>
+                      <a:headEnd type="none" w="med" len="med"/>
+                      <a:tailEnd type="none" w="med" len="med"/>
+                    </a:lnR>
+                    <a:lnT w="6350" cap="flat" cmpd="sng" algn="ctr">
+                      <a:solidFill>
+                        <a:srgbClr val="D9CFBF"/>
+                      </a:solidFill>
+                      <a:prstDash val="solid"/>
+                      <a:round/>
+                      <a:headEnd type="none" w="med" len="med"/>
+                      <a:tailEnd type="none" w="med" len="med"/>
+                    </a:lnT>
+                    <a:lnB w="6350" cap="flat" cmpd="sng" algn="ctr">
+                      <a:solidFill>
+                        <a:srgbClr val="D9CFBF"/>
+                      </a:solidFill>
+                      <a:prstDash val="solid"/>
+                      <a:round/>
+                      <a:headEnd type="none" w="med" len="med"/>
+                      <a:tailEnd type="none" w="med" len="med"/>
+                    </a:lnB>
+                    <a:solidFill>
+                      <a:srgbClr val="F4EFE6"/>
+                    </a:solidFill>
+                  </a:tcPr>
+                </a:tc>
+              </a:tr>
+              <a:tr h="548626">
+                <a:tc>
+                  <a:txBody>
+                    <a:bodyPr/>
+                    <a:lstStyle/>
+                    <a:p>
+                      <a:pPr marL="0" indent="0" algn="l">
+                        <a:buNone/>
+                      </a:pPr>
+                      <a:r>
+                        <a:rPr lang="en-US" sz="1320" dirty="0">
+                          <a:solidFill>
+                            <a:srgbClr val="1A1814"/>
+                          </a:solidFill>
+                        </a:rPr>
+                        <a:t>Ayam · batch 2</a:t>
+                      </a:r>
+                      <a:endParaRPr lang="en-US" sz="1320" dirty="0"/>
+                    </a:p>
+                  </a:txBody>
+                  <a:tcPr marL="101600" marR="101600" marT="25400" marB="25400">
+                    <a:lnL w="6350" cap="flat" cmpd="sng" algn="ctr">
+                      <a:solidFill>
+                        <a:srgbClr val="D9CFBF"/>
+                      </a:solidFill>
+                      <a:prstDash val="solid"/>
+                      <a:round/>
+                      <a:headEnd type="none" w="med" len="med"/>
+                      <a:tailEnd type="none" w="med" len="med"/>
+                    </a:lnL>
+                    <a:lnR w="6350" cap="flat" cmpd="sng" algn="ctr">
+                      <a:solidFill>
+                        <a:srgbClr val="D9CFBF"/>
+                      </a:solidFill>
+                      <a:prstDash val="solid"/>
+                      <a:round/>
+                      <a:headEnd type="none" w="med" len="med"/>
+                      <a:tailEnd type="none" w="med" len="med"/>
+                    </a:lnR>
+                    <a:lnT w="6350" cap="flat" cmpd="sng" algn="ctr">
+                      <a:solidFill>
+                        <a:srgbClr val="D9CFBF"/>
+                      </a:solidFill>
+                      <a:prstDash val="solid"/>
+                      <a:round/>
+                      <a:headEnd type="none" w="med" len="med"/>
+                      <a:tailEnd type="none" w="med" len="med"/>
+                    </a:lnT>
+                    <a:lnB w="6350" cap="flat" cmpd="sng" algn="ctr">
+                      <a:solidFill>
+                        <a:srgbClr val="D9CFBF"/>
+                      </a:solidFill>
+                      <a:prstDash val="solid"/>
+                      <a:round/>
+                      <a:headEnd type="none" w="med" len="med"/>
+                      <a:tailEnd type="none" w="med" len="med"/>
+                    </a:lnB>
+                    <a:solidFill>
+                      <a:srgbClr val="FBF8F3"/>
+                    </a:solidFill>
+                  </a:tcPr>
+                </a:tc>
+                <a:tc>
+                  <a:txBody>
+                    <a:bodyPr/>
+                    <a:lstStyle/>
+                    <a:p>
+                      <a:pPr marL="0" indent="0" algn="l">
+                        <a:buNone/>
+                      </a:pPr>
+                      <a:r>
+                        <a:rPr lang="en-US" sz="1320" dirty="0">
+                          <a:solidFill>
+                            <a:srgbClr val="1A1814"/>
+                          </a:solidFill>
+                        </a:rPr>
+                        <a:t>22 Okt · 8.000 g</a:t>
+                      </a:r>
+                      <a:endParaRPr lang="en-US" sz="1320" dirty="0"/>
+                    </a:p>
+                  </a:txBody>
+                  <a:tcPr marL="101600" marR="101600" marT="25400" marB="25400">
+                    <a:lnL w="6350" cap="flat" cmpd="sng" algn="ctr">
+                      <a:solidFill>
+                        <a:srgbClr val="D9CFBF"/>
+                      </a:solidFill>
+                      <a:prstDash val="solid"/>
+                      <a:round/>
+                      <a:headEnd type="none" w="med" len="med"/>
+                      <a:tailEnd type="none" w="med" len="med"/>
+                    </a:lnL>
+                    <a:lnR w="6350" cap="flat" cmpd="sng" algn="ctr">
+                      <a:solidFill>
+                        <a:srgbClr val="D9CFBF"/>
+                      </a:solidFill>
+                      <a:prstDash val="solid"/>
+                      <a:round/>
+                      <a:headEnd type="none" w="med" len="med"/>
+                      <a:tailEnd type="none" w="med" len="med"/>
+                    </a:lnR>
+                    <a:lnT w="6350" cap="flat" cmpd="sng" algn="ctr">
+                      <a:solidFill>
+                        <a:srgbClr val="D9CFBF"/>
+                      </a:solidFill>
+                      <a:prstDash val="solid"/>
+                      <a:round/>
+                      <a:headEnd type="none" w="med" len="med"/>
+                      <a:tailEnd type="none" w="med" len="med"/>
+                    </a:lnT>
+                    <a:lnB w="6350" cap="flat" cmpd="sng" algn="ctr">
+                      <a:solidFill>
+                        <a:srgbClr val="D9CFBF"/>
+                      </a:solidFill>
+                      <a:prstDash val="solid"/>
+                      <a:round/>
+                      <a:headEnd type="none" w="med" len="med"/>
+                      <a:tailEnd type="none" w="med" len="med"/>
+                    </a:lnB>
+                    <a:solidFill>
+                      <a:srgbClr val="FBF8F3"/>
+                    </a:solidFill>
+                  </a:tcPr>
+                </a:tc>
+                <a:tc>
+                  <a:txBody>
+                    <a:bodyPr/>
+                    <a:lstStyle/>
+                    <a:p>
+                      <a:pPr marL="0" indent="0" algn="l">
+                        <a:buNone/>
+                      </a:pPr>
+                      <a:r>
+                        <a:rPr lang="en-US" sz="1320" dirty="0">
+                          <a:solidFill>
+                            <a:srgbClr val="1A1814"/>
+                          </a:solidFill>
+                        </a:rPr>
+                        <a:t>Rp48/g</a:t>
+                      </a:r>
+                      <a:endParaRPr lang="en-US" sz="1320" dirty="0"/>
+                    </a:p>
+                  </a:txBody>
+                  <a:tcPr marL="101600" marR="101600" marT="25400" marB="25400">
+                    <a:lnL w="6350" cap="flat" cmpd="sng" algn="ctr">
+                      <a:solidFill>
+                        <a:srgbClr val="D9CFBF"/>
+                      </a:solidFill>
+                      <a:prstDash val="solid"/>
+                      <a:round/>
+                      <a:headEnd type="none" w="med" len="med"/>
+                      <a:tailEnd type="none" w="med" len="med"/>
+                    </a:lnL>
+                    <a:lnR w="6350" cap="flat" cmpd="sng" algn="ctr">
+                      <a:solidFill>
+                        <a:srgbClr val="D9CFBF"/>
+                      </a:solidFill>
+                      <a:prstDash val="solid"/>
+                      <a:round/>
+                      <a:headEnd type="none" w="med" len="med"/>
+                      <a:tailEnd type="none" w="med" len="med"/>
+                    </a:lnR>
+                    <a:lnT w="6350" cap="flat" cmpd="sng" algn="ctr">
+                      <a:solidFill>
+                        <a:srgbClr val="D9CFBF"/>
+                      </a:solidFill>
+                      <a:prstDash val="solid"/>
+                      <a:round/>
+                      <a:headEnd type="none" w="med" len="med"/>
+                      <a:tailEnd type="none" w="med" len="med"/>
+                    </a:lnT>
+                    <a:lnB w="6350" cap="flat" cmpd="sng" algn="ctr">
+                      <a:solidFill>
+                        <a:srgbClr val="D9CFBF"/>
+                      </a:solidFill>
+                      <a:prstDash val="solid"/>
+                      <a:round/>
+                      <a:headEnd type="none" w="med" len="med"/>
+                      <a:tailEnd type="none" w="med" len="med"/>
+                    </a:lnB>
+                    <a:solidFill>
+                      <a:srgbClr val="FBF8F3"/>
+                    </a:solidFill>
+                  </a:tcPr>
+                </a:tc>
+              </a:tr>
+            </a:tbl>
+          </a:graphicData>
+        </a:graphic>
+      </p:graphicFrame>
+      <p:sp>
+        <p:nvSpPr>
+          <p:cNvPr id="10" name="Text 7"/>
+          <p:cNvSpPr/>
+          <p:nvPr/>
+        </p:nvSpPr>
+        <p:spPr>
+          <a:xfrm>
+            <a:off x="426709" y="5852160"/>
+            <a:ext cx="11338277" cy="487668"/>
+          </a:xfrm>
+          <a:prstGeom prst="rect">
+            <a:avLst/>
+          </a:prstGeom>
+          <a:noFill/>
+        </p:spPr>
+        <p:txBody>
+          <a:bodyPr wrap="square" lIns="0" tIns="0" rIns="0" bIns="0" rtlCol="0" anchor="ctr"/>
+          <a:lstStyle/>
+          <a:p>
+            <a:pPr marL="0" indent="0">
+              <a:buNone/>
+            </a:pPr>
+            <a:r>
+              <a:rPr lang="en-US" sz="1680" b="1" dirty="0">
+                <a:solidFill>
+                  <a:srgbClr val="2F5D50"/>
+                </a:solidFill>
+                <a:latin typeface="Calibri" panose="020F0502020204030204" pitchFamily="34" charset="0"/>
+                <a:ea typeface="Calibri" panose="020F0502020204030204" pitchFamily="34" charset="-122"/>
+                <a:cs typeface="Calibri" panose="020F0502020204030204" pitchFamily="34" charset="-120"/>
+              </a:rPr>
+              <a:t>Contoh: jual 1 Kopi Susu Aren memotong 18 g kopi batch 1, HPP Rp8.540.</a:t>
+            </a:r>
+            <a:endParaRPr lang="en-US" sz="1680" dirty="0"/>
+          </a:p>
+        </p:txBody>
+      </p:sp>
+    </p:spTree>
+  </p:cSld>
+  <p:clrMapOvr>
+    <a:masterClrMapping/>
+  </p:clrMapOvr>
+</p:sld>
+</file>
+
+<file path=ppt/slides/slide32.xml><?xml version="1.0" encoding="utf-8"?>
+<p:sld xmlns:a="http://schemas.openxmlformats.org/drawingml/2006/main" xmlns:p="http://schemas.openxmlformats.org/presentationml/2006/main" xmlns:r="http://schemas.openxmlformats.org/officeDocument/2006/relationships">
+  <p:cSld>
+    <p:spTree>
+      <p:nvGrpSpPr>
+        <p:cNvPr id="1" name=""/>
+        <p:cNvGrpSpPr/>
+        <p:nvPr/>
+      </p:nvGrpSpPr>
+      <p:grpSpPr/>
+      <p:sp>
+        <p:nvSpPr>
+          <p:cNvPr id="2" name="Shape 0"/>
+          <p:cNvSpPr/>
+          <p:nvPr/>
+        </p:nvSpPr>
+        <p:spPr>
+          <a:xfrm>
+            <a:off x="0" y="0"/>
+            <a:ext cx="12191695" cy="6858000"/>
+          </a:xfrm>
+          <a:prstGeom prst="rect">
+            <a:avLst/>
+          </a:prstGeom>
+          <a:solidFill>
+            <a:srgbClr val="F4EFE6"/>
+          </a:solidFill>
+        </p:spPr>
+        <p:txBody>
+          <a:bodyPr/>
+          <a:p/>
+        </p:txBody>
+      </p:sp>
+      <p:sp>
+        <p:nvSpPr>
+          <p:cNvPr id="3" name="Shape 1"/>
+          <p:cNvSpPr/>
+          <p:nvPr/>
+        </p:nvSpPr>
+        <p:spPr>
+          <a:xfrm>
+            <a:off x="0" y="0"/>
+            <a:ext cx="91440" cy="6858000"/>
+          </a:xfrm>
+          <a:prstGeom prst="rect">
+            <a:avLst/>
+          </a:prstGeom>
+          <a:solidFill>
+            <a:srgbClr val="C4622D"/>
+          </a:solidFill>
+        </p:spPr>
+        <p:txBody>
+          <a:bodyPr/>
+          <a:p/>
+        </p:txBody>
+      </p:sp>
+      <p:sp>
+        <p:nvSpPr>
+          <p:cNvPr id="4" name="Shape 2"/>
+          <p:cNvSpPr/>
+          <p:nvPr/>
+        </p:nvSpPr>
+        <p:spPr>
+          <a:xfrm>
+            <a:off x="0" y="6601968"/>
+            <a:ext cx="12191695" cy="256032"/>
+          </a:xfrm>
+          <a:prstGeom prst="rect">
+            <a:avLst/>
+          </a:prstGeom>
+          <a:solidFill>
+            <a:srgbClr val="1A1814"/>
+          </a:solidFill>
+        </p:spPr>
+        <p:txBody>
+          <a:bodyPr/>
+          <a:p/>
+        </p:txBody>
+      </p:sp>
+      <p:sp>
+        <p:nvSpPr>
+          <p:cNvPr id="5" name="Text 3"/>
+          <p:cNvSpPr/>
+          <p:nvPr/>
+        </p:nvSpPr>
+        <p:spPr>
+          <a:xfrm>
+            <a:off x="347472" y="6601968"/>
+            <a:ext cx="9144000" cy="256032"/>
+          </a:xfrm>
+          <a:prstGeom prst="rect">
+            <a:avLst/>
+          </a:prstGeom>
+          <a:noFill/>
+        </p:spPr>
+        <p:txBody>
+          <a:bodyPr wrap="square" lIns="0" tIns="0" rIns="0" bIns="0" rtlCol="0" anchor="ctr"/>
+          <a:lstStyle/>
+          <a:p>
+            <a:pPr marL="0" indent="0">
+              <a:buNone/>
+            </a:pPr>
+            <a:r>
+              <a:rPr lang="en-US" sz="1100" dirty="0">
+                <a:solidFill>
+                  <a:srgbClr val="E7DCC8"/>
+                </a:solidFill>
+                <a:latin typeface="Calibri" panose="020F0502020204030204" pitchFamily="34" charset="0"/>
+                <a:ea typeface="Calibri" panose="020F0502020204030204" pitchFamily="34" charset="-122"/>
+                <a:cs typeface="Calibri" panose="020F0502020204030204" pitchFamily="34" charset="-120"/>
+              </a:rPr>
+              <a:t>HUNI   ·   Proposal website kos &amp; kontrakan   ·   Oktober 2026</a:t>
+            </a:r>
+            <a:endParaRPr lang="en-US" sz="1100" dirty="0"/>
+          </a:p>
+        </p:txBody>
+      </p:sp>
+      <p:sp>
+        <p:nvSpPr>
+          <p:cNvPr id="6" name="Text 4"/>
+          <p:cNvSpPr/>
+          <p:nvPr/>
+        </p:nvSpPr>
+        <p:spPr>
+          <a:xfrm>
+            <a:off x="9509760" y="6601968"/>
+            <a:ext cx="2331720" cy="256032"/>
+          </a:xfrm>
+          <a:prstGeom prst="rect">
+            <a:avLst/>
+          </a:prstGeom>
+          <a:noFill/>
+        </p:spPr>
+        <p:txBody>
+          <a:bodyPr wrap="square" lIns="0" tIns="0" rIns="0" bIns="0" rtlCol="0" anchor="ctr"/>
+          <a:lstStyle/>
+          <a:p>
+            <a:pPr marL="0" indent="0" algn="r">
+              <a:buNone/>
+            </a:pPr>
+            <a:r>
+              <a:rPr lang="en-US" sz="1100" dirty="0">
+                <a:solidFill>
+                  <a:srgbClr val="E7DCC8"/>
+                </a:solidFill>
+                <a:latin typeface="Calibri" panose="020F0502020204030204" pitchFamily="34" charset="0"/>
+                <a:ea typeface="Calibri" panose="020F0502020204030204" pitchFamily="34" charset="-122"/>
+                <a:cs typeface="Calibri" panose="020F0502020204030204" pitchFamily="34" charset="-120"/>
+              </a:rPr>
+              <a:t>20  /  33</a:t>
+            </a:r>
+            <a:endParaRPr lang="en-US" sz="1100" dirty="0"/>
+          </a:p>
+        </p:txBody>
+      </p:sp>
+      <p:sp>
+        <p:nvSpPr>
+          <p:cNvPr id="7" name="Text 5"/>
+          <p:cNvSpPr/>
+          <p:nvPr/>
+        </p:nvSpPr>
+        <p:spPr>
+          <a:xfrm>
+            <a:off x="426709" y="304792"/>
+            <a:ext cx="11338277" cy="731502"/>
+          </a:xfrm>
+          <a:prstGeom prst="rect">
+            <a:avLst/>
+          </a:prstGeom>
+          <a:noFill/>
+        </p:spPr>
+        <p:txBody>
+          <a:bodyPr wrap="square" lIns="0" tIns="0" rIns="0" bIns="0" rtlCol="0" anchor="ctr"/>
+          <a:lstStyle/>
+          <a:p>
+            <a:pPr marL="0" indent="0">
+              <a:buNone/>
+            </a:pPr>
+            <a:r>
+              <a:rPr lang="en-US" sz="3120" b="1" dirty="0">
+                <a:solidFill>
+                  <a:srgbClr val="1A1814"/>
+                </a:solidFill>
+                <a:latin typeface="Georgia" panose="02040502050405020303" pitchFamily="34" charset="0"/>
+                <a:ea typeface="Georgia" panose="02040502050405020303" pitchFamily="34" charset="-122"/>
+                <a:cs typeface="Georgia" panose="02040502050405020303" pitchFamily="34" charset="-120"/>
+              </a:rPr>
+              <a:t>R&amp;D menu: breakdown resep dan HPP</a:t>
+            </a:r>
+            <a:endParaRPr lang="en-US" sz="3120" dirty="0"/>
+          </a:p>
+        </p:txBody>
+      </p:sp>
+      <p:sp>
+        <p:nvSpPr>
+          <p:cNvPr id="8" name="Text 6"/>
+          <p:cNvSpPr/>
+          <p:nvPr/>
+        </p:nvSpPr>
+        <p:spPr>
+          <a:xfrm>
+            <a:off x="426709" y="1072869"/>
+            <a:ext cx="11338277" cy="487668"/>
+          </a:xfrm>
+          <a:prstGeom prst="rect">
+            <a:avLst/>
+          </a:prstGeom>
+          <a:noFill/>
+        </p:spPr>
+        <p:txBody>
+          <a:bodyPr wrap="square" lIns="0" tIns="0" rIns="0" bIns="0" rtlCol="0" anchor="ctr"/>
+          <a:lstStyle/>
+          <a:p>
+            <a:pPr marL="0" indent="0">
+              <a:buNone/>
+            </a:pPr>
+            <a:r>
+              <a:rPr lang="en-US" sz="1560" dirty="0">
+                <a:solidFill>
+                  <a:srgbClr val="6F675C"/>
+                </a:solidFill>
+                <a:latin typeface="Calibri" panose="020F0502020204030204" pitchFamily="34" charset="0"/>
+                <a:ea typeface="Calibri" panose="020F0502020204030204" pitchFamily="34" charset="-122"/>
+                <a:cs typeface="Calibri" panose="020F0502020204030204" pitchFamily="34" charset="-120"/>
+              </a:rPr>
+              <a:t>HPP dari harga batch FIFO. Target HPP cafe 35% dari omzet.</a:t>
+            </a:r>
+            <a:endParaRPr lang="en-US" sz="1560" dirty="0"/>
+          </a:p>
+        </p:txBody>
+      </p:sp>
+      <p:graphicFrame>
+        <p:nvGraphicFramePr>
+          <p:cNvPr id="14" name="Table 0"/>
+          <p:cNvGraphicFramePr>
+            <a:graphicFrameLocks noGrp="1"/>
+          </p:cNvGraphicFramePr>
+          <p:nvPr/>
+        </p:nvGraphicFramePr>
+        <p:xfrm>
+          <a:off x="426709" y="1828754"/>
+          <a:ext cx="11338560" cy="3291756"/>
+        </p:xfrm>
+        <a:graphic>
+          <a:graphicData uri="http://schemas.openxmlformats.org/drawingml/2006/table">
+            <a:tbl>
+              <a:tblPr/>
+              <a:tblGrid>
+                <a:gridCol w="4937760"/>
+                <a:gridCol w="3291840"/>
+                <a:gridCol w="3108960"/>
+              </a:tblGrid>
+              <a:tr h="548626">
+                <a:tc>
+                  <a:txBody>
+                    <a:bodyPr/>
+                    <a:lstStyle/>
+                    <a:p>
+                      <a:pPr marL="0" indent="0" algn="l">
+                        <a:buNone/>
+                      </a:pPr>
+                      <a:r>
+                        <a:rPr lang="en-US" sz="1320" b="1" dirty="0">
+                          <a:solidFill>
+                            <a:srgbClr val="F4EFE6"/>
+                          </a:solidFill>
+                        </a:rPr>
+                        <a:t>Menu &amp; resep</a:t>
+                      </a:r>
+                      <a:endParaRPr lang="en-US" sz="1320" dirty="0"/>
+                    </a:p>
+                  </a:txBody>
+                  <a:tcPr marL="101600" marR="101600" marT="25400" marB="25400">
+                    <a:lnL w="6350" cap="flat" cmpd="sng" algn="ctr">
+                      <a:solidFill>
+                        <a:srgbClr val="D9CFBF"/>
+                      </a:solidFill>
+                      <a:prstDash val="solid"/>
+                      <a:round/>
+                      <a:headEnd type="none" w="med" len="med"/>
+                      <a:tailEnd type="none" w="med" len="med"/>
+                    </a:lnL>
+                    <a:lnR w="6350" cap="flat" cmpd="sng" algn="ctr">
+                      <a:solidFill>
+                        <a:srgbClr val="D9CFBF"/>
+                      </a:solidFill>
+                      <a:prstDash val="solid"/>
+                      <a:round/>
+                      <a:headEnd type="none" w="med" len="med"/>
+                      <a:tailEnd type="none" w="med" len="med"/>
+                    </a:lnR>
+                    <a:lnT w="6350" cap="flat" cmpd="sng" algn="ctr">
+                      <a:solidFill>
+                        <a:srgbClr val="D9CFBF"/>
+                      </a:solidFill>
+                      <a:prstDash val="solid"/>
+                      <a:round/>
+                      <a:headEnd type="none" w="med" len="med"/>
+                      <a:tailEnd type="none" w="med" len="med"/>
+                    </a:lnT>
+                    <a:lnB w="6350" cap="flat" cmpd="sng" algn="ctr">
+                      <a:solidFill>
+                        <a:srgbClr val="D9CFBF"/>
+                      </a:solidFill>
+                      <a:prstDash val="solid"/>
+                      <a:round/>
+                      <a:headEnd type="none" w="med" len="med"/>
+                      <a:tailEnd type="none" w="med" len="med"/>
+                    </a:lnB>
+                    <a:solidFill>
+                      <a:srgbClr val="1A1814"/>
+                    </a:solidFill>
+                  </a:tcPr>
+                </a:tc>
+                <a:tc>
+                  <a:txBody>
+                    <a:bodyPr/>
+                    <a:lstStyle/>
+                    <a:p>
+                      <a:pPr marL="0" indent="0" algn="l">
+                        <a:buNone/>
+                      </a:pPr>
+                      <a:r>
+                        <a:rPr lang="en-US" sz="1320" b="1" dirty="0">
+                          <a:solidFill>
+                            <a:srgbClr val="F4EFE6"/>
+                          </a:solidFill>
+                        </a:rPr>
+                        <a:t>Harga / HPP</a:t>
+                      </a:r>
+                      <a:endParaRPr lang="en-US" sz="1320" dirty="0"/>
+                    </a:p>
+                  </a:txBody>
+                  <a:tcPr marL="101600" marR="101600" marT="25400" marB="25400">
+                    <a:lnL w="6350" cap="flat" cmpd="sng" algn="ctr">
+                      <a:solidFill>
+                        <a:srgbClr val="D9CFBF"/>
+                      </a:solidFill>
+                      <a:prstDash val="solid"/>
+                      <a:round/>
+                      <a:headEnd type="none" w="med" len="med"/>
+                      <a:tailEnd type="none" w="med" len="med"/>
+                    </a:lnL>
+                    <a:lnR w="6350" cap="flat" cmpd="sng" algn="ctr">
+                      <a:solidFill>
+                        <a:srgbClr val="D9CFBF"/>
+                      </a:solidFill>
+                      <a:prstDash val="solid"/>
+                      <a:round/>
+                      <a:headEnd type="none" w="med" len="med"/>
+                      <a:tailEnd type="none" w="med" len="med"/>
+                    </a:lnR>
+                    <a:lnT w="6350" cap="flat" cmpd="sng" algn="ctr">
+                      <a:solidFill>
+                        <a:srgbClr val="D9CFBF"/>
+                      </a:solidFill>
+                      <a:prstDash val="solid"/>
+                      <a:round/>
+                      <a:headEnd type="none" w="med" len="med"/>
+                      <a:tailEnd type="none" w="med" len="med"/>
+                    </a:lnT>
+                    <a:lnB w="6350" cap="flat" cmpd="sng" algn="ctr">
+                      <a:solidFill>
+                        <a:srgbClr val="D9CFBF"/>
+                      </a:solidFill>
+                      <a:prstDash val="solid"/>
+                      <a:round/>
+                      <a:headEnd type="none" w="med" len="med"/>
+                      <a:tailEnd type="none" w="med" len="med"/>
+                    </a:lnB>
+                    <a:solidFill>
+                      <a:srgbClr val="1A1814"/>
+                    </a:solidFill>
+                  </a:tcPr>
+                </a:tc>
+                <a:tc>
+                  <a:txBody>
+                    <a:bodyPr/>
+                    <a:lstStyle/>
+                    <a:p>
+                      <a:pPr marL="0" indent="0" algn="l">
+                        <a:buNone/>
+                      </a:pPr>
+                      <a:r>
+                        <a:rPr lang="en-US" sz="1320" b="1" dirty="0">
+                          <a:solidFill>
+                            <a:srgbClr val="F4EFE6"/>
+                          </a:solidFill>
+                        </a:rPr>
+                        <a:t>Margin</a:t>
+                      </a:r>
+                      <a:endParaRPr lang="en-US" sz="1320" dirty="0"/>
+                    </a:p>
+                  </a:txBody>
+                  <a:tcPr marL="101600" marR="101600" marT="25400" marB="25400">
+                    <a:lnL w="6350" cap="flat" cmpd="sng" algn="ctr">
+                      <a:solidFill>
+                        <a:srgbClr val="D9CFBF"/>
+                      </a:solidFill>
+                      <a:prstDash val="solid"/>
+                      <a:round/>
+                      <a:headEnd type="none" w="med" len="med"/>
+                      <a:tailEnd type="none" w="med" len="med"/>
+                    </a:lnL>
+                    <a:lnR w="6350" cap="flat" cmpd="sng" algn="ctr">
+                      <a:solidFill>
+                        <a:srgbClr val="D9CFBF"/>
+                      </a:solidFill>
+                      <a:prstDash val="solid"/>
+                      <a:round/>
+                      <a:headEnd type="none" w="med" len="med"/>
+                      <a:tailEnd type="none" w="med" len="med"/>
+                    </a:lnR>
+                    <a:lnT w="6350" cap="flat" cmpd="sng" algn="ctr">
+                      <a:solidFill>
+                        <a:srgbClr val="D9CFBF"/>
+                      </a:solidFill>
+                      <a:prstDash val="solid"/>
+                      <a:round/>
+                      <a:headEnd type="none" w="med" len="med"/>
+                      <a:tailEnd type="none" w="med" len="med"/>
+                    </a:lnT>
+                    <a:lnB w="6350" cap="flat" cmpd="sng" algn="ctr">
+                      <a:solidFill>
+                        <a:srgbClr val="D9CFBF"/>
+                      </a:solidFill>
+                      <a:prstDash val="solid"/>
+                      <a:round/>
+                      <a:headEnd type="none" w="med" len="med"/>
+                      <a:tailEnd type="none" w="med" len="med"/>
+                    </a:lnB>
+                    <a:solidFill>
+                      <a:srgbClr val="1A1814"/>
+                    </a:solidFill>
+                  </a:tcPr>
+                </a:tc>
+              </a:tr>
+              <a:tr h="548626">
+                <a:tc>
+                  <a:txBody>
+                    <a:bodyPr/>
+                    <a:lstStyle/>
+                    <a:p>
+                      <a:pPr marL="0" indent="0" algn="l">
+                        <a:buNone/>
+                      </a:pPr>
+                      <a:r>
+                        <a:rPr lang="en-US" sz="1320" dirty="0">
+                          <a:solidFill>
+                            <a:srgbClr val="1A1814"/>
+                          </a:solidFill>
+                        </a:rPr>
+                        <a:t>Kopi Susu Aren: kopi 18 g, susu 150 ml, gula aren 20 ml</a:t>
+                      </a:r>
+                      <a:endParaRPr lang="en-US" sz="1320" dirty="0"/>
+                    </a:p>
+                  </a:txBody>
+                  <a:tcPr marL="101600" marR="101600" marT="25400" marB="25400">
+                    <a:lnL w="6350" cap="flat" cmpd="sng" algn="ctr">
+                      <a:solidFill>
+                        <a:srgbClr val="D9CFBF"/>
+                      </a:solidFill>
+                      <a:prstDash val="solid"/>
+                      <a:round/>
+                      <a:headEnd type="none" w="med" len="med"/>
+                      <a:tailEnd type="none" w="med" len="med"/>
+                    </a:lnL>
+                    <a:lnR w="6350" cap="flat" cmpd="sng" algn="ctr">
+                      <a:solidFill>
+                        <a:srgbClr val="D9CFBF"/>
+                      </a:solidFill>
+                      <a:prstDash val="solid"/>
+                      <a:round/>
+                      <a:headEnd type="none" w="med" len="med"/>
+                      <a:tailEnd type="none" w="med" len="med"/>
+                    </a:lnR>
+                    <a:lnT w="6350" cap="flat" cmpd="sng" algn="ctr">
+                      <a:solidFill>
+                        <a:srgbClr val="D9CFBF"/>
+                      </a:solidFill>
+                      <a:prstDash val="solid"/>
+                      <a:round/>
+                      <a:headEnd type="none" w="med" len="med"/>
+                      <a:tailEnd type="none" w="med" len="med"/>
+                    </a:lnT>
+                    <a:lnB w="6350" cap="flat" cmpd="sng" algn="ctr">
+                      <a:solidFill>
+                        <a:srgbClr val="D9CFBF"/>
+                      </a:solidFill>
+                      <a:prstDash val="solid"/>
+                      <a:round/>
+                      <a:headEnd type="none" w="med" len="med"/>
+                      <a:tailEnd type="none" w="med" len="med"/>
+                    </a:lnB>
+                    <a:solidFill>
+                      <a:srgbClr val="F4EFE6"/>
+                    </a:solidFill>
+                  </a:tcPr>
+                </a:tc>
+                <a:tc>
+                  <a:txBody>
+                    <a:bodyPr/>
+                    <a:lstStyle/>
+                    <a:p>
+                      <a:pPr marL="0" indent="0" algn="l">
+                        <a:buNone/>
+                      </a:pPr>
+                      <a:r>
+                        <a:rPr lang="en-US" sz="1320" dirty="0">
+                          <a:solidFill>
+                            <a:srgbClr val="1A1814"/>
+                          </a:solidFill>
+                        </a:rPr>
+                        <a:t>Rp22.000 / Rp8.540 (38,8%)</a:t>
+                      </a:r>
+                      <a:endParaRPr lang="en-US" sz="1320" dirty="0"/>
+                    </a:p>
+                  </a:txBody>
+                  <a:tcPr marL="101600" marR="101600" marT="25400" marB="25400">
+                    <a:lnL w="6350" cap="flat" cmpd="sng" algn="ctr">
+                      <a:solidFill>
+                        <a:srgbClr val="D9CFBF"/>
+                      </a:solidFill>
+                      <a:prstDash val="solid"/>
+                      <a:round/>
+                      <a:headEnd type="none" w="med" len="med"/>
+                      <a:tailEnd type="none" w="med" len="med"/>
+                    </a:lnL>
+                    <a:lnR w="6350" cap="flat" cmpd="sng" algn="ctr">
+                      <a:solidFill>
+                        <a:srgbClr val="D9CFBF"/>
+                      </a:solidFill>
+                      <a:prstDash val="solid"/>
+                      <a:round/>
+                      <a:headEnd type="none" w="med" len="med"/>
+                      <a:tailEnd type="none" w="med" len="med"/>
+                    </a:lnR>
+                    <a:lnT w="6350" cap="flat" cmpd="sng" algn="ctr">
+                      <a:solidFill>
+                        <a:srgbClr val="D9CFBF"/>
+                      </a:solidFill>
+                      <a:prstDash val="solid"/>
+                      <a:round/>
+                      <a:headEnd type="none" w="med" len="med"/>
+                      <a:tailEnd type="none" w="med" len="med"/>
+                    </a:lnT>
+                    <a:lnB w="6350" cap="flat" cmpd="sng" algn="ctr">
+                      <a:solidFill>
+                        <a:srgbClr val="D9CFBF"/>
+                      </a:solidFill>
+                      <a:prstDash val="solid"/>
+                      <a:round/>
+                      <a:headEnd type="none" w="med" len="med"/>
+                      <a:tailEnd type="none" w="med" len="med"/>
+                    </a:lnB>
+                    <a:solidFill>
+                      <a:srgbClr val="F4EFE6"/>
+                    </a:solidFill>
+                  </a:tcPr>
+                </a:tc>
+                <a:tc>
+                  <a:txBody>
+                    <a:bodyPr/>
+                    <a:lstStyle/>
+                    <a:p>
+                      <a:pPr marL="0" indent="0" algn="l">
+                        <a:buNone/>
+                      </a:pPr>
+                      <a:r>
+                        <a:rPr lang="en-US" sz="1320" dirty="0">
+                          <a:solidFill>
+                            <a:srgbClr val="1A1814"/>
+                          </a:solidFill>
+                        </a:rPr>
+                        <a:t>Rp13.460</a:t>
+                      </a:r>
+                      <a:endParaRPr lang="en-US" sz="1320" dirty="0"/>
+                    </a:p>
+                  </a:txBody>
+                  <a:tcPr marL="101600" marR="101600" marT="25400" marB="25400">
+                    <a:lnL w="6350" cap="flat" cmpd="sng" algn="ctr">
+                      <a:solidFill>
+                        <a:srgbClr val="D9CFBF"/>
+                      </a:solidFill>
+                      <a:prstDash val="solid"/>
+                      <a:round/>
+                      <a:headEnd type="none" w="med" len="med"/>
+                      <a:tailEnd type="none" w="med" len="med"/>
+                    </a:lnL>
+                    <a:lnR w="6350" cap="flat" cmpd="sng" algn="ctr">
+                      <a:solidFill>
+                        <a:srgbClr val="D9CFBF"/>
+                      </a:solidFill>
+                      <a:prstDash val="solid"/>
+                      <a:round/>
+                      <a:headEnd type="none" w="med" len="med"/>
+                      <a:tailEnd type="none" w="med" len="med"/>
+                    </a:lnR>
+                    <a:lnT w="6350" cap="flat" cmpd="sng" algn="ctr">
+                      <a:solidFill>
+                        <a:srgbClr val="D9CFBF"/>
+                      </a:solidFill>
+                      <a:prstDash val="solid"/>
+                      <a:round/>
+                      <a:headEnd type="none" w="med" len="med"/>
+                      <a:tailEnd type="none" w="med" len="med"/>
+                    </a:lnT>
+                    <a:lnB w="6350" cap="flat" cmpd="sng" algn="ctr">
+                      <a:solidFill>
+                        <a:srgbClr val="D9CFBF"/>
+                      </a:solidFill>
+                      <a:prstDash val="solid"/>
+                      <a:round/>
+                      <a:headEnd type="none" w="med" len="med"/>
+                      <a:tailEnd type="none" w="med" len="med"/>
+                    </a:lnB>
+                    <a:solidFill>
+                      <a:srgbClr val="F4EFE6"/>
+                    </a:solidFill>
+                  </a:tcPr>
+                </a:tc>
+              </a:tr>
+              <a:tr h="548626">
+                <a:tc>
+                  <a:txBody>
+                    <a:bodyPr/>
+                    <a:lstStyle/>
+                    <a:p>
+                      <a:pPr marL="0" indent="0" algn="l">
+                        <a:buNone/>
+                      </a:pPr>
+                      <a:r>
+                        <a:rPr lang="en-US" sz="1320" dirty="0">
+                          <a:solidFill>
+                            <a:srgbClr val="1A1814"/>
+                          </a:solidFill>
+                        </a:rPr>
+                        <a:t>Americano: kopi 18 g</a:t>
+                      </a:r>
+                      <a:endParaRPr lang="en-US" sz="1320" dirty="0"/>
+                    </a:p>
+                  </a:txBody>
+                  <a:tcPr marL="101600" marR="101600" marT="25400" marB="25400">
+                    <a:lnL w="6350" cap="flat" cmpd="sng" algn="ctr">
+                      <a:solidFill>
+                        <a:srgbClr val="D9CFBF"/>
+                      </a:solidFill>
+                      <a:prstDash val="solid"/>
+                      <a:round/>
+                      <a:headEnd type="none" w="med" len="med"/>
+                      <a:tailEnd type="none" w="med" len="med"/>
+                    </a:lnL>
+                    <a:lnR w="6350" cap="flat" cmpd="sng" algn="ctr">
+                      <a:solidFill>
+                        <a:srgbClr val="D9CFBF"/>
+                      </a:solidFill>
+                      <a:prstDash val="solid"/>
+                      <a:round/>
+                      <a:headEnd type="none" w="med" len="med"/>
+                      <a:tailEnd type="none" w="med" len="med"/>
+                    </a:lnR>
+                    <a:lnT w="6350" cap="flat" cmpd="sng" algn="ctr">
+                      <a:solidFill>
+                        <a:srgbClr val="D9CFBF"/>
+                      </a:solidFill>
+                      <a:prstDash val="solid"/>
+                      <a:round/>
+                      <a:headEnd type="none" w="med" len="med"/>
+                      <a:tailEnd type="none" w="med" len="med"/>
+                    </a:lnT>
+                    <a:lnB w="6350" cap="flat" cmpd="sng" algn="ctr">
+                      <a:solidFill>
+                        <a:srgbClr val="D9CFBF"/>
+                      </a:solidFill>
+                      <a:prstDash val="solid"/>
+                      <a:round/>
+                      <a:headEnd type="none" w="med" len="med"/>
+                      <a:tailEnd type="none" w="med" len="med"/>
+                    </a:lnB>
+                    <a:solidFill>
+                      <a:srgbClr val="FBF8F3"/>
+                    </a:solidFill>
+                  </a:tcPr>
+                </a:tc>
+                <a:tc>
+                  <a:txBody>
+                    <a:bodyPr/>
+                    <a:lstStyle/>
+                    <a:p>
+                      <a:pPr marL="0" indent="0" algn="l">
+                        <a:buNone/>
+                      </a:pPr>
+                      <a:r>
+                        <a:rPr lang="en-US" sz="1320" dirty="0">
+                          <a:solidFill>
+                            <a:srgbClr val="1A1814"/>
+                          </a:solidFill>
+                        </a:rPr>
+                        <a:t>Rp18.000 / Rp5.040 (28,0%)</a:t>
+                      </a:r>
+                      <a:endParaRPr lang="en-US" sz="1320" dirty="0"/>
+                    </a:p>
+                  </a:txBody>
+                  <a:tcPr marL="101600" marR="101600" marT="25400" marB="25400">
+                    <a:lnL w="6350" cap="flat" cmpd="sng" algn="ctr">
+                      <a:solidFill>
+                        <a:srgbClr val="D9CFBF"/>
+                      </a:solidFill>
+                      <a:prstDash val="solid"/>
+                      <a:round/>
+                      <a:headEnd type="none" w="med" len="med"/>
+                      <a:tailEnd type="none" w="med" len="med"/>
+                    </a:lnL>
+                    <a:lnR w="6350" cap="flat" cmpd="sng" algn="ctr">
+                      <a:solidFill>
+                        <a:srgbClr val="D9CFBF"/>
+                      </a:solidFill>
+                      <a:prstDash val="solid"/>
+                      <a:round/>
+                      <a:headEnd type="none" w="med" len="med"/>
+                      <a:tailEnd type="none" w="med" len="med"/>
+                    </a:lnR>
+                    <a:lnT w="6350" cap="flat" cmpd="sng" algn="ctr">
+                      <a:solidFill>
+                        <a:srgbClr val="D9CFBF"/>
+                      </a:solidFill>
+                      <a:prstDash val="solid"/>
+                      <a:round/>
+                      <a:headEnd type="none" w="med" len="med"/>
+                      <a:tailEnd type="none" w="med" len="med"/>
+                    </a:lnT>
+                    <a:lnB w="6350" cap="flat" cmpd="sng" algn="ctr">
+                      <a:solidFill>
+                        <a:srgbClr val="D9CFBF"/>
+                      </a:solidFill>
+                      <a:prstDash val="solid"/>
+                      <a:round/>
+                      <a:headEnd type="none" w="med" len="med"/>
+                      <a:tailEnd type="none" w="med" len="med"/>
+                    </a:lnB>
+                    <a:solidFill>
+                      <a:srgbClr val="FBF8F3"/>
+                    </a:solidFill>
+                  </a:tcPr>
+                </a:tc>
+                <a:tc>
+                  <a:txBody>
+                    <a:bodyPr/>
+                    <a:lstStyle/>
+                    <a:p>
+                      <a:pPr marL="0" indent="0" algn="l">
+                        <a:buNone/>
+                      </a:pPr>
+                      <a:r>
+                        <a:rPr lang="en-US" sz="1320" dirty="0">
+                          <a:solidFill>
+                            <a:srgbClr val="1A1814"/>
+                          </a:solidFill>
+                        </a:rPr>
+                        <a:t>Rp12.960</a:t>
+                      </a:r>
+                      <a:endParaRPr lang="en-US" sz="1320" dirty="0"/>
+                    </a:p>
+                  </a:txBody>
+                  <a:tcPr marL="101600" marR="101600" marT="25400" marB="25400">
+                    <a:lnL w="6350" cap="flat" cmpd="sng" algn="ctr">
+                      <a:solidFill>
+                        <a:srgbClr val="D9CFBF"/>
+                      </a:solidFill>
+                      <a:prstDash val="solid"/>
+                      <a:round/>
+                      <a:headEnd type="none" w="med" len="med"/>
+                      <a:tailEnd type="none" w="med" len="med"/>
+                    </a:lnL>
+                    <a:lnR w="6350" cap="flat" cmpd="sng" algn="ctr">
+                      <a:solidFill>
+                        <a:srgbClr val="D9CFBF"/>
+                      </a:solidFill>
+                      <a:prstDash val="solid"/>
+                      <a:round/>
+                      <a:headEnd type="none" w="med" len="med"/>
+                      <a:tailEnd type="none" w="med" len="med"/>
+                    </a:lnR>
+                    <a:lnT w="6350" cap="flat" cmpd="sng" algn="ctr">
+                      <a:solidFill>
+                        <a:srgbClr val="D9CFBF"/>
+                      </a:solidFill>
+                      <a:prstDash val="solid"/>
+                      <a:round/>
+                      <a:headEnd type="none" w="med" len="med"/>
+                      <a:tailEnd type="none" w="med" len="med"/>
+                    </a:lnT>
+                    <a:lnB w="6350" cap="flat" cmpd="sng" algn="ctr">
+                      <a:solidFill>
+                        <a:srgbClr val="D9CFBF"/>
+                      </a:solidFill>
+                      <a:prstDash val="solid"/>
+                      <a:round/>
+                      <a:headEnd type="none" w="med" len="med"/>
+                      <a:tailEnd type="none" w="med" len="med"/>
+                    </a:lnB>
+                    <a:solidFill>
+                      <a:srgbClr val="FBF8F3"/>
+                    </a:solidFill>
+                  </a:tcPr>
+                </a:tc>
+              </a:tr>
+              <a:tr h="548626">
+                <a:tc>
+                  <a:txBody>
+                    <a:bodyPr/>
+                    <a:lstStyle/>
+                    <a:p>
+                      <a:pPr marL="0" indent="0" algn="l">
+                        <a:buNone/>
+                      </a:pPr>
+                      <a:r>
+                        <a:rPr lang="en-US" sz="1320" dirty="0">
+                          <a:solidFill>
+                            <a:srgbClr val="1A1814"/>
+                          </a:solidFill>
+                        </a:rPr>
+                        <a:t>Ayam Geprek + Nasi: ayam 120 g, beras 150 g, cabai 15 g</a:t>
+                      </a:r>
+                      <a:endParaRPr lang="en-US" sz="1320" dirty="0"/>
+                    </a:p>
+                  </a:txBody>
+                  <a:tcPr marL="101600" marR="101600" marT="25400" marB="25400">
+                    <a:lnL w="6350" cap="flat" cmpd="sng" algn="ctr">
+                      <a:solidFill>
+                        <a:srgbClr val="D9CFBF"/>
+                      </a:solidFill>
+                      <a:prstDash val="solid"/>
+                      <a:round/>
+                      <a:headEnd type="none" w="med" len="med"/>
+                      <a:tailEnd type="none" w="med" len="med"/>
+                    </a:lnL>
+                    <a:lnR w="6350" cap="flat" cmpd="sng" algn="ctr">
+                      <a:solidFill>
+                        <a:srgbClr val="D9CFBF"/>
+                      </a:solidFill>
+                      <a:prstDash val="solid"/>
+                      <a:round/>
+                      <a:headEnd type="none" w="med" len="med"/>
+                      <a:tailEnd type="none" w="med" len="med"/>
+                    </a:lnR>
+                    <a:lnT w="6350" cap="flat" cmpd="sng" algn="ctr">
+                      <a:solidFill>
+                        <a:srgbClr val="D9CFBF"/>
+                      </a:solidFill>
+                      <a:prstDash val="solid"/>
+                      <a:round/>
+                      <a:headEnd type="none" w="med" len="med"/>
+                      <a:tailEnd type="none" w="med" len="med"/>
+                    </a:lnT>
+                    <a:lnB w="6350" cap="flat" cmpd="sng" algn="ctr">
+                      <a:solidFill>
+                        <a:srgbClr val="D9CFBF"/>
+                      </a:solidFill>
+                      <a:prstDash val="solid"/>
+                      <a:round/>
+                      <a:headEnd type="none" w="med" len="med"/>
+                      <a:tailEnd type="none" w="med" len="med"/>
+                    </a:lnB>
+                    <a:solidFill>
+                      <a:srgbClr val="F4EFE6"/>
+                    </a:solidFill>
+                  </a:tcPr>
+                </a:tc>
+                <a:tc>
+                  <a:txBody>
+                    <a:bodyPr/>
+                    <a:lstStyle/>
+                    <a:p>
+                      <a:pPr marL="0" indent="0" algn="l">
+                        <a:buNone/>
+                      </a:pPr>
+                      <a:r>
+                        <a:rPr lang="en-US" sz="1320" dirty="0">
+                          <a:solidFill>
+                            <a:srgbClr val="1A1814"/>
+                          </a:solidFill>
+                        </a:rPr>
+                        <a:t>Rp28.000 / Rp8.550 (30,5%)</a:t>
+                      </a:r>
+                      <a:endParaRPr lang="en-US" sz="1320" dirty="0"/>
+                    </a:p>
+                  </a:txBody>
+                  <a:tcPr marL="101600" marR="101600" marT="25400" marB="25400">
+                    <a:lnL w="6350" cap="flat" cmpd="sng" algn="ctr">
+                      <a:solidFill>
+                        <a:srgbClr val="D9CFBF"/>
+                      </a:solidFill>
+                      <a:prstDash val="solid"/>
+                      <a:round/>
+                      <a:headEnd type="none" w="med" len="med"/>
+                      <a:tailEnd type="none" w="med" len="med"/>
+                    </a:lnL>
+                    <a:lnR w="6350" cap="flat" cmpd="sng" algn="ctr">
+                      <a:solidFill>
+                        <a:srgbClr val="D9CFBF"/>
+                      </a:solidFill>
+                      <a:prstDash val="solid"/>
+                      <a:round/>
+                      <a:headEnd type="none" w="med" len="med"/>
+                      <a:tailEnd type="none" w="med" len="med"/>
+                    </a:lnR>
+                    <a:lnT w="6350" cap="flat" cmpd="sng" algn="ctr">
+                      <a:solidFill>
+                        <a:srgbClr val="D9CFBF"/>
+                      </a:solidFill>
+                      <a:prstDash val="solid"/>
+                      <a:round/>
+                      <a:headEnd type="none" w="med" len="med"/>
+                      <a:tailEnd type="none" w="med" len="med"/>
+                    </a:lnT>
+                    <a:lnB w="6350" cap="flat" cmpd="sng" algn="ctr">
+                      <a:solidFill>
+                        <a:srgbClr val="D9CFBF"/>
+                      </a:solidFill>
+                      <a:prstDash val="solid"/>
+                      <a:round/>
+                      <a:headEnd type="none" w="med" len="med"/>
+                      <a:tailEnd type="none" w="med" len="med"/>
+                    </a:lnB>
+                    <a:solidFill>
+                      <a:srgbClr val="F4EFE6"/>
+                    </a:solidFill>
+                  </a:tcPr>
+                </a:tc>
+                <a:tc>
+                  <a:txBody>
+                    <a:bodyPr/>
+                    <a:lstStyle/>
+                    <a:p>
+                      <a:pPr marL="0" indent="0" algn="l">
+                        <a:buNone/>
+                      </a:pPr>
+                      <a:r>
+                        <a:rPr lang="en-US" sz="1320" dirty="0">
+                          <a:solidFill>
+                            <a:srgbClr val="1A1814"/>
+                          </a:solidFill>
+                        </a:rPr>
+                        <a:t>Rp19.450</a:t>
+                      </a:r>
+                      <a:endParaRPr lang="en-US" sz="1320" dirty="0"/>
+                    </a:p>
+                  </a:txBody>
+                  <a:tcPr marL="101600" marR="101600" marT="25400" marB="25400">
+                    <a:lnL w="6350" cap="flat" cmpd="sng" algn="ctr">
+                      <a:solidFill>
+                        <a:srgbClr val="D9CFBF"/>
+                      </a:solidFill>
+                      <a:prstDash val="solid"/>
+                      <a:round/>
+                      <a:headEnd type="none" w="med" len="med"/>
+                      <a:tailEnd type="none" w="med" len="med"/>
+                    </a:lnL>
+                    <a:lnR w="6350" cap="flat" cmpd="sng" algn="ctr">
+                      <a:solidFill>
+                        <a:srgbClr val="D9CFBF"/>
+                      </a:solidFill>
+                      <a:prstDash val="solid"/>
+                      <a:round/>
+                      <a:headEnd type="none" w="med" len="med"/>
+                      <a:tailEnd type="none" w="med" len="med"/>
+                    </a:lnR>
+                    <a:lnT w="6350" cap="flat" cmpd="sng" algn="ctr">
+                      <a:solidFill>
+                        <a:srgbClr val="D9CFBF"/>
+                      </a:solidFill>
+                      <a:prstDash val="solid"/>
+                      <a:round/>
+                      <a:headEnd type="none" w="med" len="med"/>
+                      <a:tailEnd type="none" w="med" len="med"/>
+                    </a:lnT>
+                    <a:lnB w="6350" cap="flat" cmpd="sng" algn="ctr">
+                      <a:solidFill>
+                        <a:srgbClr val="D9CFBF"/>
+                      </a:solidFill>
+                      <a:prstDash val="solid"/>
+                      <a:round/>
+                      <a:headEnd type="none" w="med" len="med"/>
+                      <a:tailEnd type="none" w="med" len="med"/>
+                    </a:lnB>
+                    <a:solidFill>
+                      <a:srgbClr val="F4EFE6"/>
+                    </a:solidFill>
+                  </a:tcPr>
+                </a:tc>
+              </a:tr>
+            </a:tbl>
+          </a:graphicData>
+        </a:graphic>
+      </p:graphicFrame>
+      <p:sp>
+        <p:nvSpPr>
+          <p:cNvPr id="10" name="Text 7"/>
+          <p:cNvSpPr/>
+          <p:nvPr/>
+        </p:nvSpPr>
+        <p:spPr>
+          <a:xfrm>
+            <a:off x="426709" y="5852160"/>
+            <a:ext cx="11338277" cy="487668"/>
+          </a:xfrm>
+          <a:prstGeom prst="rect">
+            <a:avLst/>
+          </a:prstGeom>
+          <a:noFill/>
+        </p:spPr>
+        <p:txBody>
+          <a:bodyPr wrap="square" lIns="0" tIns="0" rIns="0" bIns="0" rtlCol="0" anchor="ctr"/>
+          <a:lstStyle/>
+          <a:p>
+            <a:pPr marL="0" indent="0">
+              <a:buNone/>
+            </a:pPr>
+            <a:r>
+              <a:rPr lang="en-US" sz="1680" b="1" dirty="0">
+                <a:solidFill>
+                  <a:srgbClr val="2F5D50"/>
+                </a:solidFill>
+                <a:latin typeface="Calibri" panose="020F0502020204030204" pitchFamily="34" charset="0"/>
+                <a:ea typeface="Calibri" panose="020F0502020204030204" pitchFamily="34" charset="-122"/>
+                <a:cs typeface="Calibri" panose="020F0502020204030204" pitchFamily="34" charset="-120"/>
+              </a:rPr>
+              <a:t>Kopi Susu Aren di atas target 35%. Harga pas di target: Rp24.400.</a:t>
+            </a:r>
+            <a:endParaRPr lang="en-US" sz="1680" dirty="0"/>
+          </a:p>
+        </p:txBody>
+      </p:sp>
+    </p:spTree>
+  </p:cSld>
+  <p:clrMapOvr>
+    <a:masterClrMapping/>
+  </p:clrMapOvr>
+</p:sld>
+</file>
+
+<file path=ppt/slides/slide33.xml><?xml version="1.0" encoding="utf-8"?>
+<p:sld xmlns:a="http://schemas.openxmlformats.org/drawingml/2006/main" xmlns:p="http://schemas.openxmlformats.org/presentationml/2006/main" xmlns:r="http://schemas.openxmlformats.org/officeDocument/2006/relationships">
+  <p:cSld>
+    <p:spTree>
+      <p:nvGrpSpPr>
+        <p:cNvPr id="1" name=""/>
+        <p:cNvGrpSpPr/>
+        <p:nvPr/>
+      </p:nvGrpSpPr>
+      <p:grpSpPr/>
+      <p:sp>
+        <p:nvSpPr>
+          <p:cNvPr id="2" name="Shape 0"/>
+          <p:cNvSpPr/>
+          <p:nvPr/>
+        </p:nvSpPr>
+        <p:spPr>
+          <a:xfrm>
+            <a:off x="0" y="0"/>
+            <a:ext cx="12191695" cy="6858000"/>
+          </a:xfrm>
+          <a:prstGeom prst="rect">
+            <a:avLst/>
+          </a:prstGeom>
+          <a:solidFill>
+            <a:srgbClr val="F4EFE6"/>
+          </a:solidFill>
+        </p:spPr>
+        <p:txBody>
+          <a:bodyPr/>
+          <a:p/>
+        </p:txBody>
+      </p:sp>
+      <p:sp>
+        <p:nvSpPr>
+          <p:cNvPr id="3" name="Shape 1"/>
+          <p:cNvSpPr/>
+          <p:nvPr/>
+        </p:nvSpPr>
+        <p:spPr>
+          <a:xfrm>
+            <a:off x="0" y="0"/>
+            <a:ext cx="91440" cy="6858000"/>
+          </a:xfrm>
+          <a:prstGeom prst="rect">
+            <a:avLst/>
+          </a:prstGeom>
+          <a:solidFill>
+            <a:srgbClr val="C4622D"/>
+          </a:solidFill>
+        </p:spPr>
+        <p:txBody>
+          <a:bodyPr/>
+          <a:p/>
+        </p:txBody>
+      </p:sp>
+      <p:sp>
+        <p:nvSpPr>
+          <p:cNvPr id="4" name="Shape 2"/>
+          <p:cNvSpPr/>
+          <p:nvPr/>
+        </p:nvSpPr>
+        <p:spPr>
+          <a:xfrm>
+            <a:off x="0" y="6601968"/>
+            <a:ext cx="12191695" cy="256032"/>
+          </a:xfrm>
+          <a:prstGeom prst="rect">
+            <a:avLst/>
+          </a:prstGeom>
+          <a:solidFill>
+            <a:srgbClr val="1A1814"/>
+          </a:solidFill>
+        </p:spPr>
+        <p:txBody>
+          <a:bodyPr/>
+          <a:p/>
+        </p:txBody>
+      </p:sp>
+      <p:sp>
+        <p:nvSpPr>
+          <p:cNvPr id="5" name="Text 3"/>
+          <p:cNvSpPr/>
+          <p:nvPr/>
+        </p:nvSpPr>
+        <p:spPr>
+          <a:xfrm>
+            <a:off x="347472" y="6601968"/>
+            <a:ext cx="9144000" cy="256032"/>
+          </a:xfrm>
+          <a:prstGeom prst="rect">
+            <a:avLst/>
+          </a:prstGeom>
+          <a:noFill/>
+        </p:spPr>
+        <p:txBody>
+          <a:bodyPr wrap="square" lIns="0" tIns="0" rIns="0" bIns="0" rtlCol="0" anchor="ctr"/>
+          <a:lstStyle/>
+          <a:p>
+            <a:pPr marL="0" indent="0">
+              <a:buNone/>
+            </a:pPr>
+            <a:r>
+              <a:rPr lang="en-US" sz="1100" dirty="0">
+                <a:solidFill>
+                  <a:srgbClr val="E7DCC8"/>
+                </a:solidFill>
+                <a:latin typeface="Calibri" panose="020F0502020204030204" pitchFamily="34" charset="0"/>
+                <a:ea typeface="Calibri" panose="020F0502020204030204" pitchFamily="34" charset="-122"/>
+                <a:cs typeface="Calibri" panose="020F0502020204030204" pitchFamily="34" charset="-120"/>
+              </a:rPr>
+              <a:t>HUNI   ·   Proposal website kos &amp; kontrakan   ·   Oktober 2026</a:t>
+            </a:r>
+            <a:endParaRPr lang="en-US" sz="1100" dirty="0"/>
+          </a:p>
+        </p:txBody>
+      </p:sp>
+      <p:sp>
+        <p:nvSpPr>
+          <p:cNvPr id="6" name="Text 4"/>
+          <p:cNvSpPr/>
+          <p:nvPr/>
+        </p:nvSpPr>
+        <p:spPr>
+          <a:xfrm>
+            <a:off x="9509760" y="6601968"/>
+            <a:ext cx="2331720" cy="256032"/>
+          </a:xfrm>
+          <a:prstGeom prst="rect">
+            <a:avLst/>
+          </a:prstGeom>
+          <a:noFill/>
+        </p:spPr>
+        <p:txBody>
+          <a:bodyPr wrap="square" lIns="0" tIns="0" rIns="0" bIns="0" rtlCol="0" anchor="ctr"/>
+          <a:lstStyle/>
+          <a:p>
+            <a:pPr marL="0" indent="0" algn="r">
+              <a:buNone/>
+            </a:pPr>
+            <a:r>
+              <a:rPr lang="en-US" sz="1100" dirty="0">
+                <a:solidFill>
+                  <a:srgbClr val="E7DCC8"/>
+                </a:solidFill>
+                <a:latin typeface="Calibri" panose="020F0502020204030204" pitchFamily="34" charset="0"/>
+                <a:ea typeface="Calibri" panose="020F0502020204030204" pitchFamily="34" charset="-122"/>
+                <a:cs typeface="Calibri" panose="020F0502020204030204" pitchFamily="34" charset="-120"/>
+              </a:rPr>
+              <a:t>21  /  33</a:t>
+            </a:r>
+            <a:endParaRPr lang="en-US" sz="1100" dirty="0"/>
+          </a:p>
+        </p:txBody>
+      </p:sp>
+      <p:sp>
+        <p:nvSpPr>
+          <p:cNvPr id="7" name="Text 5"/>
+          <p:cNvSpPr/>
+          <p:nvPr/>
+        </p:nvSpPr>
+        <p:spPr>
+          <a:xfrm>
+            <a:off x="426709" y="304792"/>
+            <a:ext cx="11338277" cy="731502"/>
+          </a:xfrm>
+          <a:prstGeom prst="rect">
+            <a:avLst/>
+          </a:prstGeom>
+          <a:noFill/>
+        </p:spPr>
+        <p:txBody>
+          <a:bodyPr wrap="square" lIns="0" tIns="0" rIns="0" bIns="0" rtlCol="0" anchor="ctr"/>
+          <a:lstStyle/>
+          <a:p>
+            <a:pPr marL="0" indent="0">
+              <a:buNone/>
+            </a:pPr>
+            <a:r>
+              <a:rPr lang="en-US" sz="3120" b="1" dirty="0">
+                <a:solidFill>
+                  <a:srgbClr val="1A1814"/>
+                </a:solidFill>
+                <a:latin typeface="Georgia" panose="02040502050405020303" pitchFamily="34" charset="0"/>
+                <a:ea typeface="Georgia" panose="02040502050405020303" pitchFamily="34" charset="-122"/>
+                <a:cs typeface="Georgia" panose="02040502050405020303" pitchFamily="34" charset="-120"/>
+              </a:rPr>
+              <a:t>Marketing: KOL dan influencer</a:t>
+            </a:r>
+            <a:endParaRPr lang="en-US" sz="3120" dirty="0"/>
+          </a:p>
+        </p:txBody>
+      </p:sp>
+      <p:sp>
+        <p:nvSpPr>
+          <p:cNvPr id="8" name="Text 6"/>
+          <p:cNvSpPr/>
+          <p:nvPr/>
+        </p:nvSpPr>
+        <p:spPr>
+          <a:xfrm>
+            <a:off x="426709" y="1072869"/>
+            <a:ext cx="11338277" cy="487668"/>
+          </a:xfrm>
+          <a:prstGeom prst="rect">
+            <a:avLst/>
+          </a:prstGeom>
+          <a:noFill/>
+        </p:spPr>
+        <p:txBody>
+          <a:bodyPr wrap="square" lIns="0" tIns="0" rIns="0" bIns="0" rtlCol="0" anchor="ctr"/>
+          <a:lstStyle/>
+          <a:p>
+            <a:pPr marL="0" indent="0">
+              <a:buNone/>
+            </a:pPr>
+            <a:r>
+              <a:rPr lang="en-US" sz="1560" dirty="0">
+                <a:solidFill>
+                  <a:srgbClr val="6F675C"/>
+                </a:solidFill>
+                <a:latin typeface="Calibri" panose="020F0502020204030204" pitchFamily="34" charset="0"/>
+                <a:ea typeface="Calibri" panose="020F0502020204030204" pitchFamily="34" charset="-122"/>
+                <a:cs typeface="Calibri" panose="020F0502020204030204" pitchFamily="34" charset="-120"/>
+              </a:rPr>
+              <a:t>Tiap KOL punya kode promo. ROI = omzet dari kode dibagi fee.</a:t>
+            </a:r>
+            <a:endParaRPr lang="en-US" sz="1560" dirty="0"/>
+          </a:p>
+        </p:txBody>
+      </p:sp>
+      <p:graphicFrame>
+        <p:nvGraphicFramePr>
+          <p:cNvPr id="14" name="Table 0"/>
+          <p:cNvGraphicFramePr>
+            <a:graphicFrameLocks noGrp="1"/>
+          </p:cNvGraphicFramePr>
+          <p:nvPr/>
+        </p:nvGraphicFramePr>
+        <p:xfrm>
+          <a:off x="426709" y="1828754"/>
+          <a:ext cx="11338560" cy="3291756"/>
+        </p:xfrm>
+        <a:graphic>
+          <a:graphicData uri="http://schemas.openxmlformats.org/drawingml/2006/table">
+            <a:tbl>
+              <a:tblPr/>
+              <a:tblGrid>
+                <a:gridCol w="4572000"/>
+                <a:gridCol w="3474720"/>
+                <a:gridCol w="3291840"/>
+              </a:tblGrid>
+              <a:tr h="548626">
+                <a:tc>
+                  <a:txBody>
+                    <a:bodyPr/>
+                    <a:lstStyle/>
+                    <a:p>
+                      <a:pPr marL="0" indent="0" algn="l">
+                        <a:buNone/>
+                      </a:pPr>
+                      <a:r>
+                        <a:rPr lang="en-US" sz="1320" b="1" dirty="0">
+                          <a:solidFill>
+                            <a:srgbClr val="F4EFE6"/>
+                          </a:solidFill>
+                        </a:rPr>
+                        <a:t>KOL &amp; platform</a:t>
+                      </a:r>
+                      <a:endParaRPr lang="en-US" sz="1320" dirty="0"/>
+                    </a:p>
+                  </a:txBody>
+                  <a:tcPr marL="101600" marR="101600" marT="25400" marB="25400">
+                    <a:lnL w="6350" cap="flat" cmpd="sng" algn="ctr">
+                      <a:solidFill>
+                        <a:srgbClr val="D9CFBF"/>
+                      </a:solidFill>
+                      <a:prstDash val="solid"/>
+                      <a:round/>
+                      <a:headEnd type="none" w="med" len="med"/>
+                      <a:tailEnd type="none" w="med" len="med"/>
+                    </a:lnL>
+                    <a:lnR w="6350" cap="flat" cmpd="sng" algn="ctr">
+                      <a:solidFill>
+                        <a:srgbClr val="D9CFBF"/>
+                      </a:solidFill>
+                      <a:prstDash val="solid"/>
+                      <a:round/>
+                      <a:headEnd type="none" w="med" len="med"/>
+                      <a:tailEnd type="none" w="med" len="med"/>
+                    </a:lnR>
+                    <a:lnT w="6350" cap="flat" cmpd="sng" algn="ctr">
+                      <a:solidFill>
+                        <a:srgbClr val="D9CFBF"/>
+                      </a:solidFill>
+                      <a:prstDash val="solid"/>
+                      <a:round/>
+                      <a:headEnd type="none" w="med" len="med"/>
+                      <a:tailEnd type="none" w="med" len="med"/>
+                    </a:lnT>
+                    <a:lnB w="6350" cap="flat" cmpd="sng" algn="ctr">
+                      <a:solidFill>
+                        <a:srgbClr val="D9CFBF"/>
+                      </a:solidFill>
+                      <a:prstDash val="solid"/>
+                      <a:round/>
+                      <a:headEnd type="none" w="med" len="med"/>
+                      <a:tailEnd type="none" w="med" len="med"/>
+                    </a:lnB>
+                    <a:solidFill>
+                      <a:srgbClr val="1A1814"/>
+                    </a:solidFill>
+                  </a:tcPr>
+                </a:tc>
+                <a:tc>
+                  <a:txBody>
+                    <a:bodyPr/>
+                    <a:lstStyle/>
+                    <a:p>
+                      <a:pPr marL="0" indent="0" algn="l">
+                        <a:buNone/>
+                      </a:pPr>
+                      <a:r>
+                        <a:rPr lang="en-US" sz="1320" b="1" dirty="0">
+                          <a:solidFill>
+                            <a:srgbClr val="F4EFE6"/>
+                          </a:solidFill>
+                        </a:rPr>
+                        <a:t>Fee · kode</a:t>
+                      </a:r>
+                      <a:endParaRPr lang="en-US" sz="1320" dirty="0"/>
+                    </a:p>
+                  </a:txBody>
+                  <a:tcPr marL="101600" marR="101600" marT="25400" marB="25400">
+                    <a:lnL w="6350" cap="flat" cmpd="sng" algn="ctr">
+                      <a:solidFill>
+                        <a:srgbClr val="D9CFBF"/>
+                      </a:solidFill>
+                      <a:prstDash val="solid"/>
+                      <a:round/>
+                      <a:headEnd type="none" w="med" len="med"/>
+                      <a:tailEnd type="none" w="med" len="med"/>
+                    </a:lnL>
+                    <a:lnR w="6350" cap="flat" cmpd="sng" algn="ctr">
+                      <a:solidFill>
+                        <a:srgbClr val="D9CFBF"/>
+                      </a:solidFill>
+                      <a:prstDash val="solid"/>
+                      <a:round/>
+                      <a:headEnd type="none" w="med" len="med"/>
+                      <a:tailEnd type="none" w="med" len="med"/>
+                    </a:lnR>
+                    <a:lnT w="6350" cap="flat" cmpd="sng" algn="ctr">
+                      <a:solidFill>
+                        <a:srgbClr val="D9CFBF"/>
+                      </a:solidFill>
+                      <a:prstDash val="solid"/>
+                      <a:round/>
+                      <a:headEnd type="none" w="med" len="med"/>
+                      <a:tailEnd type="none" w="med" len="med"/>
+                    </a:lnT>
+                    <a:lnB w="6350" cap="flat" cmpd="sng" algn="ctr">
+                      <a:solidFill>
+                        <a:srgbClr val="D9CFBF"/>
+                      </a:solidFill>
+                      <a:prstDash val="solid"/>
+                      <a:round/>
+                      <a:headEnd type="none" w="med" len="med"/>
+                      <a:tailEnd type="none" w="med" len="med"/>
+                    </a:lnB>
+                    <a:solidFill>
+                      <a:srgbClr val="1A1814"/>
+                    </a:solidFill>
+                  </a:tcPr>
+                </a:tc>
+                <a:tc>
+                  <a:txBody>
+                    <a:bodyPr/>
+                    <a:lstStyle/>
+                    <a:p>
+                      <a:pPr marL="0" indent="0" algn="l">
+                        <a:buNone/>
+                      </a:pPr>
+                      <a:r>
+                        <a:rPr lang="en-US" sz="1320" b="1" dirty="0">
+                          <a:solidFill>
+                            <a:srgbClr val="F4EFE6"/>
+                          </a:solidFill>
+                        </a:rPr>
+                        <a:t>Hasil · ROI</a:t>
+                      </a:r>
+                      <a:endParaRPr lang="en-US" sz="1320" dirty="0"/>
+                    </a:p>
+                  </a:txBody>
+                  <a:tcPr marL="101600" marR="101600" marT="25400" marB="25400">
+                    <a:lnL w="6350" cap="flat" cmpd="sng" algn="ctr">
+                      <a:solidFill>
+                        <a:srgbClr val="D9CFBF"/>
+                      </a:solidFill>
+                      <a:prstDash val="solid"/>
+                      <a:round/>
+                      <a:headEnd type="none" w="med" len="med"/>
+                      <a:tailEnd type="none" w="med" len="med"/>
+                    </a:lnL>
+                    <a:lnR w="6350" cap="flat" cmpd="sng" algn="ctr">
+                      <a:solidFill>
+                        <a:srgbClr val="D9CFBF"/>
+                      </a:solidFill>
+                      <a:prstDash val="solid"/>
+                      <a:round/>
+                      <a:headEnd type="none" w="med" len="med"/>
+                      <a:tailEnd type="none" w="med" len="med"/>
+                    </a:lnR>
+                    <a:lnT w="6350" cap="flat" cmpd="sng" algn="ctr">
+                      <a:solidFill>
+                        <a:srgbClr val="D9CFBF"/>
+                      </a:solidFill>
+                      <a:prstDash val="solid"/>
+                      <a:round/>
+                      <a:headEnd type="none" w="med" len="med"/>
+                      <a:tailEnd type="none" w="med" len="med"/>
+                    </a:lnT>
+                    <a:lnB w="6350" cap="flat" cmpd="sng" algn="ctr">
+                      <a:solidFill>
+                        <a:srgbClr val="D9CFBF"/>
+                      </a:solidFill>
+                      <a:prstDash val="solid"/>
+                      <a:round/>
+                      <a:headEnd type="none" w="med" len="med"/>
+                      <a:tailEnd type="none" w="med" len="med"/>
+                    </a:lnB>
+                    <a:solidFill>
+                      <a:srgbClr val="1A1814"/>
+                    </a:solidFill>
+                  </a:tcPr>
+                </a:tc>
+              </a:tr>
+              <a:tr h="548626">
+                <a:tc>
+                  <a:txBody>
+                    <a:bodyPr/>
+                    <a:lstStyle/>
+                    <a:p>
+                      <a:pPr marL="0" indent="0" algn="l">
+                        <a:buNone/>
+                      </a:pPr>
+                      <a:r>
+                        <a:rPr lang="en-US" sz="1320" dirty="0">
+                          <a:solidFill>
+                            <a:srgbClr val="1A1814"/>
+                          </a:solidFill>
+                        </a:rPr>
+                        <a:t>KOL Kuliner A (IG 85 rb) · Cafe</a:t>
+                      </a:r>
+                      <a:endParaRPr lang="en-US" sz="1320" dirty="0"/>
+                    </a:p>
+                  </a:txBody>
+                  <a:tcPr marL="101600" marR="101600" marT="25400" marB="25400">
+                    <a:lnL w="6350" cap="flat" cmpd="sng" algn="ctr">
+                      <a:solidFill>
+                        <a:srgbClr val="D9CFBF"/>
+                      </a:solidFill>
+                      <a:prstDash val="solid"/>
+                      <a:round/>
+                      <a:headEnd type="none" w="med" len="med"/>
+                      <a:tailEnd type="none" w="med" len="med"/>
+                    </a:lnL>
+                    <a:lnR w="6350" cap="flat" cmpd="sng" algn="ctr">
+                      <a:solidFill>
+                        <a:srgbClr val="D9CFBF"/>
+                      </a:solidFill>
+                      <a:prstDash val="solid"/>
+                      <a:round/>
+                      <a:headEnd type="none" w="med" len="med"/>
+                      <a:tailEnd type="none" w="med" len="med"/>
+                    </a:lnR>
+                    <a:lnT w="6350" cap="flat" cmpd="sng" algn="ctr">
+                      <a:solidFill>
+                        <a:srgbClr val="D9CFBF"/>
+                      </a:solidFill>
+                      <a:prstDash val="solid"/>
+                      <a:round/>
+                      <a:headEnd type="none" w="med" len="med"/>
+                      <a:tailEnd type="none" w="med" len="med"/>
+                    </a:lnT>
+                    <a:lnB w="6350" cap="flat" cmpd="sng" algn="ctr">
+                      <a:solidFill>
+                        <a:srgbClr val="D9CFBF"/>
+                      </a:solidFill>
+                      <a:prstDash val="solid"/>
+                      <a:round/>
+                      <a:headEnd type="none" w="med" len="med"/>
+                      <a:tailEnd type="none" w="med" len="med"/>
+                    </a:lnB>
+                    <a:solidFill>
+                      <a:srgbClr val="F4EFE6"/>
+                    </a:solidFill>
+                  </a:tcPr>
+                </a:tc>
+                <a:tc>
+                  <a:txBody>
+                    <a:bodyPr/>
+                    <a:lstStyle/>
+                    <a:p>
+                      <a:pPr marL="0" indent="0" algn="l">
+                        <a:buNone/>
+                      </a:pPr>
+                      <a:r>
+                        <a:rPr lang="en-US" sz="1320" dirty="0">
+                          <a:solidFill>
+                            <a:srgbClr val="1A1814"/>
+                          </a:solidFill>
+                        </a:rPr>
+                        <a:t>Rp1.500.000 · HUNI-A</a:t>
+                      </a:r>
+                      <a:endParaRPr lang="en-US" sz="1320" dirty="0"/>
+                    </a:p>
+                  </a:txBody>
+                  <a:tcPr marL="101600" marR="101600" marT="25400" marB="25400">
+                    <a:lnL w="6350" cap="flat" cmpd="sng" algn="ctr">
+                      <a:solidFill>
+                        <a:srgbClr val="D9CFBF"/>
+                      </a:solidFill>
+                      <a:prstDash val="solid"/>
+                      <a:round/>
+                      <a:headEnd type="none" w="med" len="med"/>
+                      <a:tailEnd type="none" w="med" len="med"/>
+                    </a:lnL>
+                    <a:lnR w="6350" cap="flat" cmpd="sng" algn="ctr">
+                      <a:solidFill>
+                        <a:srgbClr val="D9CFBF"/>
+                      </a:solidFill>
+                      <a:prstDash val="solid"/>
+                      <a:round/>
+                      <a:headEnd type="none" w="med" len="med"/>
+                      <a:tailEnd type="none" w="med" len="med"/>
+                    </a:lnR>
+                    <a:lnT w="6350" cap="flat" cmpd="sng" algn="ctr">
+                      <a:solidFill>
+                        <a:srgbClr val="D9CFBF"/>
+                      </a:solidFill>
+                      <a:prstDash val="solid"/>
+                      <a:round/>
+                      <a:headEnd type="none" w="med" len="med"/>
+                      <a:tailEnd type="none" w="med" len="med"/>
+                    </a:lnT>
+                    <a:lnB w="6350" cap="flat" cmpd="sng" algn="ctr">
+                      <a:solidFill>
+                        <a:srgbClr val="D9CFBF"/>
+                      </a:solidFill>
+                      <a:prstDash val="solid"/>
+                      <a:round/>
+                      <a:headEnd type="none" w="med" len="med"/>
+                      <a:tailEnd type="none" w="med" len="med"/>
+                    </a:lnB>
+                    <a:solidFill>
+                      <a:srgbClr val="F4EFE6"/>
+                    </a:solidFill>
+                  </a:tcPr>
+                </a:tc>
+                <a:tc>
+                  <a:txBody>
+                    <a:bodyPr/>
+                    <a:lstStyle/>
+                    <a:p>
+                      <a:pPr marL="0" indent="0" algn="l">
+                        <a:buNone/>
+                      </a:pPr>
+                      <a:r>
+                        <a:rPr lang="en-US" sz="1320" dirty="0">
+                          <a:solidFill>
+                            <a:srgbClr val="1A1814"/>
+                          </a:solidFill>
+                        </a:rPr>
+                        <a:t>120 redeem · Rp3.600.000 · 2,4x</a:t>
+                      </a:r>
+                      <a:endParaRPr lang="en-US" sz="1320" dirty="0"/>
+                    </a:p>
+                  </a:txBody>
+                  <a:tcPr marL="101600" marR="101600" marT="25400" marB="25400">
+                    <a:lnL w="6350" cap="flat" cmpd="sng" algn="ctr">
+                      <a:solidFill>
+                        <a:srgbClr val="D9CFBF"/>
+                      </a:solidFill>
+                      <a:prstDash val="solid"/>
+                      <a:round/>
+                      <a:headEnd type="none" w="med" len="med"/>
+                      <a:tailEnd type="none" w="med" len="med"/>
+                    </a:lnL>
+                    <a:lnR w="6350" cap="flat" cmpd="sng" algn="ctr">
+                      <a:solidFill>
+                        <a:srgbClr val="D9CFBF"/>
+                      </a:solidFill>
+                      <a:prstDash val="solid"/>
+                      <a:round/>
+                      <a:headEnd type="none" w="med" len="med"/>
+                      <a:tailEnd type="none" w="med" len="med"/>
+                    </a:lnR>
+                    <a:lnT w="6350" cap="flat" cmpd="sng" algn="ctr">
+                      <a:solidFill>
+                        <a:srgbClr val="D9CFBF"/>
+                      </a:solidFill>
+                      <a:prstDash val="solid"/>
+                      <a:round/>
+                      <a:headEnd type="none" w="med" len="med"/>
+                      <a:tailEnd type="none" w="med" len="med"/>
+                    </a:lnT>
+                    <a:lnB w="6350" cap="flat" cmpd="sng" algn="ctr">
+                      <a:solidFill>
+                        <a:srgbClr val="D9CFBF"/>
+                      </a:solidFill>
+                      <a:prstDash val="solid"/>
+                      <a:round/>
+                      <a:headEnd type="none" w="med" len="med"/>
+                      <a:tailEnd type="none" w="med" len="med"/>
+                    </a:lnB>
+                    <a:solidFill>
+                      <a:srgbClr val="F4EFE6"/>
+                    </a:solidFill>
+                  </a:tcPr>
+                </a:tc>
+              </a:tr>
+              <a:tr h="548626">
+                <a:tc>
+                  <a:txBody>
+                    <a:bodyPr/>
+                    <a:lstStyle/>
+                    <a:p>
+                      <a:pPr marL="0" indent="0" algn="l">
+                        <a:buNone/>
+                      </a:pPr>
+                      <a:r>
+                        <a:rPr lang="en-US" sz="1320" dirty="0">
+                          <a:solidFill>
+                            <a:srgbClr val="1A1814"/>
+                          </a:solidFill>
+                        </a:rPr>
+                        <a:t>Influencer Futsal B (TikTok 120 rb) · Futsal</a:t>
+                      </a:r>
+                      <a:endParaRPr lang="en-US" sz="1320" dirty="0"/>
+                    </a:p>
+                  </a:txBody>
+                  <a:tcPr marL="101600" marR="101600" marT="25400" marB="25400">
+                    <a:lnL w="6350" cap="flat" cmpd="sng" algn="ctr">
+                      <a:solidFill>
+                        <a:srgbClr val="D9CFBF"/>
+                      </a:solidFill>
+                      <a:prstDash val="solid"/>
+                      <a:round/>
+                      <a:headEnd type="none" w="med" len="med"/>
+                      <a:tailEnd type="none" w="med" len="med"/>
+                    </a:lnL>
+                    <a:lnR w="6350" cap="flat" cmpd="sng" algn="ctr">
+                      <a:solidFill>
+                        <a:srgbClr val="D9CFBF"/>
+                      </a:solidFill>
+                      <a:prstDash val="solid"/>
+                      <a:round/>
+                      <a:headEnd type="none" w="med" len="med"/>
+                      <a:tailEnd type="none" w="med" len="med"/>
+                    </a:lnR>
+                    <a:lnT w="6350" cap="flat" cmpd="sng" algn="ctr">
+                      <a:solidFill>
+                        <a:srgbClr val="D9CFBF"/>
+                      </a:solidFill>
+                      <a:prstDash val="solid"/>
+                      <a:round/>
+                      <a:headEnd type="none" w="med" len="med"/>
+                      <a:tailEnd type="none" w="med" len="med"/>
+                    </a:lnT>
+                    <a:lnB w="6350" cap="flat" cmpd="sng" algn="ctr">
+                      <a:solidFill>
+                        <a:srgbClr val="D9CFBF"/>
+                      </a:solidFill>
+                      <a:prstDash val="solid"/>
+                      <a:round/>
+                      <a:headEnd type="none" w="med" len="med"/>
+                      <a:tailEnd type="none" w="med" len="med"/>
+                    </a:lnB>
+                    <a:solidFill>
+                      <a:srgbClr val="FBF8F3"/>
+                    </a:solidFill>
+                  </a:tcPr>
+                </a:tc>
+                <a:tc>
+                  <a:txBody>
+                    <a:bodyPr/>
+                    <a:lstStyle/>
+                    <a:p>
+                      <a:pPr marL="0" indent="0" algn="l">
+                        <a:buNone/>
+                      </a:pPr>
+                      <a:r>
+                        <a:rPr lang="en-US" sz="1320" dirty="0">
+                          <a:solidFill>
+                            <a:srgbClr val="1A1814"/>
+                          </a:solidFill>
+                        </a:rPr>
+                        <a:t>Rp2.000.000 · FUTSAL-B</a:t>
+                      </a:r>
+                      <a:endParaRPr lang="en-US" sz="1320" dirty="0"/>
+                    </a:p>
+                  </a:txBody>
+                  <a:tcPr marL="101600" marR="101600" marT="25400" marB="25400">
+                    <a:lnL w="6350" cap="flat" cmpd="sng" algn="ctr">
+                      <a:solidFill>
+                        <a:srgbClr val="D9CFBF"/>
+                      </a:solidFill>
+                      <a:prstDash val="solid"/>
+                      <a:round/>
+                      <a:headEnd type="none" w="med" len="med"/>
+                      <a:tailEnd type="none" w="med" len="med"/>
+                    </a:lnL>
+                    <a:lnR w="6350" cap="flat" cmpd="sng" algn="ctr">
+                      <a:solidFill>
+                        <a:srgbClr val="D9CFBF"/>
+                      </a:solidFill>
+                      <a:prstDash val="solid"/>
+                      <a:round/>
+                      <a:headEnd type="none" w="med" len="med"/>
+                      <a:tailEnd type="none" w="med" len="med"/>
+                    </a:lnR>
+                    <a:lnT w="6350" cap="flat" cmpd="sng" algn="ctr">
+                      <a:solidFill>
+                        <a:srgbClr val="D9CFBF"/>
+                      </a:solidFill>
+                      <a:prstDash val="solid"/>
+                      <a:round/>
+                      <a:headEnd type="none" w="med" len="med"/>
+                      <a:tailEnd type="none" w="med" len="med"/>
+                    </a:lnT>
+                    <a:lnB w="6350" cap="flat" cmpd="sng" algn="ctr">
+                      <a:solidFill>
+                        <a:srgbClr val="D9CFBF"/>
+                      </a:solidFill>
+                      <a:prstDash val="solid"/>
+                      <a:round/>
+                      <a:headEnd type="none" w="med" len="med"/>
+                      <a:tailEnd type="none" w="med" len="med"/>
+                    </a:lnB>
+                    <a:solidFill>
+                      <a:srgbClr val="FBF8F3"/>
+                    </a:solidFill>
+                  </a:tcPr>
+                </a:tc>
+                <a:tc>
+                  <a:txBody>
+                    <a:bodyPr/>
+                    <a:lstStyle/>
+                    <a:p>
+                      <a:pPr marL="0" indent="0" algn="l">
+                        <a:buNone/>
+                      </a:pPr>
+                      <a:r>
+                        <a:rPr lang="en-US" sz="1320" dirty="0">
+                          <a:solidFill>
+                            <a:srgbClr val="1A1814"/>
+                          </a:solidFill>
+                        </a:rPr>
+                        <a:t>45 redeem · Rp5.400.000 · 2,7x</a:t>
+                      </a:r>
+                      <a:endParaRPr lang="en-US" sz="1320" dirty="0"/>
+                    </a:p>
+                  </a:txBody>
+                  <a:tcPr marL="101600" marR="101600" marT="25400" marB="25400">
+                    <a:lnL w="6350" cap="flat" cmpd="sng" algn="ctr">
+                      <a:solidFill>
+                        <a:srgbClr val="D9CFBF"/>
+                      </a:solidFill>
+                      <a:prstDash val="solid"/>
+                      <a:round/>
+                      <a:headEnd type="none" w="med" len="med"/>
+                      <a:tailEnd type="none" w="med" len="med"/>
+                    </a:lnL>
+                    <a:lnR w="6350" cap="flat" cmpd="sng" algn="ctr">
+                      <a:solidFill>
+                        <a:srgbClr val="D9CFBF"/>
+                      </a:solidFill>
+                      <a:prstDash val="solid"/>
+                      <a:round/>
+                      <a:headEnd type="none" w="med" len="med"/>
+                      <a:tailEnd type="none" w="med" len="med"/>
+                    </a:lnR>
+                    <a:lnT w="6350" cap="flat" cmpd="sng" algn="ctr">
+                      <a:solidFill>
+                        <a:srgbClr val="D9CFBF"/>
+                      </a:solidFill>
+                      <a:prstDash val="solid"/>
+                      <a:round/>
+                      <a:headEnd type="none" w="med" len="med"/>
+                      <a:tailEnd type="none" w="med" len="med"/>
+                    </a:lnT>
+                    <a:lnB w="6350" cap="flat" cmpd="sng" algn="ctr">
+                      <a:solidFill>
+                        <a:srgbClr val="D9CFBF"/>
+                      </a:solidFill>
+                      <a:prstDash val="solid"/>
+                      <a:round/>
+                      <a:headEnd type="none" w="med" len="med"/>
+                      <a:tailEnd type="none" w="med" len="med"/>
+                    </a:lnB>
+                    <a:solidFill>
+                      <a:srgbClr val="FBF8F3"/>
+                    </a:solidFill>
+                  </a:tcPr>
+                </a:tc>
+              </a:tr>
+              <a:tr h="548626">
+                <a:tc>
+                  <a:txBody>
+                    <a:bodyPr/>
+                    <a:lstStyle/>
+                    <a:p>
+                      <a:pPr marL="0" indent="0" algn="l">
+                        <a:buNone/>
+                      </a:pPr>
+                      <a:r>
+                        <a:rPr lang="en-US" sz="1320" dirty="0">
+                          <a:solidFill>
+                            <a:srgbClr val="1A1814"/>
+                          </a:solidFill>
+                        </a:rPr>
+                        <a:t>Mikro-influencer Kos C (IG 30 rb) · Kos</a:t>
+                      </a:r>
+                      <a:endParaRPr lang="en-US" sz="1320" dirty="0"/>
+                    </a:p>
+                  </a:txBody>
+                  <a:tcPr marL="101600" marR="101600" marT="25400" marB="25400">
+                    <a:lnL w="6350" cap="flat" cmpd="sng" algn="ctr">
+                      <a:solidFill>
+                        <a:srgbClr val="D9CFBF"/>
+                      </a:solidFill>
+                      <a:prstDash val="solid"/>
+                      <a:round/>
+                      <a:headEnd type="none" w="med" len="med"/>
+                      <a:tailEnd type="none" w="med" len="med"/>
+                    </a:lnL>
+                    <a:lnR w="6350" cap="flat" cmpd="sng" algn="ctr">
+                      <a:solidFill>
+                        <a:srgbClr val="D9CFBF"/>
+                      </a:solidFill>
+                      <a:prstDash val="solid"/>
+                      <a:round/>
+                      <a:headEnd type="none" w="med" len="med"/>
+                      <a:tailEnd type="none" w="med" len="med"/>
+                    </a:lnR>
+                    <a:lnT w="6350" cap="flat" cmpd="sng" algn="ctr">
+                      <a:solidFill>
+                        <a:srgbClr val="D9CFBF"/>
+                      </a:solidFill>
+                      <a:prstDash val="solid"/>
+                      <a:round/>
+                      <a:headEnd type="none" w="med" len="med"/>
+                      <a:tailEnd type="none" w="med" len="med"/>
+                    </a:lnT>
+                    <a:lnB w="6350" cap="flat" cmpd="sng" algn="ctr">
+                      <a:solidFill>
+                        <a:srgbClr val="D9CFBF"/>
+                      </a:solidFill>
+                      <a:prstDash val="solid"/>
+                      <a:round/>
+                      <a:headEnd type="none" w="med" len="med"/>
+                      <a:tailEnd type="none" w="med" len="med"/>
+                    </a:lnB>
+                    <a:solidFill>
+                      <a:srgbClr val="F4EFE6"/>
+                    </a:solidFill>
+                  </a:tcPr>
+                </a:tc>
+                <a:tc>
+                  <a:txBody>
+                    <a:bodyPr/>
+                    <a:lstStyle/>
+                    <a:p>
+                      <a:pPr marL="0" indent="0" algn="l">
+                        <a:buNone/>
+                      </a:pPr>
+                      <a:r>
+                        <a:rPr lang="en-US" sz="1320" dirty="0">
+                          <a:solidFill>
+                            <a:srgbClr val="1A1814"/>
+                          </a:solidFill>
+                        </a:rPr>
+                        <a:t>Rp800.000 · KOS-C</a:t>
+                      </a:r>
+                      <a:endParaRPr lang="en-US" sz="1320" dirty="0"/>
+                    </a:p>
+                  </a:txBody>
+                  <a:tcPr marL="101600" marR="101600" marT="25400" marB="25400">
+                    <a:lnL w="6350" cap="flat" cmpd="sng" algn="ctr">
+                      <a:solidFill>
+                        <a:srgbClr val="D9CFBF"/>
+                      </a:solidFill>
+                      <a:prstDash val="solid"/>
+                      <a:round/>
+                      <a:headEnd type="none" w="med" len="med"/>
+                      <a:tailEnd type="none" w="med" len="med"/>
+                    </a:lnL>
+                    <a:lnR w="6350" cap="flat" cmpd="sng" algn="ctr">
+                      <a:solidFill>
+                        <a:srgbClr val="D9CFBF"/>
+                      </a:solidFill>
+                      <a:prstDash val="solid"/>
+                      <a:round/>
+                      <a:headEnd type="none" w="med" len="med"/>
+                      <a:tailEnd type="none" w="med" len="med"/>
+                    </a:lnR>
+                    <a:lnT w="6350" cap="flat" cmpd="sng" algn="ctr">
+                      <a:solidFill>
+                        <a:srgbClr val="D9CFBF"/>
+                      </a:solidFill>
+                      <a:prstDash val="solid"/>
+                      <a:round/>
+                      <a:headEnd type="none" w="med" len="med"/>
+                      <a:tailEnd type="none" w="med" len="med"/>
+                    </a:lnT>
+                    <a:lnB w="6350" cap="flat" cmpd="sng" algn="ctr">
+                      <a:solidFill>
+                        <a:srgbClr val="D9CFBF"/>
+                      </a:solidFill>
+                      <a:prstDash val="solid"/>
+                      <a:round/>
+                      <a:headEnd type="none" w="med" len="med"/>
+                      <a:tailEnd type="none" w="med" len="med"/>
+                    </a:lnB>
+                    <a:solidFill>
+                      <a:srgbClr val="F4EFE6"/>
+                    </a:solidFill>
+                  </a:tcPr>
+                </a:tc>
+                <a:tc>
+                  <a:txBody>
+                    <a:bodyPr/>
+                    <a:lstStyle/>
+                    <a:p>
+                      <a:pPr marL="0" indent="0" algn="l">
+                        <a:buNone/>
+                      </a:pPr>
+                      <a:r>
+                        <a:rPr lang="en-US" sz="1320" dirty="0">
+                          <a:solidFill>
+                            <a:srgbClr val="1A1814"/>
+                          </a:solidFill>
+                        </a:rPr>
+                        <a:t>3 redeem · Rp6.900.000 · 8,6x</a:t>
+                      </a:r>
+                      <a:endParaRPr lang="en-US" sz="1320" dirty="0"/>
+                    </a:p>
+                  </a:txBody>
+                  <a:tcPr marL="101600" marR="101600" marT="25400" marB="25400">
+                    <a:lnL w="6350" cap="flat" cmpd="sng" algn="ctr">
+                      <a:solidFill>
+                        <a:srgbClr val="D9CFBF"/>
+                      </a:solidFill>
+                      <a:prstDash val="solid"/>
+                      <a:round/>
+                      <a:headEnd type="none" w="med" len="med"/>
+                      <a:tailEnd type="none" w="med" len="med"/>
+                    </a:lnL>
+                    <a:lnR w="6350" cap="flat" cmpd="sng" algn="ctr">
+                      <a:solidFill>
+                        <a:srgbClr val="D9CFBF"/>
+                      </a:solidFill>
+                      <a:prstDash val="solid"/>
+                      <a:round/>
+                      <a:headEnd type="none" w="med" len="med"/>
+                      <a:tailEnd type="none" w="med" len="med"/>
+                    </a:lnR>
+                    <a:lnT w="6350" cap="flat" cmpd="sng" algn="ctr">
+                      <a:solidFill>
+                        <a:srgbClr val="D9CFBF"/>
+                      </a:solidFill>
+                      <a:prstDash val="solid"/>
+                      <a:round/>
+                      <a:headEnd type="none" w="med" len="med"/>
+                      <a:tailEnd type="none" w="med" len="med"/>
+                    </a:lnT>
+                    <a:lnB w="6350" cap="flat" cmpd="sng" algn="ctr">
+                      <a:solidFill>
+                        <a:srgbClr val="D9CFBF"/>
+                      </a:solidFill>
+                      <a:prstDash val="solid"/>
+                      <a:round/>
+                      <a:headEnd type="none" w="med" len="med"/>
+                      <a:tailEnd type="none" w="med" len="med"/>
+                    </a:lnB>
+                    <a:solidFill>
+                      <a:srgbClr val="F4EFE6"/>
+                    </a:solidFill>
+                  </a:tcPr>
+                </a:tc>
+              </a:tr>
+            </a:tbl>
+          </a:graphicData>
+        </a:graphic>
+      </p:graphicFrame>
+      <p:sp>
+        <p:nvSpPr>
+          <p:cNvPr id="10" name="Text 7"/>
+          <p:cNvSpPr/>
+          <p:nvPr/>
+        </p:nvSpPr>
+        <p:spPr>
+          <a:xfrm>
+            <a:off x="426709" y="5852160"/>
+            <a:ext cx="11338277" cy="487668"/>
+          </a:xfrm>
+          <a:prstGeom prst="rect">
+            <a:avLst/>
+          </a:prstGeom>
+          <a:noFill/>
+        </p:spPr>
+        <p:txBody>
+          <a:bodyPr wrap="square" lIns="0" tIns="0" rIns="0" bIns="0" rtlCol="0" anchor="ctr"/>
+          <a:lstStyle/>
+          <a:p>
+            <a:pPr marL="0" indent="0">
+              <a:buNone/>
+            </a:pPr>
+            <a:r>
+              <a:rPr lang="en-US" sz="1680" b="1" dirty="0">
+                <a:solidFill>
+                  <a:srgbClr val="2F5D50"/>
+                </a:solidFill>
+                <a:latin typeface="Calibri" panose="020F0502020204030204" pitchFamily="34" charset="0"/>
+                <a:ea typeface="Calibri" panose="020F0502020204030204" pitchFamily="34" charset="-122"/>
+                <a:cs typeface="Calibri" panose="020F0502020204030204" pitchFamily="34" charset="-120"/>
+              </a:rPr>
+              <a:t>Angka contoh. Redeem tercatat di dashboard dan dibandingkan dengan fee tiap KOL.</a:t>
+            </a:r>
+            <a:endParaRPr lang="en-US" sz="1680" dirty="0"/>
           </a:p>
         </p:txBody>
       </p:sp>
@@ -29400,6 +35134,10 @@
             <a:srgbClr val="F4EFE6"/>
           </a:solidFill>
         </p:spPr>
+        <p:txBody>
+          <a:bodyPr/>
+          <a:p/>
+        </p:txBody>
       </p:sp>
       <p:sp>
         <p:nvSpPr>
@@ -29419,6 +35157,10 @@
             <a:srgbClr val="C4622D"/>
           </a:solidFill>
         </p:spPr>
+        <p:txBody>
+          <a:bodyPr/>
+          <a:p/>
+        </p:txBody>
       </p:sp>
       <p:sp>
         <p:nvSpPr>
@@ -29438,6 +35180,10 @@
             <a:srgbClr val="1A1814"/>
           </a:solidFill>
         </p:spPr>
+        <p:txBody>
+          <a:bodyPr/>
+          <a:p/>
+        </p:txBody>
       </p:sp>
       <p:sp>
         <p:nvSpPr>
@@ -29509,7 +35255,7 @@
                 <a:ea typeface="Calibri" panose="020F0502020204030204" pitchFamily="34" charset="-122"/>
                 <a:cs typeface="Calibri" panose="020F0502020204030204" pitchFamily="34" charset="-120"/>
               </a:rPr>
-              <a:t>04  /  28</a:t>
+              <a:t>04  /  33</a:t>
             </a:r>
             <a:endParaRPr lang="en-US" sz="1100" dirty="0"/>
           </a:p>
@@ -29579,6 +35325,10 @@
             <a:prstDash val="solid"/>
           </a:ln>
         </p:spPr>
+        <p:txBody>
+          <a:bodyPr/>
+          <a:p/>
+        </p:txBody>
       </p:sp>
       <p:sp>
         <p:nvSpPr>
@@ -29606,6 +35356,10 @@
             <a:prstDash val="solid"/>
           </a:ln>
         </p:spPr>
+        <p:txBody>
+          <a:bodyPr/>
+          <a:p/>
+        </p:txBody>
       </p:sp>
       <p:sp>
         <p:nvSpPr>
@@ -30106,6 +35860,10 @@
             <a:srgbClr val="F4EFE6"/>
           </a:solidFill>
         </p:spPr>
+        <p:txBody>
+          <a:bodyPr/>
+          <a:p/>
+        </p:txBody>
       </p:sp>
       <p:sp>
         <p:nvSpPr>
@@ -30125,6 +35883,10 @@
             <a:srgbClr val="C4622D"/>
           </a:solidFill>
         </p:spPr>
+        <p:txBody>
+          <a:bodyPr/>
+          <a:p/>
+        </p:txBody>
       </p:sp>
       <p:sp>
         <p:nvSpPr>
@@ -30144,6 +35906,10 @@
             <a:srgbClr val="1A1814"/>
           </a:solidFill>
         </p:spPr>
+        <p:txBody>
+          <a:bodyPr/>
+          <a:p/>
+        </p:txBody>
       </p:sp>
       <p:sp>
         <p:nvSpPr>
@@ -30215,7 +35981,7 @@
                 <a:ea typeface="Calibri" panose="020F0502020204030204" pitchFamily="34" charset="-122"/>
                 <a:cs typeface="Calibri" panose="020F0502020204030204" pitchFamily="34" charset="-120"/>
               </a:rPr>
-              <a:t>05  /  28</a:t>
+              <a:t>05  /  33</a:t>
             </a:r>
             <a:endParaRPr lang="en-US" sz="1100" dirty="0"/>
           </a:p>
@@ -30630,6 +36396,10 @@
             <a:srgbClr val="F4EFE6"/>
           </a:solidFill>
         </p:spPr>
+        <p:txBody>
+          <a:bodyPr/>
+          <a:p/>
+        </p:txBody>
       </p:sp>
       <p:sp>
         <p:nvSpPr>
@@ -30649,6 +36419,10 @@
             <a:srgbClr val="C4622D"/>
           </a:solidFill>
         </p:spPr>
+        <p:txBody>
+          <a:bodyPr/>
+          <a:p/>
+        </p:txBody>
       </p:sp>
       <p:sp>
         <p:nvSpPr>
@@ -30668,6 +36442,10 @@
             <a:srgbClr val="1A1814"/>
           </a:solidFill>
         </p:spPr>
+        <p:txBody>
+          <a:bodyPr/>
+          <a:p/>
+        </p:txBody>
       </p:sp>
       <p:sp>
         <p:nvSpPr>
@@ -30739,7 +36517,7 @@
                 <a:ea typeface="Calibri" panose="020F0502020204030204" pitchFamily="34" charset="-122"/>
                 <a:cs typeface="Calibri" panose="020F0502020204030204" pitchFamily="34" charset="-120"/>
               </a:rPr>
-              <a:t>06  /  28</a:t>
+              <a:t>06  /  33</a:t>
             </a:r>
             <a:endParaRPr lang="en-US" sz="1100" dirty="0"/>
           </a:p>
@@ -31154,6 +36932,10 @@
             <a:srgbClr val="F4EFE6"/>
           </a:solidFill>
         </p:spPr>
+        <p:txBody>
+          <a:bodyPr/>
+          <a:p/>
+        </p:txBody>
       </p:sp>
       <p:sp>
         <p:nvSpPr>
@@ -31173,6 +36955,10 @@
             <a:srgbClr val="C4622D"/>
           </a:solidFill>
         </p:spPr>
+        <p:txBody>
+          <a:bodyPr/>
+          <a:p/>
+        </p:txBody>
       </p:sp>
       <p:sp>
         <p:nvSpPr>
@@ -31192,6 +36978,10 @@
             <a:srgbClr val="1A1814"/>
           </a:solidFill>
         </p:spPr>
+        <p:txBody>
+          <a:bodyPr/>
+          <a:p/>
+        </p:txBody>
       </p:sp>
       <p:sp>
         <p:nvSpPr>
@@ -31263,7 +37053,7 @@
                 <a:ea typeface="Calibri" panose="020F0502020204030204" pitchFamily="34" charset="-122"/>
                 <a:cs typeface="Calibri" panose="020F0502020204030204" pitchFamily="34" charset="-120"/>
               </a:rPr>
-              <a:t>07  /  28</a:t>
+              <a:t>07  /  33</a:t>
             </a:r>
             <a:endParaRPr lang="en-US" sz="1100" dirty="0"/>
           </a:p>
@@ -31678,6 +37468,10 @@
             <a:srgbClr val="F4EFE6"/>
           </a:solidFill>
         </p:spPr>
+        <p:txBody>
+          <a:bodyPr/>
+          <a:p/>
+        </p:txBody>
       </p:sp>
       <p:sp>
         <p:nvSpPr>
@@ -31697,6 +37491,10 @@
             <a:srgbClr val="C4622D"/>
           </a:solidFill>
         </p:spPr>
+        <p:txBody>
+          <a:bodyPr/>
+          <a:p/>
+        </p:txBody>
       </p:sp>
       <p:sp>
         <p:nvSpPr>
@@ -31716,6 +37514,10 @@
             <a:srgbClr val="1A1814"/>
           </a:solidFill>
         </p:spPr>
+        <p:txBody>
+          <a:bodyPr/>
+          <a:p/>
+        </p:txBody>
       </p:sp>
       <p:sp>
         <p:nvSpPr>
@@ -31787,7 +37589,7 @@
                 <a:ea typeface="Calibri" panose="020F0502020204030204" pitchFamily="34" charset="-122"/>
                 <a:cs typeface="Calibri" panose="020F0502020204030204" pitchFamily="34" charset="-120"/>
               </a:rPr>
-              <a:t>08  /  28</a:t>
+              <a:t>08  /  33</a:t>
             </a:r>
             <a:endParaRPr lang="en-US" sz="1100" dirty="0"/>
           </a:p>
@@ -32202,6 +38004,10 @@
             <a:srgbClr val="F4EFE6"/>
           </a:solidFill>
         </p:spPr>
+        <p:txBody>
+          <a:bodyPr/>
+          <a:p/>
+        </p:txBody>
       </p:sp>
       <p:sp>
         <p:nvSpPr>
@@ -32221,6 +38027,10 @@
             <a:srgbClr val="C4622D"/>
           </a:solidFill>
         </p:spPr>
+        <p:txBody>
+          <a:bodyPr/>
+          <a:p/>
+        </p:txBody>
       </p:sp>
       <p:sp>
         <p:nvSpPr>
@@ -32240,6 +38050,10 @@
             <a:srgbClr val="1A1814"/>
           </a:solidFill>
         </p:spPr>
+        <p:txBody>
+          <a:bodyPr/>
+          <a:p/>
+        </p:txBody>
       </p:sp>
       <p:sp>
         <p:nvSpPr>
@@ -32311,7 +38125,7 @@
                 <a:ea typeface="Calibri" panose="020F0502020204030204" pitchFamily="34" charset="-122"/>
                 <a:cs typeface="Calibri" panose="020F0502020204030204" pitchFamily="34" charset="-120"/>
               </a:rPr>
-              <a:t>09  /  28</a:t>
+              <a:t>09  /  33</a:t>
             </a:r>
             <a:endParaRPr lang="en-US" sz="1100" dirty="0"/>
           </a:p>
@@ -32497,6 +38311,10 @@
             <a:srgbClr val="F4EFE6"/>
           </a:solidFill>
         </p:spPr>
+        <p:txBody>
+          <a:bodyPr/>
+          <a:p/>
+        </p:txBody>
       </p:sp>
       <p:sp>
         <p:nvSpPr>

--- a/public/pitch/HUNI-Pitch-Deck-Lengkap.pptx
+++ b/public/pitch/HUNI-Pitch-Deck-Lengkap.pptx
@@ -27,9 +27,12 @@
     <p:sldId id="271" r:id="rId20"/>
     <p:sldId id="272" r:id="rId21"/>
     <p:sldId id="286" r:id="rId37"/>
+    <p:sldId id="290" r:id="rId41"/>
     <p:sldId id="287" r:id="rId38"/>
+    <p:sldId id="291" r:id="rId42"/>
     <p:sldId id="288" r:id="rId39"/>
     <p:sldId id="289" r:id="rId40"/>
+    <p:sldId id="292" r:id="rId43"/>
     <p:sldId id="273" r:id="rId22"/>
     <p:sldId id="274" r:id="rId23"/>
     <p:sldId id="275" r:id="rId24"/>
@@ -5007,7 +5010,7 @@
                 <a:ea typeface="Calibri" panose="020F0502020204030204" pitchFamily="34" charset="-122"/>
                 <a:cs typeface="Calibri" panose="020F0502020204030204" pitchFamily="34" charset="-120"/>
               </a:rPr>
-              <a:t>10  /  33</a:t>
+              <a:t>10  /  36</a:t>
             </a:r>
             <a:endParaRPr lang="en-US" sz="1100" dirty="0"/>
           </a:p>
@@ -5999,7 +6002,7 @@
                 <a:ea typeface="Calibri" panose="020F0502020204030204" pitchFamily="34" charset="-122"/>
                 <a:cs typeface="Calibri" panose="020F0502020204030204" pitchFamily="34" charset="-120"/>
               </a:rPr>
-              <a:t>11  /  33</a:t>
+              <a:t>11  /  36</a:t>
             </a:r>
             <a:endParaRPr lang="en-US" sz="1100" dirty="0"/>
           </a:p>
@@ -6769,7 +6772,7 @@
                 <a:ea typeface="Calibri" panose="020F0502020204030204" pitchFamily="34" charset="-122"/>
                 <a:cs typeface="Calibri" panose="020F0502020204030204" pitchFamily="34" charset="-120"/>
               </a:rPr>
-              <a:t>12  /  33</a:t>
+              <a:t>12  /  36</a:t>
             </a:r>
             <a:endParaRPr lang="en-US" sz="1100" dirty="0"/>
           </a:p>
@@ -8493,7 +8496,7 @@
                 <a:ea typeface="Calibri" panose="020F0502020204030204" pitchFamily="34" charset="-122"/>
                 <a:cs typeface="Calibri" panose="020F0502020204030204" pitchFamily="34" charset="-120"/>
               </a:rPr>
-              <a:t>13  /  33</a:t>
+              <a:t>13  /  36</a:t>
             </a:r>
             <a:endParaRPr lang="en-US" sz="1100" dirty="0"/>
           </a:p>
@@ -9912,7 +9915,7 @@
                 <a:ea typeface="Calibri" panose="020F0502020204030204" pitchFamily="34" charset="-122"/>
                 <a:cs typeface="Calibri" panose="020F0502020204030204" pitchFamily="34" charset="-120"/>
               </a:rPr>
-              <a:t>14  /  33</a:t>
+              <a:t>14  /  36</a:t>
             </a:r>
             <a:endParaRPr lang="en-US" sz="1100" dirty="0"/>
           </a:p>
@@ -11234,7 +11237,7 @@
                 <a:ea typeface="Calibri" panose="020F0502020204030204" pitchFamily="34" charset="-122"/>
                 <a:cs typeface="Calibri" panose="020F0502020204030204" pitchFamily="34" charset="-120"/>
               </a:rPr>
-              <a:t>15  /  33</a:t>
+              <a:t>15  /  36</a:t>
             </a:r>
             <a:endParaRPr lang="en-US" sz="1100" dirty="0"/>
           </a:p>
@@ -12248,7 +12251,7 @@
                 <a:ea typeface="Calibri" panose="020F0502020204030204" pitchFamily="34" charset="-122"/>
                 <a:cs typeface="Calibri" panose="020F0502020204030204" pitchFamily="34" charset="-120"/>
               </a:rPr>
-              <a:t>16  /  33</a:t>
+              <a:t>16  /  36</a:t>
             </a:r>
             <a:endParaRPr lang="en-US" sz="1100" dirty="0"/>
           </a:p>
@@ -13712,7 +13715,7 @@
                 <a:ea typeface="Calibri" panose="020F0502020204030204" pitchFamily="34" charset="-122"/>
                 <a:cs typeface="Calibri" panose="020F0502020204030204" pitchFamily="34" charset="-120"/>
               </a:rPr>
-              <a:t>17  /  33</a:t>
+              <a:t>17  /  36</a:t>
             </a:r>
             <a:endParaRPr lang="en-US" sz="1100" dirty="0"/>
           </a:p>
@@ -14646,7 +14649,7 @@
                 <a:ea typeface="Calibri" panose="020F0502020204030204" pitchFamily="34" charset="-122"/>
                 <a:cs typeface="Calibri" panose="020F0502020204030204" pitchFamily="34" charset="-120"/>
               </a:rPr>
-              <a:t>23  /  33</a:t>
+              <a:t>26  /  36</a:t>
             </a:r>
             <a:endParaRPr lang="en-US" sz="1100" dirty="0"/>
           </a:p>
@@ -16459,7 +16462,7 @@
                 <a:ea typeface="Calibri" panose="020F0502020204030204" pitchFamily="34" charset="-122"/>
                 <a:cs typeface="Calibri" panose="020F0502020204030204" pitchFamily="34" charset="-120"/>
               </a:rPr>
-              <a:t>02  /  33</a:t>
+              <a:t>02  /  36</a:t>
             </a:r>
             <a:endParaRPr lang="en-US" sz="1100" dirty="0"/>
           </a:p>
@@ -17285,7 +17288,7 @@
                 <a:ea typeface="Calibri" panose="020F0502020204030204" pitchFamily="34" charset="-122"/>
                 <a:cs typeface="Calibri" panose="020F0502020204030204" pitchFamily="34" charset="-120"/>
               </a:rPr>
-              <a:t>24  /  33</a:t>
+              <a:t>27  /  36</a:t>
             </a:r>
             <a:endParaRPr lang="en-US" sz="1100" dirty="0"/>
           </a:p>
@@ -19049,7 +19052,7 @@
                 <a:ea typeface="Calibri" panose="020F0502020204030204" pitchFamily="34" charset="-122"/>
                 <a:cs typeface="Calibri" panose="020F0502020204030204" pitchFamily="34" charset="-120"/>
               </a:rPr>
-              <a:t>25  /  33</a:t>
+              <a:t>28  /  36</a:t>
             </a:r>
             <a:endParaRPr lang="en-US" sz="1100" dirty="0"/>
           </a:p>
@@ -19637,7 +19640,7 @@
                 <a:ea typeface="Calibri" panose="020F0502020204030204" pitchFamily="34" charset="-122"/>
                 <a:cs typeface="Calibri" panose="020F0502020204030204" pitchFamily="34" charset="-120"/>
               </a:rPr>
-              <a:t>26  /  33</a:t>
+              <a:t>29  /  36</a:t>
             </a:r>
             <a:endParaRPr lang="en-US" sz="1100" dirty="0"/>
           </a:p>
@@ -20207,7 +20210,7 @@
                 <a:ea typeface="Calibri" panose="020F0502020204030204" pitchFamily="34" charset="-122"/>
                 <a:cs typeface="Calibri" panose="020F0502020204030204" pitchFamily="34" charset="-120"/>
               </a:rPr>
-              <a:t>27  /  33</a:t>
+              <a:t>30  /  36</a:t>
             </a:r>
             <a:endParaRPr lang="en-US" sz="1100" dirty="0"/>
           </a:p>
@@ -21626,7 +21629,7 @@
                 <a:ea typeface="Calibri" panose="020F0502020204030204" pitchFamily="34" charset="-122"/>
                 <a:cs typeface="Calibri" panose="020F0502020204030204" pitchFamily="34" charset="-120"/>
               </a:rPr>
-              <a:t>28  /  33</a:t>
+              <a:t>31  /  36</a:t>
             </a:r>
             <a:endParaRPr lang="en-US" sz="1100" dirty="0"/>
           </a:p>
@@ -23390,7 +23393,7 @@
                 <a:ea typeface="Calibri" panose="020F0502020204030204" pitchFamily="34" charset="-122"/>
                 <a:cs typeface="Calibri" panose="020F0502020204030204" pitchFamily="34" charset="-120"/>
               </a:rPr>
-              <a:t>29  /  33</a:t>
+              <a:t>32  /  36</a:t>
             </a:r>
             <a:endParaRPr lang="en-US" sz="1100" dirty="0"/>
           </a:p>
@@ -24956,7 +24959,7 @@
                 <a:ea typeface="Calibri" panose="020F0502020204030204" pitchFamily="34" charset="-122"/>
                 <a:cs typeface="Calibri" panose="020F0502020204030204" pitchFamily="34" charset="-120"/>
               </a:rPr>
-              <a:t>30  /  33</a:t>
+              <a:t>33  /  36</a:t>
             </a:r>
             <a:endParaRPr lang="en-US" sz="1100" dirty="0"/>
           </a:p>
@@ -26359,7 +26362,7 @@
                 <a:ea typeface="Calibri" panose="020F0502020204030204" pitchFamily="34" charset="-122"/>
                 <a:cs typeface="Calibri" panose="020F0502020204030204" pitchFamily="34" charset="-120"/>
               </a:rPr>
-              <a:t>31  /  33</a:t>
+              <a:t>34  /  36</a:t>
             </a:r>
             <a:endParaRPr lang="en-US" sz="1100" dirty="0"/>
           </a:p>
@@ -27888,7 +27891,7 @@
                 <a:ea typeface="Calibri" panose="020F0502020204030204" pitchFamily="34" charset="-122"/>
                 <a:cs typeface="Calibri" panose="020F0502020204030204" pitchFamily="34" charset="-120"/>
               </a:rPr>
-              <a:t>32  /  33</a:t>
+              <a:t>35  /  36</a:t>
             </a:r>
             <a:endParaRPr lang="en-US" sz="1100" dirty="0"/>
           </a:p>
@@ -28548,7 +28551,7 @@
                 <a:ea typeface="Calibri" panose="020F0502020204030204" pitchFamily="34" charset="-122"/>
                 <a:cs typeface="Calibri" panose="020F0502020204030204" pitchFamily="34" charset="-120"/>
               </a:rPr>
-              <a:t>33  /  33</a:t>
+              <a:t>36  /  36</a:t>
             </a:r>
             <a:endParaRPr lang="en-US" sz="1100" dirty="0"/>
           </a:p>
@@ -29044,7 +29047,7 @@
                 <a:ea typeface="Calibri" panose="020F0502020204030204" pitchFamily="34" charset="-122"/>
                 <a:cs typeface="Calibri" panose="020F0502020204030204" pitchFamily="34" charset="-120"/>
               </a:rPr>
-              <a:t>03  /  33</a:t>
+              <a:t>03  /  36</a:t>
             </a:r>
             <a:endParaRPr lang="en-US" sz="1100" dirty="0"/>
           </a:p>
@@ -29970,7 +29973,7 @@
                 <a:ea typeface="Calibri" panose="020F0502020204030204" pitchFamily="34" charset="-122"/>
                 <a:cs typeface="Calibri" panose="020F0502020204030204" pitchFamily="34" charset="-120"/>
               </a:rPr>
-              <a:t>18  /  33</a:t>
+              <a:t>18  /  36</a:t>
             </a:r>
             <a:endParaRPr lang="en-US" sz="1100" dirty="0"/>
           </a:p>
@@ -31567,7 +31570,7 @@
                 <a:ea typeface="Calibri" panose="020F0502020204030204" pitchFamily="34" charset="-122"/>
                 <a:cs typeface="Calibri" panose="020F0502020204030204" pitchFamily="34" charset="-120"/>
               </a:rPr>
-              <a:t>19  /  33</a:t>
+              <a:t>20  /  36</a:t>
             </a:r>
             <a:endParaRPr lang="en-US" sz="1100" dirty="0"/>
           </a:p>
@@ -33164,7 +33167,7 @@
                 <a:ea typeface="Calibri" panose="020F0502020204030204" pitchFamily="34" charset="-122"/>
                 <a:cs typeface="Calibri" panose="020F0502020204030204" pitchFamily="34" charset="-120"/>
               </a:rPr>
-              <a:t>20  /  33</a:t>
+              <a:t>22  /  36</a:t>
             </a:r>
             <a:endParaRPr lang="en-US" sz="1100" dirty="0"/>
           </a:p>
@@ -34206,7 +34209,7 @@
                 <a:ea typeface="Calibri" panose="020F0502020204030204" pitchFamily="34" charset="-122"/>
                 <a:cs typeface="Calibri" panose="020F0502020204030204" pitchFamily="34" charset="-120"/>
               </a:rPr>
-              <a:t>21  /  33</a:t>
+              <a:t>23  /  36</a:t>
             </a:r>
             <a:endParaRPr lang="en-US" sz="1100" dirty="0"/>
           </a:p>
@@ -35099,6 +35102,795 @@
 </p:sld>
 </file>
 
+<file path=ppt/slides/slide34.xml><?xml version="1.0" encoding="utf-8"?>
+<p:sld xmlns:a="http://schemas.openxmlformats.org/drawingml/2006/main" xmlns:p="http://schemas.openxmlformats.org/presentationml/2006/main" xmlns:r="http://schemas.openxmlformats.org/officeDocument/2006/relationships">
+  <p:cSld>
+    <p:spTree>
+      <p:nvGrpSpPr>
+        <p:cNvPr id="1" name=""/>
+        <p:cNvGrpSpPr/>
+        <p:nvPr/>
+      </p:nvGrpSpPr>
+      <p:grpSpPr/>
+      <p:sp>
+        <p:nvSpPr>
+          <p:cNvPr id="2" name="Shape 0"/>
+          <p:cNvSpPr/>
+          <p:nvPr/>
+        </p:nvSpPr>
+        <p:spPr>
+          <a:xfrm>
+            <a:off x="0" y="0"/>
+            <a:ext cx="12191695" cy="6858000"/>
+          </a:xfrm>
+          <a:prstGeom prst="rect">
+            <a:avLst/>
+          </a:prstGeom>
+          <a:solidFill>
+            <a:srgbClr val="F4EFE6"/>
+          </a:solidFill>
+        </p:spPr>
+        <p:txBody>
+          <a:bodyPr/>
+          <a:p/>
+        </p:txBody>
+      </p:sp>
+      <p:sp>
+        <p:nvSpPr>
+          <p:cNvPr id="3" name="Shape 1"/>
+          <p:cNvSpPr/>
+          <p:nvPr/>
+        </p:nvSpPr>
+        <p:spPr>
+          <a:xfrm>
+            <a:off x="0" y="0"/>
+            <a:ext cx="91440" cy="6858000"/>
+          </a:xfrm>
+          <a:prstGeom prst="rect">
+            <a:avLst/>
+          </a:prstGeom>
+          <a:solidFill>
+            <a:srgbClr val="C4622D"/>
+          </a:solidFill>
+        </p:spPr>
+        <p:txBody>
+          <a:bodyPr/>
+          <a:p/>
+        </p:txBody>
+      </p:sp>
+      <p:sp>
+        <p:nvSpPr>
+          <p:cNvPr id="4" name="Shape 2"/>
+          <p:cNvSpPr/>
+          <p:nvPr/>
+        </p:nvSpPr>
+        <p:spPr>
+          <a:xfrm>
+            <a:off x="0" y="6601968"/>
+            <a:ext cx="12191695" cy="256032"/>
+          </a:xfrm>
+          <a:prstGeom prst="rect">
+            <a:avLst/>
+          </a:prstGeom>
+          <a:solidFill>
+            <a:srgbClr val="1A1814"/>
+          </a:solidFill>
+        </p:spPr>
+        <p:txBody>
+          <a:bodyPr/>
+          <a:p/>
+        </p:txBody>
+      </p:sp>
+      <p:sp>
+        <p:nvSpPr>
+          <p:cNvPr id="5" name="Text 3"/>
+          <p:cNvSpPr/>
+          <p:nvPr/>
+        </p:nvSpPr>
+        <p:spPr>
+          <a:xfrm>
+            <a:off x="347472" y="6601968"/>
+            <a:ext cx="9144000" cy="256032"/>
+          </a:xfrm>
+          <a:prstGeom prst="rect">
+            <a:avLst/>
+          </a:prstGeom>
+          <a:noFill/>
+        </p:spPr>
+        <p:txBody>
+          <a:bodyPr wrap="square" lIns="0" tIns="0" rIns="0" bIns="0" rtlCol="0" anchor="ctr"/>
+          <a:lstStyle/>
+          <a:p>
+            <a:pPr marL="0" indent="0">
+              <a:buNone/>
+            </a:pPr>
+            <a:r>
+              <a:rPr lang="en-US" sz="1100" dirty="0">
+                <a:solidFill>
+                  <a:srgbClr val="E7DCC8"/>
+                </a:solidFill>
+                <a:latin typeface="Calibri" panose="020F0502020204030204" pitchFamily="34" charset="0"/>
+                <a:ea typeface="Calibri" panose="020F0502020204030204" pitchFamily="34" charset="-122"/>
+                <a:cs typeface="Calibri" panose="020F0502020204030204" pitchFamily="34" charset="-120"/>
+              </a:rPr>
+              <a:t>HUNI   ·   Proposal website kos &amp; kontrakan   ·   Oktober 2026</a:t>
+            </a:r>
+            <a:endParaRPr lang="en-US" sz="1100" dirty="0"/>
+          </a:p>
+        </p:txBody>
+      </p:sp>
+      <p:sp>
+        <p:nvSpPr>
+          <p:cNvPr id="6" name="Text 4"/>
+          <p:cNvSpPr/>
+          <p:nvPr/>
+        </p:nvSpPr>
+        <p:spPr>
+          <a:xfrm>
+            <a:off x="9509760" y="6601968"/>
+            <a:ext cx="2331720" cy="256032"/>
+          </a:xfrm>
+          <a:prstGeom prst="rect">
+            <a:avLst/>
+          </a:prstGeom>
+          <a:noFill/>
+        </p:spPr>
+        <p:txBody>
+          <a:bodyPr wrap="square" lIns="0" tIns="0" rIns="0" bIns="0" rtlCol="0" anchor="ctr"/>
+          <a:lstStyle/>
+          <a:p>
+            <a:pPr marL="0" indent="0" algn="r">
+              <a:buNone/>
+            </a:pPr>
+            <a:r>
+              <a:rPr lang="en-US" sz="1100" dirty="0">
+                <a:solidFill>
+                  <a:srgbClr val="E7DCC8"/>
+                </a:solidFill>
+                <a:latin typeface="Calibri" panose="020F0502020204030204" pitchFamily="34" charset="0"/>
+                <a:ea typeface="Calibri" panose="020F0502020204030204" pitchFamily="34" charset="-122"/>
+                <a:cs typeface="Calibri" panose="020F0502020204030204" pitchFamily="34" charset="-120"/>
+              </a:rPr>
+              <a:t>19  /  36</a:t>
+            </a:r>
+            <a:endParaRPr lang="en-US" sz="1100" dirty="0"/>
+          </a:p>
+        </p:txBody>
+      </p:sp>
+      <p:sp>
+        <p:nvSpPr>
+          <p:cNvPr id="7" name="Text 5"/>
+          <p:cNvSpPr/>
+          <p:nvPr/>
+        </p:nvSpPr>
+        <p:spPr>
+          <a:xfrm>
+            <a:off x="426709" y="304792"/>
+            <a:ext cx="11338277" cy="731502"/>
+          </a:xfrm>
+          <a:prstGeom prst="rect">
+            <a:avLst/>
+          </a:prstGeom>
+          <a:noFill/>
+        </p:spPr>
+        <p:txBody>
+          <a:bodyPr wrap="square" lIns="0" tIns="0" rIns="0" bIns="0" rtlCol="0" anchor="ctr"/>
+          <a:lstStyle/>
+          <a:p>
+            <a:pPr marL="0" indent="0">
+              <a:buNone/>
+            </a:pPr>
+            <a:r>
+              <a:rPr lang="en-US" sz="3120" b="1" dirty="0">
+                <a:solidFill>
+                  <a:srgbClr val="1A1814"/>
+                </a:solidFill>
+                <a:latin typeface="Georgia" panose="02040502050405020303" pitchFamily="34" charset="0"/>
+                <a:ea typeface="Georgia" panose="02040502050405020303" pitchFamily="34" charset="-122"/>
+                <a:cs typeface="Georgia" panose="02040502050405020303" pitchFamily="34" charset="-120"/>
+              </a:rPr>
+              <a:t>Contoh tampilan: ringkasan dan pembayaran</a:t>
+            </a:r>
+            <a:endParaRPr lang="en-US" sz="3120" dirty="0"/>
+          </a:p>
+        </p:txBody>
+      </p:sp>
+      <p:sp>
+        <p:nvSpPr>
+          <p:cNvPr id="8" name="Text 6"/>
+          <p:cNvSpPr/>
+          <p:nvPr/>
+        </p:nvSpPr>
+        <p:spPr>
+          <a:xfrm>
+            <a:off x="426709" y="1072869"/>
+            <a:ext cx="11338277" cy="487668"/>
+          </a:xfrm>
+          <a:prstGeom prst="rect">
+            <a:avLst/>
+          </a:prstGeom>
+          <a:noFill/>
+        </p:spPr>
+        <p:txBody>
+          <a:bodyPr wrap="square" lIns="0" tIns="0" rIns="0" bIns="0" rtlCol="0" anchor="ctr"/>
+          <a:lstStyle/>
+          <a:p>
+            <a:pPr marL="0" indent="0">
+              <a:buNone/>
+            </a:pPr>
+            <a:r>
+              <a:rPr lang="en-US" sz="1560" dirty="0">
+                <a:solidFill>
+                  <a:srgbClr val="6F675C"/>
+                </a:solidFill>
+                <a:latin typeface="Calibri" panose="020F0502020204030204" pitchFamily="34" charset="0"/>
+                <a:ea typeface="Calibri" panose="020F0502020204030204" pitchFamily="34" charset="-122"/>
+                <a:cs typeface="Calibri" panose="020F0502020204030204" pitchFamily="34" charset="-120"/>
+              </a:rPr>
+              <a:t>Tampilan admin. Hunian, keuangan cafe dan kos, tagihan sewa. Data contoh.</a:t>
+            </a:r>
+            <a:endParaRPr lang="en-US" sz="1560" dirty="0"/>
+          </a:p>
+        </p:txBody>
+      </p:sp>
+      <p:pic>
+        <p:nvPicPr>
+          <p:cNvPr id="9" name="Picture 8" descr="d1.png"/>
+          <p:cNvPicPr>
+            <a:picLocks noChangeAspect="1"/>
+          </p:cNvPicPr>
+          <p:nvPr/>
+        </p:nvPicPr>
+        <p:blipFill>
+          <a:blip r:embed="rId2"/>
+          <a:stretch>
+            <a:fillRect/>
+          </a:stretch>
+        </p:blipFill>
+        <p:spPr>
+          <a:xfrm>
+            <a:off x="429768" y="1645920"/>
+            <a:ext cx="11338560" cy="4754880"/>
+          </a:xfrm>
+          <a:prstGeom prst="rect">
+            <a:avLst/>
+          </a:prstGeom>
+        </p:spPr>
+      </p:pic>
+    </p:spTree>
+  </p:cSld>
+  <p:clrMapOvr>
+    <a:masterClrMapping/>
+  </p:clrMapOvr>
+</p:sld>
+</file>
+
+<file path=ppt/slides/slide35.xml><?xml version="1.0" encoding="utf-8"?>
+<p:sld xmlns:a="http://schemas.openxmlformats.org/drawingml/2006/main" xmlns:p="http://schemas.openxmlformats.org/presentationml/2006/main" xmlns:r="http://schemas.openxmlformats.org/officeDocument/2006/relationships">
+  <p:cSld>
+    <p:spTree>
+      <p:nvGrpSpPr>
+        <p:cNvPr id="1" name=""/>
+        <p:cNvGrpSpPr/>
+        <p:nvPr/>
+      </p:nvGrpSpPr>
+      <p:grpSpPr/>
+      <p:sp>
+        <p:nvSpPr>
+          <p:cNvPr id="2" name="Shape 0"/>
+          <p:cNvSpPr/>
+          <p:nvPr/>
+        </p:nvSpPr>
+        <p:spPr>
+          <a:xfrm>
+            <a:off x="0" y="0"/>
+            <a:ext cx="12191695" cy="6858000"/>
+          </a:xfrm>
+          <a:prstGeom prst="rect">
+            <a:avLst/>
+          </a:prstGeom>
+          <a:solidFill>
+            <a:srgbClr val="F4EFE6"/>
+          </a:solidFill>
+        </p:spPr>
+        <p:txBody>
+          <a:bodyPr/>
+          <a:p/>
+        </p:txBody>
+      </p:sp>
+      <p:sp>
+        <p:nvSpPr>
+          <p:cNvPr id="3" name="Shape 1"/>
+          <p:cNvSpPr/>
+          <p:nvPr/>
+        </p:nvSpPr>
+        <p:spPr>
+          <a:xfrm>
+            <a:off x="0" y="0"/>
+            <a:ext cx="91440" cy="6858000"/>
+          </a:xfrm>
+          <a:prstGeom prst="rect">
+            <a:avLst/>
+          </a:prstGeom>
+          <a:solidFill>
+            <a:srgbClr val="C4622D"/>
+          </a:solidFill>
+        </p:spPr>
+        <p:txBody>
+          <a:bodyPr/>
+          <a:p/>
+        </p:txBody>
+      </p:sp>
+      <p:sp>
+        <p:nvSpPr>
+          <p:cNvPr id="4" name="Shape 2"/>
+          <p:cNvSpPr/>
+          <p:nvPr/>
+        </p:nvSpPr>
+        <p:spPr>
+          <a:xfrm>
+            <a:off x="0" y="6601968"/>
+            <a:ext cx="12191695" cy="256032"/>
+          </a:xfrm>
+          <a:prstGeom prst="rect">
+            <a:avLst/>
+          </a:prstGeom>
+          <a:solidFill>
+            <a:srgbClr val="1A1814"/>
+          </a:solidFill>
+        </p:spPr>
+        <p:txBody>
+          <a:bodyPr/>
+          <a:p/>
+        </p:txBody>
+      </p:sp>
+      <p:sp>
+        <p:nvSpPr>
+          <p:cNvPr id="5" name="Text 3"/>
+          <p:cNvSpPr/>
+          <p:nvPr/>
+        </p:nvSpPr>
+        <p:spPr>
+          <a:xfrm>
+            <a:off x="347472" y="6601968"/>
+            <a:ext cx="9144000" cy="256032"/>
+          </a:xfrm>
+          <a:prstGeom prst="rect">
+            <a:avLst/>
+          </a:prstGeom>
+          <a:noFill/>
+        </p:spPr>
+        <p:txBody>
+          <a:bodyPr wrap="square" lIns="0" tIns="0" rIns="0" bIns="0" rtlCol="0" anchor="ctr"/>
+          <a:lstStyle/>
+          <a:p>
+            <a:pPr marL="0" indent="0">
+              <a:buNone/>
+            </a:pPr>
+            <a:r>
+              <a:rPr lang="en-US" sz="1100" dirty="0">
+                <a:solidFill>
+                  <a:srgbClr val="E7DCC8"/>
+                </a:solidFill>
+                <a:latin typeface="Calibri" panose="020F0502020204030204" pitchFamily="34" charset="0"/>
+                <a:ea typeface="Calibri" panose="020F0502020204030204" pitchFamily="34" charset="-122"/>
+                <a:cs typeface="Calibri" panose="020F0502020204030204" pitchFamily="34" charset="-120"/>
+              </a:rPr>
+              <a:t>HUNI   ·   Proposal website kos &amp; kontrakan   ·   Oktober 2026</a:t>
+            </a:r>
+            <a:endParaRPr lang="en-US" sz="1100" dirty="0"/>
+          </a:p>
+        </p:txBody>
+      </p:sp>
+      <p:sp>
+        <p:nvSpPr>
+          <p:cNvPr id="6" name="Text 4"/>
+          <p:cNvSpPr/>
+          <p:nvPr/>
+        </p:nvSpPr>
+        <p:spPr>
+          <a:xfrm>
+            <a:off x="9509760" y="6601968"/>
+            <a:ext cx="2331720" cy="256032"/>
+          </a:xfrm>
+          <a:prstGeom prst="rect">
+            <a:avLst/>
+          </a:prstGeom>
+          <a:noFill/>
+        </p:spPr>
+        <p:txBody>
+          <a:bodyPr wrap="square" lIns="0" tIns="0" rIns="0" bIns="0" rtlCol="0" anchor="ctr"/>
+          <a:lstStyle/>
+          <a:p>
+            <a:pPr marL="0" indent="0" algn="r">
+              <a:buNone/>
+            </a:pPr>
+            <a:r>
+              <a:rPr lang="en-US" sz="1100" dirty="0">
+                <a:solidFill>
+                  <a:srgbClr val="E7DCC8"/>
+                </a:solidFill>
+                <a:latin typeface="Calibri" panose="020F0502020204030204" pitchFamily="34" charset="0"/>
+                <a:ea typeface="Calibri" panose="020F0502020204030204" pitchFamily="34" charset="-122"/>
+                <a:cs typeface="Calibri" panose="020F0502020204030204" pitchFamily="34" charset="-120"/>
+              </a:rPr>
+              <a:t>21  /  36</a:t>
+            </a:r>
+            <a:endParaRPr lang="en-US" sz="1100" dirty="0"/>
+          </a:p>
+        </p:txBody>
+      </p:sp>
+      <p:sp>
+        <p:nvSpPr>
+          <p:cNvPr id="7" name="Text 5"/>
+          <p:cNvSpPr/>
+          <p:nvPr/>
+        </p:nvSpPr>
+        <p:spPr>
+          <a:xfrm>
+            <a:off x="426709" y="304792"/>
+            <a:ext cx="11338277" cy="731502"/>
+          </a:xfrm>
+          <a:prstGeom prst="rect">
+            <a:avLst/>
+          </a:prstGeom>
+          <a:noFill/>
+        </p:spPr>
+        <p:txBody>
+          <a:bodyPr wrap="square" lIns="0" tIns="0" rIns="0" bIns="0" rtlCol="0" anchor="ctr"/>
+          <a:lstStyle/>
+          <a:p>
+            <a:pPr marL="0" indent="0">
+              <a:buNone/>
+            </a:pPr>
+            <a:r>
+              <a:rPr lang="en-US" sz="3120" b="1" dirty="0">
+                <a:solidFill>
+                  <a:srgbClr val="1A1814"/>
+                </a:solidFill>
+                <a:latin typeface="Georgia" panose="02040502050405020303" pitchFamily="34" charset="0"/>
+                <a:ea typeface="Georgia" panose="02040502050405020303" pitchFamily="34" charset="-122"/>
+                <a:cs typeface="Georgia" panose="02040502050405020303" pitchFamily="34" charset="-120"/>
+              </a:rPr>
+              <a:t>Contoh tampilan: penjualan dan gudang FIFO</a:t>
+            </a:r>
+            <a:endParaRPr lang="en-US" sz="3120" dirty="0"/>
+          </a:p>
+        </p:txBody>
+      </p:sp>
+      <p:sp>
+        <p:nvSpPr>
+          <p:cNvPr id="8" name="Text 6"/>
+          <p:cNvSpPr/>
+          <p:nvPr/>
+        </p:nvSpPr>
+        <p:spPr>
+          <a:xfrm>
+            <a:off x="426709" y="1072869"/>
+            <a:ext cx="11338277" cy="487668"/>
+          </a:xfrm>
+          <a:prstGeom prst="rect">
+            <a:avLst/>
+          </a:prstGeom>
+          <a:noFill/>
+        </p:spPr>
+        <p:txBody>
+          <a:bodyPr wrap="square" lIns="0" tIns="0" rIns="0" bIns="0" rtlCol="0" anchor="ctr"/>
+          <a:lstStyle/>
+          <a:p>
+            <a:pPr marL="0" indent="0">
+              <a:buNone/>
+            </a:pPr>
+            <a:r>
+              <a:rPr lang="en-US" sz="1560" dirty="0">
+                <a:solidFill>
+                  <a:srgbClr val="6F675C"/>
+                </a:solidFill>
+                <a:latin typeface="Calibri" panose="020F0502020204030204" pitchFamily="34" charset="0"/>
+                <a:ea typeface="Calibri" panose="020F0502020204030204" pitchFamily="34" charset="-122"/>
+                <a:cs typeface="Calibri" panose="020F0502020204030204" pitchFamily="34" charset="-120"/>
+              </a:rPr>
+              <a:t>Jual 1 Kopi Susu Aren, stok kopi, susu, gula aren turun dari batch tertua. Data contoh.</a:t>
+            </a:r>
+            <a:endParaRPr lang="en-US" sz="1560" dirty="0"/>
+          </a:p>
+        </p:txBody>
+      </p:sp>
+      <p:pic>
+        <p:nvPicPr>
+          <p:cNvPr id="9" name="Picture 8" descr="d2.png"/>
+          <p:cNvPicPr>
+            <a:picLocks noChangeAspect="1"/>
+          </p:cNvPicPr>
+          <p:nvPr/>
+        </p:nvPicPr>
+        <p:blipFill>
+          <a:blip r:embed="rId2"/>
+          <a:stretch>
+            <a:fillRect/>
+          </a:stretch>
+        </p:blipFill>
+        <p:spPr>
+          <a:xfrm>
+            <a:off x="429768" y="1645920"/>
+            <a:ext cx="11338560" cy="4754880"/>
+          </a:xfrm>
+          <a:prstGeom prst="rect">
+            <a:avLst/>
+          </a:prstGeom>
+        </p:spPr>
+      </p:pic>
+    </p:spTree>
+  </p:cSld>
+  <p:clrMapOvr>
+    <a:masterClrMapping/>
+  </p:clrMapOvr>
+</p:sld>
+</file>
+
+<file path=ppt/slides/slide36.xml><?xml version="1.0" encoding="utf-8"?>
+<p:sld xmlns:a="http://schemas.openxmlformats.org/drawingml/2006/main" xmlns:p="http://schemas.openxmlformats.org/presentationml/2006/main" xmlns:r="http://schemas.openxmlformats.org/officeDocument/2006/relationships">
+  <p:cSld>
+    <p:spTree>
+      <p:nvGrpSpPr>
+        <p:cNvPr id="1" name=""/>
+        <p:cNvGrpSpPr/>
+        <p:nvPr/>
+      </p:nvGrpSpPr>
+      <p:grpSpPr/>
+      <p:sp>
+        <p:nvSpPr>
+          <p:cNvPr id="2" name="Shape 0"/>
+          <p:cNvSpPr/>
+          <p:nvPr/>
+        </p:nvSpPr>
+        <p:spPr>
+          <a:xfrm>
+            <a:off x="0" y="0"/>
+            <a:ext cx="12191695" cy="6858000"/>
+          </a:xfrm>
+          <a:prstGeom prst="rect">
+            <a:avLst/>
+          </a:prstGeom>
+          <a:solidFill>
+            <a:srgbClr val="F4EFE6"/>
+          </a:solidFill>
+        </p:spPr>
+        <p:txBody>
+          <a:bodyPr/>
+          <a:p/>
+        </p:txBody>
+      </p:sp>
+      <p:sp>
+        <p:nvSpPr>
+          <p:cNvPr id="3" name="Shape 1"/>
+          <p:cNvSpPr/>
+          <p:nvPr/>
+        </p:nvSpPr>
+        <p:spPr>
+          <a:xfrm>
+            <a:off x="0" y="0"/>
+            <a:ext cx="91440" cy="6858000"/>
+          </a:xfrm>
+          <a:prstGeom prst="rect">
+            <a:avLst/>
+          </a:prstGeom>
+          <a:solidFill>
+            <a:srgbClr val="C4622D"/>
+          </a:solidFill>
+        </p:spPr>
+        <p:txBody>
+          <a:bodyPr/>
+          <a:p/>
+        </p:txBody>
+      </p:sp>
+      <p:sp>
+        <p:nvSpPr>
+          <p:cNvPr id="4" name="Shape 2"/>
+          <p:cNvSpPr/>
+          <p:nvPr/>
+        </p:nvSpPr>
+        <p:spPr>
+          <a:xfrm>
+            <a:off x="0" y="6601968"/>
+            <a:ext cx="12191695" cy="256032"/>
+          </a:xfrm>
+          <a:prstGeom prst="rect">
+            <a:avLst/>
+          </a:prstGeom>
+          <a:solidFill>
+            <a:srgbClr val="1A1814"/>
+          </a:solidFill>
+        </p:spPr>
+        <p:txBody>
+          <a:bodyPr/>
+          <a:p/>
+        </p:txBody>
+      </p:sp>
+      <p:sp>
+        <p:nvSpPr>
+          <p:cNvPr id="5" name="Text 3"/>
+          <p:cNvSpPr/>
+          <p:nvPr/>
+        </p:nvSpPr>
+        <p:spPr>
+          <a:xfrm>
+            <a:off x="347472" y="6601968"/>
+            <a:ext cx="9144000" cy="256032"/>
+          </a:xfrm>
+          <a:prstGeom prst="rect">
+            <a:avLst/>
+          </a:prstGeom>
+          <a:noFill/>
+        </p:spPr>
+        <p:txBody>
+          <a:bodyPr wrap="square" lIns="0" tIns="0" rIns="0" bIns="0" rtlCol="0" anchor="ctr"/>
+          <a:lstStyle/>
+          <a:p>
+            <a:pPr marL="0" indent="0">
+              <a:buNone/>
+            </a:pPr>
+            <a:r>
+              <a:rPr lang="en-US" sz="1100" dirty="0">
+                <a:solidFill>
+                  <a:srgbClr val="E7DCC8"/>
+                </a:solidFill>
+                <a:latin typeface="Calibri" panose="020F0502020204030204" pitchFamily="34" charset="0"/>
+                <a:ea typeface="Calibri" panose="020F0502020204030204" pitchFamily="34" charset="-122"/>
+                <a:cs typeface="Calibri" panose="020F0502020204030204" pitchFamily="34" charset="-120"/>
+              </a:rPr>
+              <a:t>HUNI   ·   Proposal website kos &amp; kontrakan   ·   Oktober 2026</a:t>
+            </a:r>
+            <a:endParaRPr lang="en-US" sz="1100" dirty="0"/>
+          </a:p>
+        </p:txBody>
+      </p:sp>
+      <p:sp>
+        <p:nvSpPr>
+          <p:cNvPr id="6" name="Text 4"/>
+          <p:cNvSpPr/>
+          <p:nvPr/>
+        </p:nvSpPr>
+        <p:spPr>
+          <a:xfrm>
+            <a:off x="9509760" y="6601968"/>
+            <a:ext cx="2331720" cy="256032"/>
+          </a:xfrm>
+          <a:prstGeom prst="rect">
+            <a:avLst/>
+          </a:prstGeom>
+          <a:noFill/>
+        </p:spPr>
+        <p:txBody>
+          <a:bodyPr wrap="square" lIns="0" tIns="0" rIns="0" bIns="0" rtlCol="0" anchor="ctr"/>
+          <a:lstStyle/>
+          <a:p>
+            <a:pPr marL="0" indent="0" algn="r">
+              <a:buNone/>
+            </a:pPr>
+            <a:r>
+              <a:rPr lang="en-US" sz="1100" dirty="0">
+                <a:solidFill>
+                  <a:srgbClr val="E7DCC8"/>
+                </a:solidFill>
+                <a:latin typeface="Calibri" panose="020F0502020204030204" pitchFamily="34" charset="0"/>
+                <a:ea typeface="Calibri" panose="020F0502020204030204" pitchFamily="34" charset="-122"/>
+                <a:cs typeface="Calibri" panose="020F0502020204030204" pitchFamily="34" charset="-120"/>
+              </a:rPr>
+              <a:t>24  /  36</a:t>
+            </a:r>
+            <a:endParaRPr lang="en-US" sz="1100" dirty="0"/>
+          </a:p>
+        </p:txBody>
+      </p:sp>
+      <p:sp>
+        <p:nvSpPr>
+          <p:cNvPr id="7" name="Text 5"/>
+          <p:cNvSpPr/>
+          <p:nvPr/>
+        </p:nvSpPr>
+        <p:spPr>
+          <a:xfrm>
+            <a:off x="426709" y="304792"/>
+            <a:ext cx="11338277" cy="731502"/>
+          </a:xfrm>
+          <a:prstGeom prst="rect">
+            <a:avLst/>
+          </a:prstGeom>
+          <a:noFill/>
+        </p:spPr>
+        <p:txBody>
+          <a:bodyPr wrap="square" lIns="0" tIns="0" rIns="0" bIns="0" rtlCol="0" anchor="ctr"/>
+          <a:lstStyle/>
+          <a:p>
+            <a:pPr marL="0" indent="0">
+              <a:buNone/>
+            </a:pPr>
+            <a:r>
+              <a:rPr lang="en-US" sz="3120" b="1" dirty="0">
+                <a:solidFill>
+                  <a:srgbClr val="1A1814"/>
+                </a:solidFill>
+                <a:latin typeface="Georgia" panose="02040502050405020303" pitchFamily="34" charset="0"/>
+                <a:ea typeface="Georgia" panose="02040502050405020303" pitchFamily="34" charset="-122"/>
+                <a:cs typeface="Georgia" panose="02040502050405020303" pitchFamily="34" charset="-120"/>
+              </a:rPr>
+              <a:t>Contoh tampilan: R&amp;D menu dan KOL</a:t>
+            </a:r>
+            <a:endParaRPr lang="en-US" sz="3120" dirty="0"/>
+          </a:p>
+        </p:txBody>
+      </p:sp>
+      <p:sp>
+        <p:nvSpPr>
+          <p:cNvPr id="8" name="Text 6"/>
+          <p:cNvSpPr/>
+          <p:nvPr/>
+        </p:nvSpPr>
+        <p:spPr>
+          <a:xfrm>
+            <a:off x="426709" y="1072869"/>
+            <a:ext cx="11338277" cy="487668"/>
+          </a:xfrm>
+          <a:prstGeom prst="rect">
+            <a:avLst/>
+          </a:prstGeom>
+          <a:noFill/>
+        </p:spPr>
+        <p:txBody>
+          <a:bodyPr wrap="square" lIns="0" tIns="0" rIns="0" bIns="0" rtlCol="0" anchor="ctr"/>
+          <a:lstStyle/>
+          <a:p>
+            <a:pPr marL="0" indent="0">
+              <a:buNone/>
+            </a:pPr>
+            <a:r>
+              <a:rPr lang="en-US" sz="1560" dirty="0">
+                <a:solidFill>
+                  <a:srgbClr val="6F675C"/>
+                </a:solidFill>
+                <a:latin typeface="Calibri" panose="020F0502020204030204" pitchFamily="34" charset="0"/>
+                <a:ea typeface="Calibri" panose="020F0502020204030204" pitchFamily="34" charset="-122"/>
+                <a:cs typeface="Calibri" panose="020F0502020204030204" pitchFamily="34" charset="-120"/>
+              </a:rPr>
+              <a:t>Breakdown resep per menu dan ROI tiap KOL. Data contoh.</a:t>
+            </a:r>
+            <a:endParaRPr lang="en-US" sz="1560" dirty="0"/>
+          </a:p>
+        </p:txBody>
+      </p:sp>
+      <p:pic>
+        <p:nvPicPr>
+          <p:cNvPr id="9" name="Picture 8" descr="d3.png"/>
+          <p:cNvPicPr>
+            <a:picLocks noChangeAspect="1"/>
+          </p:cNvPicPr>
+          <p:nvPr/>
+        </p:nvPicPr>
+        <p:blipFill>
+          <a:blip r:embed="rId2"/>
+          <a:stretch>
+            <a:fillRect/>
+          </a:stretch>
+        </p:blipFill>
+        <p:spPr>
+          <a:xfrm>
+            <a:off x="429768" y="1645920"/>
+            <a:ext cx="11338560" cy="4754880"/>
+          </a:xfrm>
+          <a:prstGeom prst="rect">
+            <a:avLst/>
+          </a:prstGeom>
+        </p:spPr>
+      </p:pic>
+    </p:spTree>
+  </p:cSld>
+  <p:clrMapOvr>
+    <a:masterClrMapping/>
+  </p:clrMapOvr>
+</p:sld>
+</file>
+
 <file path=ppt/slides/slide4.xml><?xml version="1.0" encoding="utf-8"?>
 <p:sld xmlns:a="http://schemas.openxmlformats.org/drawingml/2006/main" xmlns:r="http://schemas.openxmlformats.org/officeDocument/2006/relationships" xmlns:p="http://schemas.openxmlformats.org/presentationml/2006/main">
   <p:cSld>
@@ -35255,7 +36047,7 @@
                 <a:ea typeface="Calibri" panose="020F0502020204030204" pitchFamily="34" charset="-122"/>
                 <a:cs typeface="Calibri" panose="020F0502020204030204" pitchFamily="34" charset="-120"/>
               </a:rPr>
-              <a:t>04  /  33</a:t>
+              <a:t>04  /  36</a:t>
             </a:r>
             <a:endParaRPr lang="en-US" sz="1100" dirty="0"/>
           </a:p>
@@ -35981,7 +36773,7 @@
                 <a:ea typeface="Calibri" panose="020F0502020204030204" pitchFamily="34" charset="-122"/>
                 <a:cs typeface="Calibri" panose="020F0502020204030204" pitchFamily="34" charset="-120"/>
               </a:rPr>
-              <a:t>05  /  33</a:t>
+              <a:t>05  /  36</a:t>
             </a:r>
             <a:endParaRPr lang="en-US" sz="1100" dirty="0"/>
           </a:p>
@@ -36517,7 +37309,7 @@
                 <a:ea typeface="Calibri" panose="020F0502020204030204" pitchFamily="34" charset="-122"/>
                 <a:cs typeface="Calibri" panose="020F0502020204030204" pitchFamily="34" charset="-120"/>
               </a:rPr>
-              <a:t>06  /  33</a:t>
+              <a:t>06  /  36</a:t>
             </a:r>
             <a:endParaRPr lang="en-US" sz="1100" dirty="0"/>
           </a:p>
@@ -37053,7 +37845,7 @@
                 <a:ea typeface="Calibri" panose="020F0502020204030204" pitchFamily="34" charset="-122"/>
                 <a:cs typeface="Calibri" panose="020F0502020204030204" pitchFamily="34" charset="-120"/>
               </a:rPr>
-              <a:t>07  /  33</a:t>
+              <a:t>07  /  36</a:t>
             </a:r>
             <a:endParaRPr lang="en-US" sz="1100" dirty="0"/>
           </a:p>
@@ -37589,7 +38381,7 @@
                 <a:ea typeface="Calibri" panose="020F0502020204030204" pitchFamily="34" charset="-122"/>
                 <a:cs typeface="Calibri" panose="020F0502020204030204" pitchFamily="34" charset="-120"/>
               </a:rPr>
-              <a:t>08  /  33</a:t>
+              <a:t>08  /  36</a:t>
             </a:r>
             <a:endParaRPr lang="en-US" sz="1100" dirty="0"/>
           </a:p>
@@ -38125,7 +38917,7 @@
                 <a:ea typeface="Calibri" panose="020F0502020204030204" pitchFamily="34" charset="-122"/>
                 <a:cs typeface="Calibri" panose="020F0502020204030204" pitchFamily="34" charset="-120"/>
               </a:rPr>
-              <a:t>09  /  33</a:t>
+              <a:t>09  /  36</a:t>
             </a:r>
             <a:endParaRPr lang="en-US" sz="1100" dirty="0"/>
           </a:p>
